--- a/BSG_BIJOU_BRASIL_COMERCIO_VARE.pptx
+++ b/BSG_BIJOU_BRASIL_COMERCIO_VARE.pptx
@@ -162,10 +162,10 @@
                 <c:formatCode>General</c:formatCode>
                 <c:ptCount val="2"/>
                 <c:pt idx="0">
-                  <c:v>145</c:v>
+                  <c:v>0</c:v>
                 </c:pt>
                 <c:pt idx="1">
-                  <c:v>118</c:v>
+                  <c:v>115</c:v>
                 </c:pt>
               </c:numCache>
             </c:numRef>
@@ -214,7 +214,7 @@
                   <c:v>0</c:v>
                 </c:pt>
                 <c:pt idx="1">
-                  <c:v>6</c:v>
+                  <c:v>5</c:v>
                 </c:pt>
               </c:numCache>
             </c:numRef>
@@ -3688,7 +3688,7 @@
         <p:spPr>
           <a:xfrm>
             <a:off x="1005840" y="2240279"/>
-            <a:ext cx="2377439" cy="891540"/>
+            <a:ext cx="2377440" cy="868680"/>
           </a:xfrm>
           <a:prstGeom prst="rect">
             <a:avLst/>
@@ -3709,7 +3709,7 @@
                 </a:solidFill>
                 <a:latin typeface="Calibri"/>
               </a:rPr>
-              <a:t>124</a:t>
+              <a:t>120</a:t>
             </a:r>
           </a:p>
         </p:txBody>
@@ -3722,8 +3722,8 @@
         </p:nvSpPr>
         <p:spPr>
           <a:xfrm>
-            <a:off x="1005840" y="3058668"/>
-            <a:ext cx="2377439" cy="548640"/>
+            <a:off x="1005840" y="3090672"/>
+            <a:ext cx="2377440" cy="411480"/>
           </a:xfrm>
           <a:prstGeom prst="rect">
             <a:avLst/>
@@ -3803,7 +3803,7 @@
         <p:spPr>
           <a:xfrm>
             <a:off x="3931920" y="2240279"/>
-            <a:ext cx="2377439" cy="891540"/>
+            <a:ext cx="2377440" cy="868680"/>
           </a:xfrm>
           <a:prstGeom prst="rect">
             <a:avLst/>
@@ -3824,7 +3824,7 @@
                 </a:solidFill>
                 <a:latin typeface="Calibri"/>
               </a:rPr>
-              <a:t>118</a:t>
+              <a:t>115</a:t>
             </a:r>
           </a:p>
         </p:txBody>
@@ -3837,8 +3837,8 @@
         </p:nvSpPr>
         <p:spPr>
           <a:xfrm>
-            <a:off x="3931920" y="3058668"/>
-            <a:ext cx="2377439" cy="548640"/>
+            <a:off x="3931920" y="3090672"/>
+            <a:ext cx="2377440" cy="411480"/>
           </a:xfrm>
           <a:prstGeom prst="rect">
             <a:avLst/>
@@ -3918,7 +3918,7 @@
         <p:spPr>
           <a:xfrm>
             <a:off x="6858000" y="2240279"/>
-            <a:ext cx="2377439" cy="891540"/>
+            <a:ext cx="2377440" cy="868680"/>
           </a:xfrm>
           <a:prstGeom prst="rect">
             <a:avLst/>
@@ -3939,7 +3939,7 @@
                 </a:solidFill>
                 <a:latin typeface="Calibri"/>
               </a:rPr>
-              <a:t>6</a:t>
+              <a:t>5</a:t>
             </a:r>
           </a:p>
         </p:txBody>
@@ -3952,8 +3952,8 @@
         </p:nvSpPr>
         <p:spPr>
           <a:xfrm>
-            <a:off x="6858000" y="3058668"/>
-            <a:ext cx="2377439" cy="548640"/>
+            <a:off x="6858000" y="3090672"/>
+            <a:ext cx="2377440" cy="411480"/>
           </a:xfrm>
           <a:prstGeom prst="rect">
             <a:avLst/>
@@ -4033,7 +4033,7 @@
         <p:spPr>
           <a:xfrm>
             <a:off x="9784080" y="2240279"/>
-            <a:ext cx="2377439" cy="891540"/>
+            <a:ext cx="2377440" cy="868680"/>
           </a:xfrm>
           <a:prstGeom prst="rect">
             <a:avLst/>
@@ -4054,7 +4054,7 @@
                 </a:solidFill>
                 <a:latin typeface="Calibri"/>
               </a:rPr>
-              <a:t>95.2%</a:t>
+              <a:t>95.8%</a:t>
             </a:r>
           </a:p>
         </p:txBody>
@@ -4067,8 +4067,8 @@
         </p:nvSpPr>
         <p:spPr>
           <a:xfrm>
-            <a:off x="9784080" y="3058668"/>
-            <a:ext cx="2377439" cy="548640"/>
+            <a:off x="9784080" y="3090672"/>
+            <a:ext cx="2377440" cy="411480"/>
           </a:xfrm>
           <a:prstGeom prst="rect">
             <a:avLst/>
@@ -4121,7 +4121,7 @@
               <a:tr h="475488">
                 <a:tc>
                   <a:txBody>
-                    <a:bodyPr wrap="square"/>
+                    <a:bodyPr/>
                     <a:lstStyle/>
                     <a:p>
                       <a:pPr algn="ctr"/>
@@ -4144,7 +4144,7 @@
                 </a:tc>
                 <a:tc>
                   <a:txBody>
-                    <a:bodyPr wrap="square"/>
+                    <a:bodyPr/>
                     <a:lstStyle/>
                     <a:p>
                       <a:pPr algn="ctr"/>
@@ -4167,7 +4167,7 @@
                 </a:tc>
                 <a:tc>
                   <a:txBody>
-                    <a:bodyPr wrap="square"/>
+                    <a:bodyPr/>
                     <a:lstStyle/>
                     <a:p>
                       <a:pPr algn="ctr"/>
@@ -4190,7 +4190,7 @@
                 </a:tc>
                 <a:tc>
                   <a:txBody>
-                    <a:bodyPr wrap="square"/>
+                    <a:bodyPr/>
                     <a:lstStyle/>
                     <a:p>
                       <a:pPr algn="ctr"/>
@@ -4215,18 +4215,18 @@
               <a:tr h="475488">
                 <a:tc>
                   <a:txBody>
-                    <a:bodyPr wrap="square"/>
-                    <a:lstStyle/>
-                    <a:p>
-                      <a:pPr algn="l"/>
-                      <a:r>
-                        <a:rPr sz="1000" b="0">
-                          <a:solidFill>
-                            <a:srgbClr val="1D1B43"/>
-                          </a:solidFill>
-                          <a:latin typeface="Calibri"/>
-                        </a:rPr>
-                        <a:t>Total Entregas</a:t>
+                    <a:bodyPr/>
+                    <a:lstStyle/>
+                    <a:p>
+                      <a:pPr algn="l"/>
+                      <a:r>
+                        <a:rPr sz="1000" b="0">
+                          <a:solidFill>
+                            <a:srgbClr val="1D1B43"/>
+                          </a:solidFill>
+                          <a:latin typeface="Calibri"/>
+                        </a:rPr>
+                        <a:t>Total</a:t>
                       </a:r>
                     </a:p>
                   </a:txBody>
@@ -4238,18 +4238,18 @@
                 </a:tc>
                 <a:tc>
                   <a:txBody>
-                    <a:bodyPr wrap="square"/>
-                    <a:lstStyle/>
-                    <a:p>
-                      <a:pPr algn="l"/>
-                      <a:r>
-                        <a:rPr sz="1000" b="0">
-                          <a:solidFill>
-                            <a:srgbClr val="1D1B43"/>
-                          </a:solidFill>
-                          <a:latin typeface="Calibri"/>
-                        </a:rPr>
-                        <a:t>145</a:t>
+                    <a:bodyPr/>
+                    <a:lstStyle/>
+                    <a:p>
+                      <a:pPr algn="l"/>
+                      <a:r>
+                        <a:rPr sz="1000" b="0">
+                          <a:solidFill>
+                            <a:srgbClr val="1D1B43"/>
+                          </a:solidFill>
+                          <a:latin typeface="Calibri"/>
+                        </a:rPr>
+                        <a:t>0</a:t>
                       </a:r>
                     </a:p>
                   </a:txBody>
@@ -4261,18 +4261,18 @@
                 </a:tc>
                 <a:tc>
                   <a:txBody>
-                    <a:bodyPr wrap="square"/>
-                    <a:lstStyle/>
-                    <a:p>
-                      <a:pPr algn="l"/>
-                      <a:r>
-                        <a:rPr sz="1000" b="0">
-                          <a:solidFill>
-                            <a:srgbClr val="1D1B43"/>
-                          </a:solidFill>
-                          <a:latin typeface="Calibri"/>
-                        </a:rPr>
-                        <a:t>124</a:t>
+                    <a:bodyPr/>
+                    <a:lstStyle/>
+                    <a:p>
+                      <a:pPr algn="l"/>
+                      <a:r>
+                        <a:rPr sz="1000" b="0">
+                          <a:solidFill>
+                            <a:srgbClr val="1D1B43"/>
+                          </a:solidFill>
+                          <a:latin typeface="Calibri"/>
+                        </a:rPr>
+                        <a:t>120</a:t>
                       </a:r>
                     </a:p>
                   </a:txBody>
@@ -4284,18 +4284,18 @@
                 </a:tc>
                 <a:tc>
                   <a:txBody>
-                    <a:bodyPr wrap="square"/>
-                    <a:lstStyle/>
-                    <a:p>
-                      <a:pPr algn="l"/>
-                      <a:r>
-                        <a:rPr sz="1000" b="0">
-                          <a:solidFill>
-                            <a:srgbClr val="1D1B43"/>
-                          </a:solidFill>
-                          <a:latin typeface="Calibri"/>
-                        </a:rPr>
-                        <a:t>- 21</a:t>
+                    <a:bodyPr/>
+                    <a:lstStyle/>
+                    <a:p>
+                      <a:pPr algn="l"/>
+                      <a:r>
+                        <a:rPr sz="1000" b="0">
+                          <a:solidFill>
+                            <a:srgbClr val="1D1B43"/>
+                          </a:solidFill>
+                          <a:latin typeface="Calibri"/>
+                        </a:rPr>
+                        <a:t>+ 120</a:t>
                       </a:r>
                     </a:p>
                   </a:txBody>
@@ -4309,7 +4309,7 @@
               <a:tr h="475488">
                 <a:tc>
                   <a:txBody>
-                    <a:bodyPr wrap="square"/>
+                    <a:bodyPr/>
                     <a:lstStyle/>
                     <a:p>
                       <a:pPr algn="l"/>
@@ -4332,18 +4332,18 @@
                 </a:tc>
                 <a:tc>
                   <a:txBody>
-                    <a:bodyPr wrap="square"/>
-                    <a:lstStyle/>
-                    <a:p>
-                      <a:pPr algn="l"/>
-                      <a:r>
-                        <a:rPr sz="1000" b="0">
-                          <a:solidFill>
-                            <a:srgbClr val="1D1B43"/>
-                          </a:solidFill>
-                          <a:latin typeface="Calibri"/>
-                        </a:rPr>
-                        <a:t>145</a:t>
+                    <a:bodyPr/>
+                    <a:lstStyle/>
+                    <a:p>
+                      <a:pPr algn="l"/>
+                      <a:r>
+                        <a:rPr sz="1000" b="0">
+                          <a:solidFill>
+                            <a:srgbClr val="1D1B43"/>
+                          </a:solidFill>
+                          <a:latin typeface="Calibri"/>
+                        </a:rPr>
+                        <a:t>0</a:t>
                       </a:r>
                     </a:p>
                   </a:txBody>
@@ -4355,18 +4355,18 @@
                 </a:tc>
                 <a:tc>
                   <a:txBody>
-                    <a:bodyPr wrap="square"/>
-                    <a:lstStyle/>
-                    <a:p>
-                      <a:pPr algn="l"/>
-                      <a:r>
-                        <a:rPr sz="1000" b="0">
-                          <a:solidFill>
-                            <a:srgbClr val="1D1B43"/>
-                          </a:solidFill>
-                          <a:latin typeface="Calibri"/>
-                        </a:rPr>
-                        <a:t>118</a:t>
+                    <a:bodyPr/>
+                    <a:lstStyle/>
+                    <a:p>
+                      <a:pPr algn="l"/>
+                      <a:r>
+                        <a:rPr sz="1000" b="0">
+                          <a:solidFill>
+                            <a:srgbClr val="1D1B43"/>
+                          </a:solidFill>
+                          <a:latin typeface="Calibri"/>
+                        </a:rPr>
+                        <a:t>115</a:t>
                       </a:r>
                     </a:p>
                   </a:txBody>
@@ -4378,18 +4378,18 @@
                 </a:tc>
                 <a:tc>
                   <a:txBody>
-                    <a:bodyPr wrap="square"/>
-                    <a:lstStyle/>
-                    <a:p>
-                      <a:pPr algn="l"/>
-                      <a:r>
-                        <a:rPr sz="1000" b="0">
-                          <a:solidFill>
-                            <a:srgbClr val="1D1B43"/>
-                          </a:solidFill>
-                          <a:latin typeface="Calibri"/>
-                        </a:rPr>
-                        <a:t>- 27</a:t>
+                    <a:bodyPr/>
+                    <a:lstStyle/>
+                    <a:p>
+                      <a:pPr algn="l"/>
+                      <a:r>
+                        <a:rPr sz="1000" b="0">
+                          <a:solidFill>
+                            <a:srgbClr val="1D1B43"/>
+                          </a:solidFill>
+                          <a:latin typeface="Calibri"/>
+                        </a:rPr>
+                        <a:t>+ 115</a:t>
                       </a:r>
                     </a:p>
                   </a:txBody>
@@ -4403,18 +4403,18 @@
               <a:tr h="475488">
                 <a:tc>
                   <a:txBody>
-                    <a:bodyPr wrap="square"/>
-                    <a:lstStyle/>
-                    <a:p>
-                      <a:pPr algn="l"/>
-                      <a:r>
-                        <a:rPr sz="1000" b="0">
-                          <a:solidFill>
-                            <a:srgbClr val="1D1B43"/>
-                          </a:solidFill>
-                          <a:latin typeface="Calibri"/>
-                        </a:rPr>
-                        <a:t>Fora do Prazo</a:t>
+                    <a:bodyPr/>
+                    <a:lstStyle/>
+                    <a:p>
+                      <a:pPr algn="l"/>
+                      <a:r>
+                        <a:rPr sz="1000" b="0">
+                          <a:solidFill>
+                            <a:srgbClr val="1D1B43"/>
+                          </a:solidFill>
+                          <a:latin typeface="Calibri"/>
+                        </a:rPr>
+                        <a:t>Fora Prazo</a:t>
                       </a:r>
                     </a:p>
                   </a:txBody>
@@ -4426,7 +4426,7 @@
                 </a:tc>
                 <a:tc>
                   <a:txBody>
-                    <a:bodyPr wrap="square"/>
+                    <a:bodyPr/>
                     <a:lstStyle/>
                     <a:p>
                       <a:pPr algn="l"/>
@@ -4449,18 +4449,18 @@
                 </a:tc>
                 <a:tc>
                   <a:txBody>
-                    <a:bodyPr wrap="square"/>
-                    <a:lstStyle/>
-                    <a:p>
-                      <a:pPr algn="l"/>
-                      <a:r>
-                        <a:rPr sz="1000" b="0">
-                          <a:solidFill>
-                            <a:srgbClr val="1D1B43"/>
-                          </a:solidFill>
-                          <a:latin typeface="Calibri"/>
-                        </a:rPr>
-                        <a:t>6</a:t>
+                    <a:bodyPr/>
+                    <a:lstStyle/>
+                    <a:p>
+                      <a:pPr algn="l"/>
+                      <a:r>
+                        <a:rPr sz="1000" b="0">
+                          <a:solidFill>
+                            <a:srgbClr val="1D1B43"/>
+                          </a:solidFill>
+                          <a:latin typeface="Calibri"/>
+                        </a:rPr>
+                        <a:t>5</a:t>
                       </a:r>
                     </a:p>
                   </a:txBody>
@@ -4472,18 +4472,18 @@
                 </a:tc>
                 <a:tc>
                   <a:txBody>
-                    <a:bodyPr wrap="square"/>
-                    <a:lstStyle/>
-                    <a:p>
-                      <a:pPr algn="l"/>
-                      <a:r>
-                        <a:rPr sz="1000" b="0">
-                          <a:solidFill>
-                            <a:srgbClr val="1D1B43"/>
-                          </a:solidFill>
-                          <a:latin typeface="Calibri"/>
-                        </a:rPr>
-                        <a:t>+ 6</a:t>
+                    <a:bodyPr/>
+                    <a:lstStyle/>
+                    <a:p>
+                      <a:pPr algn="l"/>
+                      <a:r>
+                        <a:rPr sz="1000" b="0">
+                          <a:solidFill>
+                            <a:srgbClr val="1D1B43"/>
+                          </a:solidFill>
+                          <a:latin typeface="Calibri"/>
+                        </a:rPr>
+                        <a:t>+ 5</a:t>
                       </a:r>
                     </a:p>
                   </a:txBody>
@@ -4497,7 +4497,7 @@
               <a:tr h="475488">
                 <a:tc>
                   <a:txBody>
-                    <a:bodyPr wrap="square"/>
+                    <a:bodyPr/>
                     <a:lstStyle/>
                     <a:p>
                       <a:pPr algn="l"/>
@@ -4520,18 +4520,18 @@
                 </a:tc>
                 <a:tc>
                   <a:txBody>
-                    <a:bodyPr wrap="square"/>
-                    <a:lstStyle/>
-                    <a:p>
-                      <a:pPr algn="l"/>
-                      <a:r>
-                        <a:rPr sz="1000" b="0">
-                          <a:solidFill>
-                            <a:srgbClr val="1D1B43"/>
-                          </a:solidFill>
-                          <a:latin typeface="Calibri"/>
-                        </a:rPr>
-                        <a:t>100.0%</a:t>
+                    <a:bodyPr/>
+                    <a:lstStyle/>
+                    <a:p>
+                      <a:pPr algn="l"/>
+                      <a:r>
+                        <a:rPr sz="1000" b="0">
+                          <a:solidFill>
+                            <a:srgbClr val="1D1B43"/>
+                          </a:solidFill>
+                          <a:latin typeface="Calibri"/>
+                        </a:rPr>
+                        <a:t>95.8%</a:t>
                       </a:r>
                     </a:p>
                   </a:txBody>
@@ -4543,18 +4543,18 @@
                 </a:tc>
                 <a:tc>
                   <a:txBody>
-                    <a:bodyPr wrap="square"/>
-                    <a:lstStyle/>
-                    <a:p>
-                      <a:pPr algn="l"/>
-                      <a:r>
-                        <a:rPr sz="1000" b="0">
-                          <a:solidFill>
-                            <a:srgbClr val="1D1B43"/>
-                          </a:solidFill>
-                          <a:latin typeface="Calibri"/>
-                        </a:rPr>
-                        <a:t>95.2%</a:t>
+                    <a:bodyPr/>
+                    <a:lstStyle/>
+                    <a:p>
+                      <a:pPr algn="l"/>
+                      <a:r>
+                        <a:rPr sz="1000" b="0">
+                          <a:solidFill>
+                            <a:srgbClr val="1D1B43"/>
+                          </a:solidFill>
+                          <a:latin typeface="Calibri"/>
+                        </a:rPr>
+                        <a:t>95.8%</a:t>
                       </a:r>
                     </a:p>
                   </a:txBody>
@@ -4566,18 +4566,18 @@
                 </a:tc>
                 <a:tc>
                   <a:txBody>
-                    <a:bodyPr wrap="square"/>
-                    <a:lstStyle/>
-                    <a:p>
-                      <a:pPr algn="l"/>
-                      <a:r>
-                        <a:rPr sz="1000" b="0">
-                          <a:solidFill>
-                            <a:srgbClr val="1D1B43"/>
-                          </a:solidFill>
-                          <a:latin typeface="Calibri"/>
-                        </a:rPr>
-                        <a:t>- 4.8pp</a:t>
+                    <a:bodyPr/>
+                    <a:lstStyle/>
+                    <a:p>
+                      <a:pPr algn="l"/>
+                      <a:r>
+                        <a:rPr sz="1000" b="0">
+                          <a:solidFill>
+                            <a:srgbClr val="1D1B43"/>
+                          </a:solidFill>
+                          <a:latin typeface="Calibri"/>
+                        </a:rPr>
+                        <a:t>+ 0.0pp</a:t>
                       </a:r>
                     </a:p>
                   </a:txBody>
@@ -4766,7 +4766,7 @@
               <a:tr h="438912">
                 <a:tc>
                   <a:txBody>
-                    <a:bodyPr wrap="square"/>
+                    <a:bodyPr/>
                     <a:lstStyle/>
                     <a:p>
                       <a:pPr algn="ctr"/>
@@ -4789,7 +4789,7 @@
                 </a:tc>
                 <a:tc>
                   <a:txBody>
-                    <a:bodyPr wrap="square"/>
+                    <a:bodyPr/>
                     <a:lstStyle/>
                     <a:p>
                       <a:pPr algn="ctr"/>
@@ -4812,7 +4812,7 @@
                 </a:tc>
                 <a:tc>
                   <a:txBody>
-                    <a:bodyPr wrap="square"/>
+                    <a:bodyPr/>
                     <a:lstStyle/>
                     <a:p>
                       <a:pPr algn="ctr"/>
@@ -4835,7 +4835,7 @@
                 </a:tc>
                 <a:tc>
                   <a:txBody>
-                    <a:bodyPr wrap="square"/>
+                    <a:bodyPr/>
                     <a:lstStyle/>
                     <a:p>
                       <a:pPr algn="ctr"/>
@@ -4858,7 +4858,7 @@
                 </a:tc>
                 <a:tc>
                   <a:txBody>
-                    <a:bodyPr wrap="square"/>
+                    <a:bodyPr/>
                     <a:lstStyle/>
                     <a:p>
                       <a:pPr algn="ctr"/>
@@ -4883,7 +4883,7 @@
               <a:tr h="438912">
                 <a:tc>
                   <a:txBody>
-                    <a:bodyPr wrap="square"/>
+                    <a:bodyPr/>
                     <a:lstStyle/>
                     <a:p>
                       <a:pPr algn="l"/>
@@ -4906,18 +4906,18 @@
                 </a:tc>
                 <a:tc>
                   <a:txBody>
-                    <a:bodyPr wrap="square"/>
-                    <a:lstStyle/>
-                    <a:p>
-                      <a:pPr algn="l"/>
-                      <a:r>
-                        <a:rPr sz="1000" b="0">
-                          <a:solidFill>
-                            <a:srgbClr val="1D1B43"/>
-                          </a:solidFill>
-                          <a:latin typeface="Calibri"/>
-                        </a:rPr>
-                        <a:t>145</a:t>
+                    <a:bodyPr/>
+                    <a:lstStyle/>
+                    <a:p>
+                      <a:pPr algn="l"/>
+                      <a:r>
+                        <a:rPr sz="1000" b="0">
+                          <a:solidFill>
+                            <a:srgbClr val="1D1B43"/>
+                          </a:solidFill>
+                          <a:latin typeface="Calibri"/>
+                        </a:rPr>
+                        <a:t>0</a:t>
                       </a:r>
                     </a:p>
                   </a:txBody>
@@ -4929,18 +4929,18 @@
                 </a:tc>
                 <a:tc>
                   <a:txBody>
-                    <a:bodyPr wrap="square"/>
-                    <a:lstStyle/>
-                    <a:p>
-                      <a:pPr algn="l"/>
-                      <a:r>
-                        <a:rPr sz="1000" b="0">
-                          <a:solidFill>
-                            <a:srgbClr val="1D1B43"/>
-                          </a:solidFill>
-                          <a:latin typeface="Calibri"/>
-                        </a:rPr>
-                        <a:t>145</a:t>
+                    <a:bodyPr/>
+                    <a:lstStyle/>
+                    <a:p>
+                      <a:pPr algn="l"/>
+                      <a:r>
+                        <a:rPr sz="1000" b="0">
+                          <a:solidFill>
+                            <a:srgbClr val="1D1B43"/>
+                          </a:solidFill>
+                          <a:latin typeface="Calibri"/>
+                        </a:rPr>
+                        <a:t>0</a:t>
                       </a:r>
                     </a:p>
                   </a:txBody>
@@ -4952,7 +4952,7 @@
                 </a:tc>
                 <a:tc>
                   <a:txBody>
-                    <a:bodyPr wrap="square"/>
+                    <a:bodyPr/>
                     <a:lstStyle/>
                     <a:p>
                       <a:pPr algn="l"/>
@@ -4975,18 +4975,18 @@
                 </a:tc>
                 <a:tc>
                   <a:txBody>
-                    <a:bodyPr wrap="square"/>
-                    <a:lstStyle/>
-                    <a:p>
-                      <a:pPr algn="l"/>
-                      <a:r>
-                        <a:rPr sz="1000" b="0">
-                          <a:solidFill>
-                            <a:srgbClr val="1D1B43"/>
-                          </a:solidFill>
-                          <a:latin typeface="Calibri"/>
-                        </a:rPr>
-                        <a:t>100.0%</a:t>
+                    <a:bodyPr/>
+                    <a:lstStyle/>
+                    <a:p>
+                      <a:pPr algn="l"/>
+                      <a:r>
+                        <a:rPr sz="1000" b="0">
+                          <a:solidFill>
+                            <a:srgbClr val="1D1B43"/>
+                          </a:solidFill>
+                          <a:latin typeface="Calibri"/>
+                        </a:rPr>
+                        <a:t>95.8%</a:t>
                       </a:r>
                     </a:p>
                   </a:txBody>
@@ -5000,7 +5000,7 @@
               <a:tr h="438912">
                 <a:tc>
                   <a:txBody>
-                    <a:bodyPr wrap="square"/>
+                    <a:bodyPr/>
                     <a:lstStyle/>
                     <a:p>
                       <a:pPr algn="l"/>
@@ -5023,18 +5023,18 @@
                 </a:tc>
                 <a:tc>
                   <a:txBody>
-                    <a:bodyPr wrap="square"/>
-                    <a:lstStyle/>
-                    <a:p>
-                      <a:pPr algn="l"/>
-                      <a:r>
-                        <a:rPr sz="1000" b="0">
-                          <a:solidFill>
-                            <a:srgbClr val="1D1B43"/>
-                          </a:solidFill>
-                          <a:latin typeface="Calibri"/>
-                        </a:rPr>
-                        <a:t>124</a:t>
+                    <a:bodyPr/>
+                    <a:lstStyle/>
+                    <a:p>
+                      <a:pPr algn="l"/>
+                      <a:r>
+                        <a:rPr sz="1000" b="0">
+                          <a:solidFill>
+                            <a:srgbClr val="1D1B43"/>
+                          </a:solidFill>
+                          <a:latin typeface="Calibri"/>
+                        </a:rPr>
+                        <a:t>120</a:t>
                       </a:r>
                     </a:p>
                   </a:txBody>
@@ -5046,18 +5046,18 @@
                 </a:tc>
                 <a:tc>
                   <a:txBody>
-                    <a:bodyPr wrap="square"/>
-                    <a:lstStyle/>
-                    <a:p>
-                      <a:pPr algn="l"/>
-                      <a:r>
-                        <a:rPr sz="1000" b="0">
-                          <a:solidFill>
-                            <a:srgbClr val="1D1B43"/>
-                          </a:solidFill>
-                          <a:latin typeface="Calibri"/>
-                        </a:rPr>
-                        <a:t>118</a:t>
+                    <a:bodyPr/>
+                    <a:lstStyle/>
+                    <a:p>
+                      <a:pPr algn="l"/>
+                      <a:r>
+                        <a:rPr sz="1000" b="0">
+                          <a:solidFill>
+                            <a:srgbClr val="1D1B43"/>
+                          </a:solidFill>
+                          <a:latin typeface="Calibri"/>
+                        </a:rPr>
+                        <a:t>115</a:t>
                       </a:r>
                     </a:p>
                   </a:txBody>
@@ -5069,18 +5069,18 @@
                 </a:tc>
                 <a:tc>
                   <a:txBody>
-                    <a:bodyPr wrap="square"/>
-                    <a:lstStyle/>
-                    <a:p>
-                      <a:pPr algn="l"/>
-                      <a:r>
-                        <a:rPr sz="1000" b="0">
-                          <a:solidFill>
-                            <a:srgbClr val="1D1B43"/>
-                          </a:solidFill>
-                          <a:latin typeface="Calibri"/>
-                        </a:rPr>
-                        <a:t>6</a:t>
+                    <a:bodyPr/>
+                    <a:lstStyle/>
+                    <a:p>
+                      <a:pPr algn="l"/>
+                      <a:r>
+                        <a:rPr sz="1000" b="0">
+                          <a:solidFill>
+                            <a:srgbClr val="1D1B43"/>
+                          </a:solidFill>
+                          <a:latin typeface="Calibri"/>
+                        </a:rPr>
+                        <a:t>5</a:t>
                       </a:r>
                     </a:p>
                   </a:txBody>
@@ -5092,18 +5092,18 @@
                 </a:tc>
                 <a:tc>
                   <a:txBody>
-                    <a:bodyPr wrap="square"/>
-                    <a:lstStyle/>
-                    <a:p>
-                      <a:pPr algn="l"/>
-                      <a:r>
-                        <a:rPr sz="1000" b="0">
-                          <a:solidFill>
-                            <a:srgbClr val="1D1B43"/>
-                          </a:solidFill>
-                          <a:latin typeface="Calibri"/>
-                        </a:rPr>
-                        <a:t>95.2%</a:t>
+                    <a:bodyPr/>
+                    <a:lstStyle/>
+                    <a:p>
+                      <a:pPr algn="l"/>
+                      <a:r>
+                        <a:rPr sz="1000" b="0">
+                          <a:solidFill>
+                            <a:srgbClr val="1D1B43"/>
+                          </a:solidFill>
+                          <a:latin typeface="Calibri"/>
+                        </a:rPr>
+                        <a:t>95.8%</a:t>
                       </a:r>
                     </a:p>
                   </a:txBody>
@@ -5191,7 +5191,7 @@
                 </a:solidFill>
                 <a:latin typeface="Calibri"/>
               </a:rPr>
-              <a:t>PERFORMANCE: 95.2% - REGULAR</a:t>
+              <a:t>PERFORMANCE: 95.8% - REGULAR</a:t>
             </a:r>
           </a:p>
         </p:txBody>
@@ -5276,7 +5276,7 @@
                 </a:solidFill>
                 <a:latin typeface="Calibri"/>
               </a:rPr>
-              <a:t>OCORRENCIAS FORA DO PRAZO (6)</a:t>
+              <a:t>OCORRENCIAS FORA DO PRAZO (5)</a:t>
             </a:r>
           </a:p>
         </p:txBody>
@@ -5334,7 +5334,7 @@
         </p:nvGraphicFramePr>
         <p:xfrm>
           <a:off x="457200" y="1828800"/>
-          <a:ext cx="11429999" cy="2688336"/>
+          <a:ext cx="11429999" cy="2304288"/>
         </p:xfrm>
         <a:graphic>
           <a:graphicData uri="http://schemas.openxmlformats.org/drawingml/2006/table">
@@ -5352,7 +5352,7 @@
               <a:tr h="384048">
                 <a:tc>
                   <a:txBody>
-                    <a:bodyPr wrap="square"/>
+                    <a:bodyPr/>
                     <a:lstStyle/>
                     <a:p>
                       <a:pPr algn="ctr"/>
@@ -5375,7 +5375,7 @@
                 </a:tc>
                 <a:tc>
                   <a:txBody>
-                    <a:bodyPr wrap="square"/>
+                    <a:bodyPr/>
                     <a:lstStyle/>
                     <a:p>
                       <a:pPr algn="ctr"/>
@@ -5398,7 +5398,7 @@
                 </a:tc>
                 <a:tc>
                   <a:txBody>
-                    <a:bodyPr wrap="square"/>
+                    <a:bodyPr/>
                     <a:lstStyle/>
                     <a:p>
                       <a:pPr algn="ctr"/>
@@ -5421,7 +5421,7 @@
                 </a:tc>
                 <a:tc>
                   <a:txBody>
-                    <a:bodyPr wrap="square"/>
+                    <a:bodyPr/>
                     <a:lstStyle/>
                     <a:p>
                       <a:pPr algn="ctr"/>
@@ -5444,7 +5444,7 @@
                 </a:tc>
                 <a:tc>
                   <a:txBody>
-                    <a:bodyPr wrap="square"/>
+                    <a:bodyPr/>
                     <a:lstStyle/>
                     <a:p>
                       <a:pPr algn="ctr"/>
@@ -5469,7 +5469,7 @@
               <a:tr h="384048">
                 <a:tc>
                   <a:txBody>
-                    <a:bodyPr wrap="square"/>
+                    <a:bodyPr/>
                     <a:lstStyle/>
                     <a:p>
                       <a:pPr algn="l"/>
@@ -5492,7 +5492,7 @@
                 </a:tc>
                 <a:tc>
                   <a:txBody>
-                    <a:bodyPr wrap="square"/>
+                    <a:bodyPr/>
                     <a:lstStyle/>
                     <a:p>
                       <a:pPr algn="l"/>
@@ -5515,7 +5515,7 @@
                 </a:tc>
                 <a:tc>
                   <a:txBody>
-                    <a:bodyPr wrap="square"/>
+                    <a:bodyPr/>
                     <a:lstStyle/>
                     <a:p>
                       <a:pPr algn="l"/>
@@ -5538,7 +5538,7 @@
                 </a:tc>
                 <a:tc>
                   <a:txBody>
-                    <a:bodyPr wrap="square"/>
+                    <a:bodyPr/>
                     <a:lstStyle/>
                     <a:p>
                       <a:pPr algn="l"/>
@@ -5561,7 +5561,7 @@
                 </a:tc>
                 <a:tc>
                   <a:txBody>
-                    <a:bodyPr wrap="square"/>
+                    <a:bodyPr/>
                     <a:lstStyle/>
                     <a:p>
                       <a:pPr algn="l"/>
@@ -5586,7 +5586,7 @@
               <a:tr h="384048">
                 <a:tc>
                   <a:txBody>
-                    <a:bodyPr wrap="square"/>
+                    <a:bodyPr/>
                     <a:lstStyle/>
                     <a:p>
                       <a:pPr algn="l"/>
@@ -5609,7 +5609,7 @@
                 </a:tc>
                 <a:tc>
                   <a:txBody>
-                    <a:bodyPr wrap="square"/>
+                    <a:bodyPr/>
                     <a:lstStyle/>
                     <a:p>
                       <a:pPr algn="l"/>
@@ -5632,7 +5632,7 @@
                 </a:tc>
                 <a:tc>
                   <a:txBody>
-                    <a:bodyPr wrap="square"/>
+                    <a:bodyPr/>
                     <a:lstStyle/>
                     <a:p>
                       <a:pPr algn="l"/>
@@ -5655,7 +5655,7 @@
                 </a:tc>
                 <a:tc>
                   <a:txBody>
-                    <a:bodyPr wrap="square"/>
+                    <a:bodyPr/>
                     <a:lstStyle/>
                     <a:p>
                       <a:pPr algn="l"/>
@@ -5678,7 +5678,7 @@
                 </a:tc>
                 <a:tc>
                   <a:txBody>
-                    <a:bodyPr wrap="square"/>
+                    <a:bodyPr/>
                     <a:lstStyle/>
                     <a:p>
                       <a:pPr algn="l"/>
@@ -5703,7 +5703,7 @@
               <a:tr h="384048">
                 <a:tc>
                   <a:txBody>
-                    <a:bodyPr wrap="square"/>
+                    <a:bodyPr/>
                     <a:lstStyle/>
                     <a:p>
                       <a:pPr algn="l"/>
@@ -5726,7 +5726,7 @@
                 </a:tc>
                 <a:tc>
                   <a:txBody>
-                    <a:bodyPr wrap="square"/>
+                    <a:bodyPr/>
                     <a:lstStyle/>
                     <a:p>
                       <a:pPr algn="l"/>
@@ -5749,7 +5749,7 @@
                 </a:tc>
                 <a:tc>
                   <a:txBody>
-                    <a:bodyPr wrap="square"/>
+                    <a:bodyPr/>
                     <a:lstStyle/>
                     <a:p>
                       <a:pPr algn="l"/>
@@ -5772,7 +5772,7 @@
                 </a:tc>
                 <a:tc>
                   <a:txBody>
-                    <a:bodyPr wrap="square"/>
+                    <a:bodyPr/>
                     <a:lstStyle/>
                     <a:p>
                       <a:pPr algn="l"/>
@@ -5795,7 +5795,7 @@
                 </a:tc>
                 <a:tc>
                   <a:txBody>
-                    <a:bodyPr wrap="square"/>
+                    <a:bodyPr/>
                     <a:lstStyle/>
                     <a:p>
                       <a:pPr algn="l"/>
@@ -5820,7 +5820,7 @@
               <a:tr h="384048">
                 <a:tc>
                   <a:txBody>
-                    <a:bodyPr wrap="square"/>
+                    <a:bodyPr/>
                     <a:lstStyle/>
                     <a:p>
                       <a:pPr algn="l"/>
@@ -5843,7 +5843,7 @@
                 </a:tc>
                 <a:tc>
                   <a:txBody>
-                    <a:bodyPr wrap="square"/>
+                    <a:bodyPr/>
                     <a:lstStyle/>
                     <a:p>
                       <a:pPr algn="l"/>
@@ -5866,7 +5866,7 @@
                 </a:tc>
                 <a:tc>
                   <a:txBody>
-                    <a:bodyPr wrap="square"/>
+                    <a:bodyPr/>
                     <a:lstStyle/>
                     <a:p>
                       <a:pPr algn="l"/>
@@ -5889,7 +5889,7 @@
                 </a:tc>
                 <a:tc>
                   <a:txBody>
-                    <a:bodyPr wrap="square"/>
+                    <a:bodyPr/>
                     <a:lstStyle/>
                     <a:p>
                       <a:pPr algn="l"/>
@@ -5912,18 +5912,18 @@
                 </a:tc>
                 <a:tc>
                   <a:txBody>
-                    <a:bodyPr wrap="square"/>
-                    <a:lstStyle/>
-                    <a:p>
-                      <a:pPr algn="l"/>
-                      <a:r>
-                        <a:rPr sz="1000" b="0">
-                          <a:solidFill>
-                            <a:srgbClr val="1D1B43"/>
-                          </a:solidFill>
-                          <a:latin typeface="Calibri"/>
-                        </a:rPr>
-                        <a:t>FORA DO PRAZO</a:t>
+                    <a:bodyPr/>
+                    <a:lstStyle/>
+                    <a:p>
+                      <a:pPr algn="l"/>
+                      <a:r>
+                        <a:rPr sz="1000" b="0">
+                          <a:solidFill>
+                            <a:srgbClr val="1D1B43"/>
+                          </a:solidFill>
+                          <a:latin typeface="Calibri"/>
+                        </a:rPr>
+                        <a:t>ENTREGUE FORA DO PRAZO</a:t>
                       </a:r>
                     </a:p>
                   </a:txBody>
@@ -5937,18 +5937,18 @@
               <a:tr h="384048">
                 <a:tc>
                   <a:txBody>
-                    <a:bodyPr wrap="square"/>
-                    <a:lstStyle/>
-                    <a:p>
-                      <a:pPr algn="l"/>
-                      <a:r>
-                        <a:rPr sz="1000" b="0">
-                          <a:solidFill>
-                            <a:srgbClr val="1D1B43"/>
-                          </a:solidFill>
-                          <a:latin typeface="Calibri"/>
-                        </a:rPr>
-                        <a:t>281154</a:t>
+                    <a:bodyPr/>
+                    <a:lstStyle/>
+                    <a:p>
+                      <a:pPr algn="l"/>
+                      <a:r>
+                        <a:rPr sz="1000" b="0">
+                          <a:solidFill>
+                            <a:srgbClr val="1D1B43"/>
+                          </a:solidFill>
+                          <a:latin typeface="Calibri"/>
+                        </a:rPr>
+                        <a:t>281288</a:t>
                       </a:r>
                     </a:p>
                   </a:txBody>
@@ -5960,18 +5960,18 @@
                 </a:tc>
                 <a:tc>
                   <a:txBody>
-                    <a:bodyPr wrap="square"/>
-                    <a:lstStyle/>
-                    <a:p>
-                      <a:pPr algn="l"/>
-                      <a:r>
-                        <a:rPr sz="1000" b="0">
-                          <a:solidFill>
-                            <a:srgbClr val="1D1B43"/>
-                          </a:solidFill>
-                          <a:latin typeface="Calibri"/>
-                        </a:rPr>
-                        <a:t>CMGL MORUMBI ACESSOR - SAO PAULO / SP</a:t>
+                    <a:bodyPr/>
+                    <a:lstStyle/>
+                    <a:p>
+                      <a:pPr algn="l"/>
+                      <a:r>
+                        <a:rPr sz="1000" b="0">
+                          <a:solidFill>
+                            <a:srgbClr val="1D1B43"/>
+                          </a:solidFill>
+                          <a:latin typeface="Calibri"/>
+                        </a:rPr>
+                        <a:t>BSG BIJOU BRASIL COM - SAO PAULO / SP</a:t>
                       </a:r>
                     </a:p>
                   </a:txBody>
@@ -5983,7 +5983,7 @@
                 </a:tc>
                 <a:tc>
                   <a:txBody>
-                    <a:bodyPr wrap="square"/>
+                    <a:bodyPr/>
                     <a:lstStyle/>
                     <a:p>
                       <a:pPr algn="l"/>
@@ -6006,18 +6006,18 @@
                 </a:tc>
                 <a:tc>
                   <a:txBody>
-                    <a:bodyPr wrap="square"/>
-                    <a:lstStyle/>
-                    <a:p>
-                      <a:pPr algn="l"/>
-                      <a:r>
-                        <a:rPr sz="1000" b="0">
-                          <a:solidFill>
-                            <a:srgbClr val="1D1B43"/>
-                          </a:solidFill>
-                          <a:latin typeface="Calibri"/>
-                        </a:rPr>
-                        <a:t>29/04/2026</a:t>
+                    <a:bodyPr/>
+                    <a:lstStyle/>
+                    <a:p>
+                      <a:pPr algn="l"/>
+                      <a:r>
+                        <a:rPr sz="1000" b="0">
+                          <a:solidFill>
+                            <a:srgbClr val="1D1B43"/>
+                          </a:solidFill>
+                          <a:latin typeface="Calibri"/>
+                        </a:rPr>
+                        <a:t>30/04/2026</a:t>
                       </a:r>
                     </a:p>
                   </a:txBody>
@@ -6029,141 +6029,24 @@
                 </a:tc>
                 <a:tc>
                   <a:txBody>
-                    <a:bodyPr wrap="square"/>
-                    <a:lstStyle/>
-                    <a:p>
-                      <a:pPr algn="l"/>
-                      <a:r>
-                        <a:rPr sz="1000" b="0">
-                          <a:solidFill>
-                            <a:srgbClr val="1D1B43"/>
-                          </a:solidFill>
-                          <a:latin typeface="Calibri"/>
-                        </a:rPr>
-                        <a:t>FORA DO PRAZO</a:t>
+                    <a:bodyPr/>
+                    <a:lstStyle/>
+                    <a:p>
+                      <a:pPr algn="l"/>
+                      <a:r>
+                        <a:rPr sz="1000" b="0">
+                          <a:solidFill>
+                            <a:srgbClr val="1D1B43"/>
+                          </a:solidFill>
+                          <a:latin typeface="Calibri"/>
+                        </a:rPr>
+                        <a:t>ENTREGUE FORA DO PRAZO</a:t>
                       </a:r>
                     </a:p>
                   </a:txBody>
                   <a:tcPr>
                     <a:solidFill>
                       <a:srgbClr val="FFFFFF"/>
-                    </a:solidFill>
-                  </a:tcPr>
-                </a:tc>
-              </a:tr>
-              <a:tr h="384048">
-                <a:tc>
-                  <a:txBody>
-                    <a:bodyPr wrap="square"/>
-                    <a:lstStyle/>
-                    <a:p>
-                      <a:pPr algn="l"/>
-                      <a:r>
-                        <a:rPr sz="1000" b="0">
-                          <a:solidFill>
-                            <a:srgbClr val="1D1B43"/>
-                          </a:solidFill>
-                          <a:latin typeface="Calibri"/>
-                        </a:rPr>
-                        <a:t>281288</a:t>
-                      </a:r>
-                    </a:p>
-                  </a:txBody>
-                  <a:tcPr>
-                    <a:solidFill>
-                      <a:srgbClr val="F2F2F2"/>
-                    </a:solidFill>
-                  </a:tcPr>
-                </a:tc>
-                <a:tc>
-                  <a:txBody>
-                    <a:bodyPr wrap="square"/>
-                    <a:lstStyle/>
-                    <a:p>
-                      <a:pPr algn="l"/>
-                      <a:r>
-                        <a:rPr sz="1000" b="0">
-                          <a:solidFill>
-                            <a:srgbClr val="1D1B43"/>
-                          </a:solidFill>
-                          <a:latin typeface="Calibri"/>
-                        </a:rPr>
-                        <a:t>BSG BIJOU BRASIL COM - SAO PAULO / SP</a:t>
-                      </a:r>
-                    </a:p>
-                  </a:txBody>
-                  <a:tcPr>
-                    <a:solidFill>
-                      <a:srgbClr val="F2F2F2"/>
-                    </a:solidFill>
-                  </a:tcPr>
-                </a:tc>
-                <a:tc>
-                  <a:txBody>
-                    <a:bodyPr wrap="square"/>
-                    <a:lstStyle/>
-                    <a:p>
-                      <a:pPr algn="l"/>
-                      <a:r>
-                        <a:rPr sz="1000" b="0">
-                          <a:solidFill>
-                            <a:srgbClr val="1D1B43"/>
-                          </a:solidFill>
-                          <a:latin typeface="Calibri"/>
-                        </a:rPr>
-                        <a:t>SAO PAULO/SP</a:t>
-                      </a:r>
-                    </a:p>
-                  </a:txBody>
-                  <a:tcPr>
-                    <a:solidFill>
-                      <a:srgbClr val="F2F2F2"/>
-                    </a:solidFill>
-                  </a:tcPr>
-                </a:tc>
-                <a:tc>
-                  <a:txBody>
-                    <a:bodyPr wrap="square"/>
-                    <a:lstStyle/>
-                    <a:p>
-                      <a:pPr algn="l"/>
-                      <a:r>
-                        <a:rPr sz="1000" b="0">
-                          <a:solidFill>
-                            <a:srgbClr val="1D1B43"/>
-                          </a:solidFill>
-                          <a:latin typeface="Calibri"/>
-                        </a:rPr>
-                        <a:t>30/04/2026</a:t>
-                      </a:r>
-                    </a:p>
-                  </a:txBody>
-                  <a:tcPr>
-                    <a:solidFill>
-                      <a:srgbClr val="F2F2F2"/>
-                    </a:solidFill>
-                  </a:tcPr>
-                </a:tc>
-                <a:tc>
-                  <a:txBody>
-                    <a:bodyPr wrap="square"/>
-                    <a:lstStyle/>
-                    <a:p>
-                      <a:pPr algn="l"/>
-                      <a:r>
-                        <a:rPr sz="1000" b="0">
-                          <a:solidFill>
-                            <a:srgbClr val="1D1B43"/>
-                          </a:solidFill>
-                          <a:latin typeface="Calibri"/>
-                        </a:rPr>
-                        <a:t>ENTREGUE FORA DO PRAZO</a:t>
-                      </a:r>
-                    </a:p>
-                  </a:txBody>
-                  <a:tcPr>
-                    <a:solidFill>
-                      <a:srgbClr val="F2F2F2"/>
                     </a:solidFill>
                   </a:tcPr>
                 </a:tc>
@@ -6329,7 +6212,7 @@
               <a:tr h="457200">
                 <a:tc>
                   <a:txBody>
-                    <a:bodyPr wrap="square"/>
+                    <a:bodyPr/>
                     <a:lstStyle/>
                     <a:p>
                       <a:pPr algn="ctr"/>
@@ -6352,7 +6235,7 @@
                 </a:tc>
                 <a:tc>
                   <a:txBody>
-                    <a:bodyPr wrap="square"/>
+                    <a:bodyPr/>
                     <a:lstStyle/>
                     <a:p>
                       <a:pPr algn="ctr"/>
@@ -6375,7 +6258,7 @@
                 </a:tc>
                 <a:tc>
                   <a:txBody>
-                    <a:bodyPr wrap="square"/>
+                    <a:bodyPr/>
                     <a:lstStyle/>
                     <a:p>
                       <a:pPr algn="ctr"/>
@@ -6398,7 +6281,7 @@
                 </a:tc>
                 <a:tc>
                   <a:txBody>
-                    <a:bodyPr wrap="square"/>
+                    <a:bodyPr/>
                     <a:lstStyle/>
                     <a:p>
                       <a:pPr algn="ctr"/>
@@ -6421,7 +6304,7 @@
                 </a:tc>
                 <a:tc>
                   <a:txBody>
-                    <a:bodyPr wrap="square"/>
+                    <a:bodyPr/>
                     <a:lstStyle/>
                     <a:p>
                       <a:pPr algn="ctr"/>
@@ -6444,7 +6327,7 @@
                 </a:tc>
                 <a:tc>
                   <a:txBody>
-                    <a:bodyPr wrap="square"/>
+                    <a:bodyPr/>
                     <a:lstStyle/>
                     <a:p>
                       <a:pPr algn="ctr"/>
@@ -6469,7 +6352,7 @@
               <a:tr h="457200">
                 <a:tc>
                   <a:txBody>
-                    <a:bodyPr wrap="square"/>
+                    <a:bodyPr/>
                     <a:lstStyle/>
                     <a:p>
                       <a:pPr algn="l"/>
@@ -6492,18 +6375,18 @@
                 </a:tc>
                 <a:tc>
                   <a:txBody>
-                    <a:bodyPr wrap="square"/>
-                    <a:lstStyle/>
-                    <a:p>
-                      <a:pPr algn="l"/>
-                      <a:r>
-                        <a:rPr sz="1000" b="0">
-                          <a:solidFill>
-                            <a:srgbClr val="1D1B43"/>
-                          </a:solidFill>
-                          <a:latin typeface="Calibri"/>
-                        </a:rPr>
-                        <a:t>117</a:t>
+                    <a:bodyPr/>
+                    <a:lstStyle/>
+                    <a:p>
+                      <a:pPr algn="l"/>
+                      <a:r>
+                        <a:rPr sz="1000" b="0">
+                          <a:solidFill>
+                            <a:srgbClr val="1D1B43"/>
+                          </a:solidFill>
+                          <a:latin typeface="Calibri"/>
+                        </a:rPr>
+                        <a:t>113</a:t>
                       </a:r>
                     </a:p>
                   </a:txBody>
@@ -6515,18 +6398,18 @@
                 </a:tc>
                 <a:tc>
                   <a:txBody>
-                    <a:bodyPr wrap="square"/>
-                    <a:lstStyle/>
-                    <a:p>
-                      <a:pPr algn="l"/>
-                      <a:r>
-                        <a:rPr sz="1000" b="0">
-                          <a:solidFill>
-                            <a:srgbClr val="1D1B43"/>
-                          </a:solidFill>
-                          <a:latin typeface="Calibri"/>
-                        </a:rPr>
-                        <a:t>112</a:t>
+                    <a:bodyPr/>
+                    <a:lstStyle/>
+                    <a:p>
+                      <a:pPr algn="l"/>
+                      <a:r>
+                        <a:rPr sz="1000" b="0">
+                          <a:solidFill>
+                            <a:srgbClr val="1D1B43"/>
+                          </a:solidFill>
+                          <a:latin typeface="Calibri"/>
+                        </a:rPr>
+                        <a:t>109</a:t>
                       </a:r>
                     </a:p>
                   </a:txBody>
@@ -6538,18 +6421,18 @@
                 </a:tc>
                 <a:tc>
                   <a:txBody>
-                    <a:bodyPr wrap="square"/>
-                    <a:lstStyle/>
-                    <a:p>
-                      <a:pPr algn="l"/>
-                      <a:r>
-                        <a:rPr sz="1000" b="0">
-                          <a:solidFill>
-                            <a:srgbClr val="1D1B43"/>
-                          </a:solidFill>
-                          <a:latin typeface="Calibri"/>
-                        </a:rPr>
-                        <a:t>5</a:t>
+                    <a:bodyPr/>
+                    <a:lstStyle/>
+                    <a:p>
+                      <a:pPr algn="l"/>
+                      <a:r>
+                        <a:rPr sz="1000" b="0">
+                          <a:solidFill>
+                            <a:srgbClr val="1D1B43"/>
+                          </a:solidFill>
+                          <a:latin typeface="Calibri"/>
+                        </a:rPr>
+                        <a:t>4</a:t>
                       </a:r>
                     </a:p>
                   </a:txBody>
@@ -6561,18 +6444,18 @@
                 </a:tc>
                 <a:tc>
                   <a:txBody>
-                    <a:bodyPr wrap="square"/>
-                    <a:lstStyle/>
-                    <a:p>
-                      <a:pPr algn="l"/>
-                      <a:r>
-                        <a:rPr sz="1000" b="0">
-                          <a:solidFill>
-                            <a:srgbClr val="1D1B43"/>
-                          </a:solidFill>
-                          <a:latin typeface="Calibri"/>
-                        </a:rPr>
-                        <a:t>95.7%</a:t>
+                    <a:bodyPr/>
+                    <a:lstStyle/>
+                    <a:p>
+                      <a:pPr algn="l"/>
+                      <a:r>
+                        <a:rPr sz="1000" b="0">
+                          <a:solidFill>
+                            <a:srgbClr val="1D1B43"/>
+                          </a:solidFill>
+                          <a:latin typeface="Calibri"/>
+                        </a:rPr>
+                        <a:t>96.5%</a:t>
                       </a:r>
                     </a:p>
                   </a:txBody>
@@ -6584,18 +6467,18 @@
                 </a:tc>
                 <a:tc>
                   <a:txBody>
-                    <a:bodyPr wrap="square"/>
-                    <a:lstStyle/>
-                    <a:p>
-                      <a:pPr algn="l"/>
-                      <a:r>
-                        <a:rPr sz="1000" b="0">
-                          <a:solidFill>
-                            <a:srgbClr val="1D1B43"/>
-                          </a:solidFill>
-                          <a:latin typeface="Calibri"/>
-                        </a:rPr>
-                        <a:t>Regular</a:t>
+                    <a:bodyPr/>
+                    <a:lstStyle/>
+                    <a:p>
+                      <a:pPr algn="l"/>
+                      <a:r>
+                        <a:rPr sz="1000" b="0">
+                          <a:solidFill>
+                            <a:srgbClr val="1D1B43"/>
+                          </a:solidFill>
+                          <a:latin typeface="Calibri"/>
+                        </a:rPr>
+                        <a:t>Excelente</a:t>
                       </a:r>
                     </a:p>
                   </a:txBody>
@@ -6609,7 +6492,7 @@
               <a:tr h="457200">
                 <a:tc>
                   <a:txBody>
-                    <a:bodyPr wrap="square"/>
+                    <a:bodyPr/>
                     <a:lstStyle/>
                     <a:p>
                       <a:pPr algn="l"/>
@@ -6632,7 +6515,7 @@
                 </a:tc>
                 <a:tc>
                   <a:txBody>
-                    <a:bodyPr wrap="square"/>
+                    <a:bodyPr/>
                     <a:lstStyle/>
                     <a:p>
                       <a:pPr algn="l"/>
@@ -6655,7 +6538,7 @@
                 </a:tc>
                 <a:tc>
                   <a:txBody>
-                    <a:bodyPr wrap="square"/>
+                    <a:bodyPr/>
                     <a:lstStyle/>
                     <a:p>
                       <a:pPr algn="l"/>
@@ -6678,7 +6561,7 @@
                 </a:tc>
                 <a:tc>
                   <a:txBody>
-                    <a:bodyPr wrap="square"/>
+                    <a:bodyPr/>
                     <a:lstStyle/>
                     <a:p>
                       <a:pPr algn="l"/>
@@ -6701,7 +6584,7 @@
                 </a:tc>
                 <a:tc>
                   <a:txBody>
-                    <a:bodyPr wrap="square"/>
+                    <a:bodyPr/>
                     <a:lstStyle/>
                     <a:p>
                       <a:pPr algn="l"/>
@@ -6724,7 +6607,7 @@
                 </a:tc>
                 <a:tc>
                   <a:txBody>
-                    <a:bodyPr wrap="square"/>
+                    <a:bodyPr/>
                     <a:lstStyle/>
                     <a:p>
                       <a:pPr algn="l"/>
@@ -6749,7 +6632,7 @@
               <a:tr h="457200">
                 <a:tc>
                   <a:txBody>
-                    <a:bodyPr wrap="square"/>
+                    <a:bodyPr/>
                     <a:lstStyle/>
                     <a:p>
                       <a:pPr algn="l"/>
@@ -6772,7 +6655,7 @@
                 </a:tc>
                 <a:tc>
                   <a:txBody>
-                    <a:bodyPr wrap="square"/>
+                    <a:bodyPr/>
                     <a:lstStyle/>
                     <a:p>
                       <a:pPr algn="l"/>
@@ -6795,7 +6678,7 @@
                 </a:tc>
                 <a:tc>
                   <a:txBody>
-                    <a:bodyPr wrap="square"/>
+                    <a:bodyPr/>
                     <a:lstStyle/>
                     <a:p>
                       <a:pPr algn="l"/>
@@ -6818,7 +6701,7 @@
                 </a:tc>
                 <a:tc>
                   <a:txBody>
-                    <a:bodyPr wrap="square"/>
+                    <a:bodyPr/>
                     <a:lstStyle/>
                     <a:p>
                       <a:pPr algn="l"/>
@@ -6841,7 +6724,7 @@
                 </a:tc>
                 <a:tc>
                   <a:txBody>
-                    <a:bodyPr wrap="square"/>
+                    <a:bodyPr/>
                     <a:lstStyle/>
                     <a:p>
                       <a:pPr algn="l"/>
@@ -6864,7 +6747,7 @@
                 </a:tc>
                 <a:tc>
                   <a:txBody>
-                    <a:bodyPr wrap="square"/>
+                    <a:bodyPr/>
                     <a:lstStyle/>
                     <a:p>
                       <a:pPr algn="l"/>
@@ -7048,7 +6931,7 @@
               <a:tr h="292608">
                 <a:tc>
                   <a:txBody>
-                    <a:bodyPr wrap="square"/>
+                    <a:bodyPr/>
                     <a:lstStyle/>
                     <a:p>
                       <a:pPr algn="ctr"/>
@@ -7071,7 +6954,7 @@
                 </a:tc>
                 <a:tc>
                   <a:txBody>
-                    <a:bodyPr wrap="square"/>
+                    <a:bodyPr/>
                     <a:lstStyle/>
                     <a:p>
                       <a:pPr algn="ctr"/>
@@ -7094,7 +6977,7 @@
                 </a:tc>
                 <a:tc>
                   <a:txBody>
-                    <a:bodyPr wrap="square"/>
+                    <a:bodyPr/>
                     <a:lstStyle/>
                     <a:p>
                       <a:pPr algn="ctr"/>
@@ -7117,7 +7000,7 @@
                 </a:tc>
                 <a:tc>
                   <a:txBody>
-                    <a:bodyPr wrap="square"/>
+                    <a:bodyPr/>
                     <a:lstStyle/>
                     <a:p>
                       <a:pPr algn="ctr"/>
@@ -7140,7 +7023,7 @@
                 </a:tc>
                 <a:tc>
                   <a:txBody>
-                    <a:bodyPr wrap="square"/>
+                    <a:bodyPr/>
                     <a:lstStyle/>
                     <a:p>
                       <a:pPr algn="ctr"/>
@@ -7163,7 +7046,7 @@
                 </a:tc>
                 <a:tc>
                   <a:txBody>
-                    <a:bodyPr wrap="square"/>
+                    <a:bodyPr/>
                     <a:lstStyle/>
                     <a:p>
                       <a:pPr algn="ctr"/>
@@ -7186,7 +7069,7 @@
                 </a:tc>
                 <a:tc>
                   <a:txBody>
-                    <a:bodyPr wrap="square"/>
+                    <a:bodyPr/>
                     <a:lstStyle/>
                     <a:p>
                       <a:pPr algn="ctr"/>
@@ -7211,7 +7094,7 @@
               <a:tr h="292608">
                 <a:tc>
                   <a:txBody>
-                    <a:bodyPr wrap="square"/>
+                    <a:bodyPr/>
                     <a:lstStyle/>
                     <a:p>
                       <a:pPr algn="l"/>
@@ -7234,7 +7117,7 @@
                 </a:tc>
                 <a:tc>
                   <a:txBody>
-                    <a:bodyPr wrap="square"/>
+                    <a:bodyPr/>
                     <a:lstStyle/>
                     <a:p>
                       <a:pPr algn="l"/>
@@ -7257,18 +7140,18 @@
                 </a:tc>
                 <a:tc>
                   <a:txBody>
-                    <a:bodyPr wrap="square"/>
-                    <a:lstStyle/>
-                    <a:p>
-                      <a:pPr algn="l"/>
-                      <a:r>
-                        <a:rPr sz="1000" b="0">
-                          <a:solidFill>
-                            <a:srgbClr val="1D1B43"/>
-                          </a:solidFill>
-                          <a:latin typeface="Calibri"/>
-                        </a:rPr>
-                        <a:t>64</a:t>
+                    <a:bodyPr/>
+                    <a:lstStyle/>
+                    <a:p>
+                      <a:pPr algn="l"/>
+                      <a:r>
+                        <a:rPr sz="1000" b="0">
+                          <a:solidFill>
+                            <a:srgbClr val="1D1B43"/>
+                          </a:solidFill>
+                          <a:latin typeface="Calibri"/>
+                        </a:rPr>
+                        <a:t>63</a:t>
                       </a:r>
                     </a:p>
                   </a:txBody>
@@ -7280,18 +7163,18 @@
                 </a:tc>
                 <a:tc>
                   <a:txBody>
-                    <a:bodyPr wrap="square"/>
-                    <a:lstStyle/>
-                    <a:p>
-                      <a:pPr algn="l"/>
-                      <a:r>
-                        <a:rPr sz="1000" b="0">
-                          <a:solidFill>
-                            <a:srgbClr val="1D1B43"/>
-                          </a:solidFill>
-                          <a:latin typeface="Calibri"/>
-                        </a:rPr>
-                        <a:t>62</a:t>
+                    <a:bodyPr/>
+                    <a:lstStyle/>
+                    <a:p>
+                      <a:pPr algn="l"/>
+                      <a:r>
+                        <a:rPr sz="1000" b="0">
+                          <a:solidFill>
+                            <a:srgbClr val="1D1B43"/>
+                          </a:solidFill>
+                          <a:latin typeface="Calibri"/>
+                        </a:rPr>
+                        <a:t>61</a:t>
                       </a:r>
                     </a:p>
                   </a:txBody>
@@ -7303,7 +7186,7 @@
                 </a:tc>
                 <a:tc>
                   <a:txBody>
-                    <a:bodyPr wrap="square"/>
+                    <a:bodyPr/>
                     <a:lstStyle/>
                     <a:p>
                       <a:pPr algn="l"/>
@@ -7326,18 +7209,18 @@
                 </a:tc>
                 <a:tc>
                   <a:txBody>
-                    <a:bodyPr wrap="square"/>
-                    <a:lstStyle/>
-                    <a:p>
-                      <a:pPr algn="l"/>
-                      <a:r>
-                        <a:rPr sz="1000" b="0">
-                          <a:solidFill>
-                            <a:srgbClr val="1D1B43"/>
-                          </a:solidFill>
-                          <a:latin typeface="Calibri"/>
-                        </a:rPr>
-                        <a:t>96.9%</a:t>
+                    <a:bodyPr/>
+                    <a:lstStyle/>
+                    <a:p>
+                      <a:pPr algn="l"/>
+                      <a:r>
+                        <a:rPr sz="1000" b="0">
+                          <a:solidFill>
+                            <a:srgbClr val="1D1B43"/>
+                          </a:solidFill>
+                          <a:latin typeface="Calibri"/>
+                        </a:rPr>
+                        <a:t>96.8%</a:t>
                       </a:r>
                     </a:p>
                   </a:txBody>
@@ -7349,7 +7232,7 @@
                 </a:tc>
                 <a:tc>
                   <a:txBody>
-                    <a:bodyPr wrap="square"/>
+                    <a:bodyPr/>
                     <a:lstStyle/>
                     <a:p>
                       <a:pPr algn="l"/>
@@ -7374,7 +7257,7 @@
               <a:tr h="292608">
                 <a:tc>
                   <a:txBody>
-                    <a:bodyPr wrap="square"/>
+                    <a:bodyPr/>
                     <a:lstStyle/>
                     <a:p>
                       <a:pPr algn="l"/>
@@ -7397,7 +7280,7 @@
                 </a:tc>
                 <a:tc>
                   <a:txBody>
-                    <a:bodyPr wrap="square"/>
+                    <a:bodyPr/>
                     <a:lstStyle/>
                     <a:p>
                       <a:pPr algn="l"/>
@@ -7420,7 +7303,7 @@
                 </a:tc>
                 <a:tc>
                   <a:txBody>
-                    <a:bodyPr wrap="square"/>
+                    <a:bodyPr/>
                     <a:lstStyle/>
                     <a:p>
                       <a:pPr algn="l"/>
@@ -7443,7 +7326,7 @@
                 </a:tc>
                 <a:tc>
                   <a:txBody>
-                    <a:bodyPr wrap="square"/>
+                    <a:bodyPr/>
                     <a:lstStyle/>
                     <a:p>
                       <a:pPr algn="l"/>
@@ -7466,7 +7349,7 @@
                 </a:tc>
                 <a:tc>
                   <a:txBody>
-                    <a:bodyPr wrap="square"/>
+                    <a:bodyPr/>
                     <a:lstStyle/>
                     <a:p>
                       <a:pPr algn="l"/>
@@ -7489,7 +7372,7 @@
                 </a:tc>
                 <a:tc>
                   <a:txBody>
-                    <a:bodyPr wrap="square"/>
+                    <a:bodyPr/>
                     <a:lstStyle/>
                     <a:p>
                       <a:pPr algn="l"/>
@@ -7512,7 +7395,7 @@
                 </a:tc>
                 <a:tc>
                   <a:txBody>
-                    <a:bodyPr wrap="square"/>
+                    <a:bodyPr/>
                     <a:lstStyle/>
                     <a:p>
                       <a:pPr algn="l"/>
@@ -7537,7 +7420,7 @@
               <a:tr h="292608">
                 <a:tc>
                   <a:txBody>
-                    <a:bodyPr wrap="square"/>
+                    <a:bodyPr/>
                     <a:lstStyle/>
                     <a:p>
                       <a:pPr algn="l"/>
@@ -7560,7 +7443,7 @@
                 </a:tc>
                 <a:tc>
                   <a:txBody>
-                    <a:bodyPr wrap="square"/>
+                    <a:bodyPr/>
                     <a:lstStyle/>
                     <a:p>
                       <a:pPr algn="l"/>
@@ -7583,7 +7466,7 @@
                 </a:tc>
                 <a:tc>
                   <a:txBody>
-                    <a:bodyPr wrap="square"/>
+                    <a:bodyPr/>
                     <a:lstStyle/>
                     <a:p>
                       <a:pPr algn="l"/>
@@ -7606,7 +7489,7 @@
                 </a:tc>
                 <a:tc>
                   <a:txBody>
-                    <a:bodyPr wrap="square"/>
+                    <a:bodyPr/>
                     <a:lstStyle/>
                     <a:p>
                       <a:pPr algn="l"/>
@@ -7629,7 +7512,7 @@
                 </a:tc>
                 <a:tc>
                   <a:txBody>
-                    <a:bodyPr wrap="square"/>
+                    <a:bodyPr/>
                     <a:lstStyle/>
                     <a:p>
                       <a:pPr algn="l"/>
@@ -7652,7 +7535,7 @@
                 </a:tc>
                 <a:tc>
                   <a:txBody>
-                    <a:bodyPr wrap="square"/>
+                    <a:bodyPr/>
                     <a:lstStyle/>
                     <a:p>
                       <a:pPr algn="l"/>
@@ -7675,7 +7558,7 @@
                 </a:tc>
                 <a:tc>
                   <a:txBody>
-                    <a:bodyPr wrap="square"/>
+                    <a:bodyPr/>
                     <a:lstStyle/>
                     <a:p>
                       <a:pPr algn="l"/>
@@ -7700,7 +7583,7 @@
               <a:tr h="292608">
                 <a:tc>
                   <a:txBody>
-                    <a:bodyPr wrap="square"/>
+                    <a:bodyPr/>
                     <a:lstStyle/>
                     <a:p>
                       <a:pPr algn="l"/>
@@ -7723,7 +7606,7 @@
                 </a:tc>
                 <a:tc>
                   <a:txBody>
-                    <a:bodyPr wrap="square"/>
+                    <a:bodyPr/>
                     <a:lstStyle/>
                     <a:p>
                       <a:pPr algn="l"/>
@@ -7746,7 +7629,7 @@
                 </a:tc>
                 <a:tc>
                   <a:txBody>
-                    <a:bodyPr wrap="square"/>
+                    <a:bodyPr/>
                     <a:lstStyle/>
                     <a:p>
                       <a:pPr algn="l"/>
@@ -7769,7 +7652,7 @@
                 </a:tc>
                 <a:tc>
                   <a:txBody>
-                    <a:bodyPr wrap="square"/>
+                    <a:bodyPr/>
                     <a:lstStyle/>
                     <a:p>
                       <a:pPr algn="l"/>
@@ -7792,7 +7675,7 @@
                 </a:tc>
                 <a:tc>
                   <a:txBody>
-                    <a:bodyPr wrap="square"/>
+                    <a:bodyPr/>
                     <a:lstStyle/>
                     <a:p>
                       <a:pPr algn="l"/>
@@ -7815,7 +7698,7 @@
                 </a:tc>
                 <a:tc>
                   <a:txBody>
-                    <a:bodyPr wrap="square"/>
+                    <a:bodyPr/>
                     <a:lstStyle/>
                     <a:p>
                       <a:pPr algn="l"/>
@@ -7838,7 +7721,7 @@
                 </a:tc>
                 <a:tc>
                   <a:txBody>
-                    <a:bodyPr wrap="square"/>
+                    <a:bodyPr/>
                     <a:lstStyle/>
                     <a:p>
                       <a:pPr algn="l"/>
@@ -7863,7 +7746,7 @@
               <a:tr h="292608">
                 <a:tc>
                   <a:txBody>
-                    <a:bodyPr wrap="square"/>
+                    <a:bodyPr/>
                     <a:lstStyle/>
                     <a:p>
                       <a:pPr algn="l"/>
@@ -7886,7 +7769,7 @@
                 </a:tc>
                 <a:tc>
                   <a:txBody>
-                    <a:bodyPr wrap="square"/>
+                    <a:bodyPr/>
                     <a:lstStyle/>
                     <a:p>
                       <a:pPr algn="l"/>
@@ -7909,7 +7792,7 @@
                 </a:tc>
                 <a:tc>
                   <a:txBody>
-                    <a:bodyPr wrap="square"/>
+                    <a:bodyPr/>
                     <a:lstStyle/>
                     <a:p>
                       <a:pPr algn="l"/>
@@ -7932,7 +7815,7 @@
                 </a:tc>
                 <a:tc>
                   <a:txBody>
-                    <a:bodyPr wrap="square"/>
+                    <a:bodyPr/>
                     <a:lstStyle/>
                     <a:p>
                       <a:pPr algn="l"/>
@@ -7955,7 +7838,7 @@
                 </a:tc>
                 <a:tc>
                   <a:txBody>
-                    <a:bodyPr wrap="square"/>
+                    <a:bodyPr/>
                     <a:lstStyle/>
                     <a:p>
                       <a:pPr algn="l"/>
@@ -7978,7 +7861,7 @@
                 </a:tc>
                 <a:tc>
                   <a:txBody>
-                    <a:bodyPr wrap="square"/>
+                    <a:bodyPr/>
                     <a:lstStyle/>
                     <a:p>
                       <a:pPr algn="l"/>
@@ -8001,7 +7884,7 @@
                 </a:tc>
                 <a:tc>
                   <a:txBody>
-                    <a:bodyPr wrap="square"/>
+                    <a:bodyPr/>
                     <a:lstStyle/>
                     <a:p>
                       <a:pPr algn="l"/>
@@ -8026,7 +7909,7 @@
               <a:tr h="292608">
                 <a:tc>
                   <a:txBody>
-                    <a:bodyPr wrap="square"/>
+                    <a:bodyPr/>
                     <a:lstStyle/>
                     <a:p>
                       <a:pPr algn="l"/>
@@ -8049,18 +7932,18 @@
                 </a:tc>
                 <a:tc>
                   <a:txBody>
-                    <a:bodyPr wrap="square"/>
-                    <a:lstStyle/>
-                    <a:p>
-                      <a:pPr algn="l"/>
-                      <a:r>
-                        <a:rPr sz="1000" b="0">
-                          <a:solidFill>
-                            <a:srgbClr val="1D1B43"/>
-                          </a:solidFill>
-                          <a:latin typeface="Calibri"/>
-                        </a:rPr>
-                        <a:t>CMC LUNA ACESSORIOS - SAO CAETANO DO SUL / SP</a:t>
+                    <a:bodyPr/>
+                    <a:lstStyle/>
+                    <a:p>
+                      <a:pPr algn="l"/>
+                      <a:r>
+                        <a:rPr sz="1000" b="0">
+                          <a:solidFill>
+                            <a:srgbClr val="1D1B43"/>
+                          </a:solidFill>
+                          <a:latin typeface="Calibri"/>
+                        </a:rPr>
+                        <a:t>RAPIDO XAPURI TRANSP - GUARULHOS / SP</a:t>
                       </a:r>
                     </a:p>
                   </a:txBody>
@@ -8072,7 +7955,7 @@
                 </a:tc>
                 <a:tc>
                   <a:txBody>
-                    <a:bodyPr wrap="square"/>
+                    <a:bodyPr/>
                     <a:lstStyle/>
                     <a:p>
                       <a:pPr algn="l"/>
@@ -8095,18 +7978,18 @@
                 </a:tc>
                 <a:tc>
                   <a:txBody>
-                    <a:bodyPr wrap="square"/>
-                    <a:lstStyle/>
-                    <a:p>
-                      <a:pPr algn="l"/>
-                      <a:r>
-                        <a:rPr sz="1000" b="0">
-                          <a:solidFill>
-                            <a:srgbClr val="1D1B43"/>
-                          </a:solidFill>
-                          <a:latin typeface="Calibri"/>
-                        </a:rPr>
-                        <a:t>3</a:t>
+                    <a:bodyPr/>
+                    <a:lstStyle/>
+                    <a:p>
+                      <a:pPr algn="l"/>
+                      <a:r>
+                        <a:rPr sz="1000" b="0">
+                          <a:solidFill>
+                            <a:srgbClr val="1D1B43"/>
+                          </a:solidFill>
+                          <a:latin typeface="Calibri"/>
+                        </a:rPr>
+                        <a:t>4</a:t>
                       </a:r>
                     </a:p>
                   </a:txBody>
@@ -8118,18 +8001,18 @@
                 </a:tc>
                 <a:tc>
                   <a:txBody>
-                    <a:bodyPr wrap="square"/>
-                    <a:lstStyle/>
-                    <a:p>
-                      <a:pPr algn="l"/>
-                      <a:r>
-                        <a:rPr sz="1000" b="0">
-                          <a:solidFill>
-                            <a:srgbClr val="1D1B43"/>
-                          </a:solidFill>
-                          <a:latin typeface="Calibri"/>
-                        </a:rPr>
-                        <a:t>1</a:t>
+                    <a:bodyPr/>
+                    <a:lstStyle/>
+                    <a:p>
+                      <a:pPr algn="l"/>
+                      <a:r>
+                        <a:rPr sz="1000" b="0">
+                          <a:solidFill>
+                            <a:srgbClr val="1D1B43"/>
+                          </a:solidFill>
+                          <a:latin typeface="Calibri"/>
+                        </a:rPr>
+                        <a:t>0</a:t>
                       </a:r>
                     </a:p>
                   </a:txBody>
@@ -8141,18 +8024,18 @@
                 </a:tc>
                 <a:tc>
                   <a:txBody>
-                    <a:bodyPr wrap="square"/>
-                    <a:lstStyle/>
-                    <a:p>
-                      <a:pPr algn="l"/>
-                      <a:r>
-                        <a:rPr sz="1000" b="0">
-                          <a:solidFill>
-                            <a:srgbClr val="1D1B43"/>
-                          </a:solidFill>
-                          <a:latin typeface="Calibri"/>
-                        </a:rPr>
-                        <a:t>75.0%</a:t>
+                    <a:bodyPr/>
+                    <a:lstStyle/>
+                    <a:p>
+                      <a:pPr algn="l"/>
+                      <a:r>
+                        <a:rPr sz="1000" b="0">
+                          <a:solidFill>
+                            <a:srgbClr val="1D1B43"/>
+                          </a:solidFill>
+                          <a:latin typeface="Calibri"/>
+                        </a:rPr>
+                        <a:t>100.0%</a:t>
                       </a:r>
                     </a:p>
                   </a:txBody>
@@ -8164,18 +8047,18 @@
                 </a:tc>
                 <a:tc>
                   <a:txBody>
-                    <a:bodyPr wrap="square"/>
-                    <a:lstStyle/>
-                    <a:p>
-                      <a:pPr algn="l"/>
-                      <a:r>
-                        <a:rPr sz="1000" b="0">
-                          <a:solidFill>
-                            <a:srgbClr val="1D1B43"/>
-                          </a:solidFill>
-                          <a:latin typeface="Calibri"/>
-                        </a:rPr>
-                        <a:t>Atencao</a:t>
+                    <a:bodyPr/>
+                    <a:lstStyle/>
+                    <a:p>
+                      <a:pPr algn="l"/>
+                      <a:r>
+                        <a:rPr sz="1000" b="0">
+                          <a:solidFill>
+                            <a:srgbClr val="1D1B43"/>
+                          </a:solidFill>
+                          <a:latin typeface="Calibri"/>
+                        </a:rPr>
+                        <a:t>Excelente</a:t>
                       </a:r>
                     </a:p>
                   </a:txBody>
@@ -8189,7 +8072,7 @@
               <a:tr h="292608">
                 <a:tc>
                   <a:txBody>
-                    <a:bodyPr wrap="square"/>
+                    <a:bodyPr/>
                     <a:lstStyle/>
                     <a:p>
                       <a:pPr algn="l"/>
@@ -8212,18 +8095,18 @@
                 </a:tc>
                 <a:tc>
                   <a:txBody>
-                    <a:bodyPr wrap="square"/>
-                    <a:lstStyle/>
-                    <a:p>
-                      <a:pPr algn="l"/>
-                      <a:r>
-                        <a:rPr sz="1000" b="0">
-                          <a:solidFill>
-                            <a:srgbClr val="1D1B43"/>
-                          </a:solidFill>
-                          <a:latin typeface="Calibri"/>
-                        </a:rPr>
-                        <a:t>CMGL MORUMBI ACESSOR - SAO PAULO / SP</a:t>
+                    <a:bodyPr/>
+                    <a:lstStyle/>
+                    <a:p>
+                      <a:pPr algn="l"/>
+                      <a:r>
+                        <a:rPr sz="1000" b="0">
+                          <a:solidFill>
+                            <a:srgbClr val="1D1B43"/>
+                          </a:solidFill>
+                          <a:latin typeface="Calibri"/>
+                        </a:rPr>
+                        <a:t>SASAKI MODA E ACESSO - SAO PAULO / SP</a:t>
                       </a:r>
                     </a:p>
                   </a:txBody>
@@ -8235,7 +8118,7 @@
                 </a:tc>
                 <a:tc>
                   <a:txBody>
-                    <a:bodyPr wrap="square"/>
+                    <a:bodyPr/>
                     <a:lstStyle/>
                     <a:p>
                       <a:pPr algn="l"/>
@@ -8258,18 +8141,18 @@
                 </a:tc>
                 <a:tc>
                   <a:txBody>
-                    <a:bodyPr wrap="square"/>
-                    <a:lstStyle/>
-                    <a:p>
-                      <a:pPr algn="l"/>
-                      <a:r>
-                        <a:rPr sz="1000" b="0">
-                          <a:solidFill>
-                            <a:srgbClr val="1D1B43"/>
-                          </a:solidFill>
-                          <a:latin typeface="Calibri"/>
-                        </a:rPr>
-                        <a:t>3</a:t>
+                    <a:bodyPr/>
+                    <a:lstStyle/>
+                    <a:p>
+                      <a:pPr algn="l"/>
+                      <a:r>
+                        <a:rPr sz="1000" b="0">
+                          <a:solidFill>
+                            <a:srgbClr val="1D1B43"/>
+                          </a:solidFill>
+                          <a:latin typeface="Calibri"/>
+                        </a:rPr>
+                        <a:t>4</a:t>
                       </a:r>
                     </a:p>
                   </a:txBody>
@@ -8281,18 +8164,18 @@
                 </a:tc>
                 <a:tc>
                   <a:txBody>
-                    <a:bodyPr wrap="square"/>
-                    <a:lstStyle/>
-                    <a:p>
-                      <a:pPr algn="l"/>
-                      <a:r>
-                        <a:rPr sz="1000" b="0">
-                          <a:solidFill>
-                            <a:srgbClr val="1D1B43"/>
-                          </a:solidFill>
-                          <a:latin typeface="Calibri"/>
-                        </a:rPr>
-                        <a:t>1</a:t>
+                    <a:bodyPr/>
+                    <a:lstStyle/>
+                    <a:p>
+                      <a:pPr algn="l"/>
+                      <a:r>
+                        <a:rPr sz="1000" b="0">
+                          <a:solidFill>
+                            <a:srgbClr val="1D1B43"/>
+                          </a:solidFill>
+                          <a:latin typeface="Calibri"/>
+                        </a:rPr>
+                        <a:t>0</a:t>
                       </a:r>
                     </a:p>
                   </a:txBody>
@@ -8304,18 +8187,18 @@
                 </a:tc>
                 <a:tc>
                   <a:txBody>
-                    <a:bodyPr wrap="square"/>
-                    <a:lstStyle/>
-                    <a:p>
-                      <a:pPr algn="l"/>
-                      <a:r>
-                        <a:rPr sz="1000" b="0">
-                          <a:solidFill>
-                            <a:srgbClr val="1D1B43"/>
-                          </a:solidFill>
-                          <a:latin typeface="Calibri"/>
-                        </a:rPr>
-                        <a:t>75.0%</a:t>
+                    <a:bodyPr/>
+                    <a:lstStyle/>
+                    <a:p>
+                      <a:pPr algn="l"/>
+                      <a:r>
+                        <a:rPr sz="1000" b="0">
+                          <a:solidFill>
+                            <a:srgbClr val="1D1B43"/>
+                          </a:solidFill>
+                          <a:latin typeface="Calibri"/>
+                        </a:rPr>
+                        <a:t>100.0%</a:t>
                       </a:r>
                     </a:p>
                   </a:txBody>
@@ -8327,18 +8210,18 @@
                 </a:tc>
                 <a:tc>
                   <a:txBody>
-                    <a:bodyPr wrap="square"/>
-                    <a:lstStyle/>
-                    <a:p>
-                      <a:pPr algn="l"/>
-                      <a:r>
-                        <a:rPr sz="1000" b="0">
-                          <a:solidFill>
-                            <a:srgbClr val="1D1B43"/>
-                          </a:solidFill>
-                          <a:latin typeface="Calibri"/>
-                        </a:rPr>
-                        <a:t>Atencao</a:t>
+                    <a:bodyPr/>
+                    <a:lstStyle/>
+                    <a:p>
+                      <a:pPr algn="l"/>
+                      <a:r>
+                        <a:rPr sz="1000" b="0">
+                          <a:solidFill>
+                            <a:srgbClr val="1D1B43"/>
+                          </a:solidFill>
+                          <a:latin typeface="Calibri"/>
+                        </a:rPr>
+                        <a:t>Excelente</a:t>
                       </a:r>
                     </a:p>
                   </a:txBody>
@@ -8352,7 +8235,7 @@
               <a:tr h="292608">
                 <a:tc>
                   <a:txBody>
-                    <a:bodyPr wrap="square"/>
+                    <a:bodyPr/>
                     <a:lstStyle/>
                     <a:p>
                       <a:pPr algn="l"/>
@@ -8375,18 +8258,18 @@
                 </a:tc>
                 <a:tc>
                   <a:txBody>
-                    <a:bodyPr wrap="square"/>
-                    <a:lstStyle/>
-                    <a:p>
-                      <a:pPr algn="l"/>
-                      <a:r>
-                        <a:rPr sz="1000" b="0">
-                          <a:solidFill>
-                            <a:srgbClr val="1D1B43"/>
-                          </a:solidFill>
-                          <a:latin typeface="Calibri"/>
-                        </a:rPr>
-                        <a:t>LAROCCA MODA E ACESS - SAO PAULO / SP</a:t>
+                    <a:bodyPr/>
+                    <a:lstStyle/>
+                    <a:p>
+                      <a:pPr algn="l"/>
+                      <a:r>
+                        <a:rPr sz="1000" b="0">
+                          <a:solidFill>
+                            <a:srgbClr val="1D1B43"/>
+                          </a:solidFill>
+                          <a:latin typeface="Calibri"/>
+                        </a:rPr>
+                        <a:t>MAJO MODAS E ACESSOR - MOGI GUACU / SP</a:t>
                       </a:r>
                     </a:p>
                   </a:txBody>
@@ -8398,7 +8281,7 @@
                 </a:tc>
                 <a:tc>
                   <a:txBody>
-                    <a:bodyPr wrap="square"/>
+                    <a:bodyPr/>
                     <a:lstStyle/>
                     <a:p>
                       <a:pPr algn="l"/>
@@ -8421,7 +8304,7 @@
                 </a:tc>
                 <a:tc>
                   <a:txBody>
-                    <a:bodyPr wrap="square"/>
+                    <a:bodyPr/>
                     <a:lstStyle/>
                     <a:p>
                       <a:pPr algn="l"/>
@@ -8444,7 +8327,7 @@
                 </a:tc>
                 <a:tc>
                   <a:txBody>
-                    <a:bodyPr wrap="square"/>
+                    <a:bodyPr/>
                     <a:lstStyle/>
                     <a:p>
                       <a:pPr algn="l"/>
@@ -8467,7 +8350,7 @@
                 </a:tc>
                 <a:tc>
                   <a:txBody>
-                    <a:bodyPr wrap="square"/>
+                    <a:bodyPr/>
                     <a:lstStyle/>
                     <a:p>
                       <a:pPr algn="l"/>
@@ -8490,7 +8373,7 @@
                 </a:tc>
                 <a:tc>
                   <a:txBody>
-                    <a:bodyPr wrap="square"/>
+                    <a:bodyPr/>
                     <a:lstStyle/>
                     <a:p>
                       <a:pPr algn="l"/>
@@ -8515,7 +8398,7 @@
               <a:tr h="292608">
                 <a:tc>
                   <a:txBody>
-                    <a:bodyPr wrap="square"/>
+                    <a:bodyPr/>
                     <a:lstStyle/>
                     <a:p>
                       <a:pPr algn="l"/>
@@ -8538,18 +8421,18 @@
                 </a:tc>
                 <a:tc>
                   <a:txBody>
-                    <a:bodyPr wrap="square"/>
-                    <a:lstStyle/>
-                    <a:p>
-                      <a:pPr algn="l"/>
-                      <a:r>
-                        <a:rPr sz="1000" b="0">
-                          <a:solidFill>
-                            <a:srgbClr val="1D1B43"/>
-                          </a:solidFill>
-                          <a:latin typeface="Calibri"/>
-                        </a:rPr>
-                        <a:t>CMC LITTLE STORE LTD - SAO PAULO / SP</a:t>
+                    <a:bodyPr/>
+                    <a:lstStyle/>
+                    <a:p>
+                      <a:pPr algn="l"/>
+                      <a:r>
+                        <a:rPr sz="1000" b="0">
+                          <a:solidFill>
+                            <a:srgbClr val="1D1B43"/>
+                          </a:solidFill>
+                          <a:latin typeface="Calibri"/>
+                        </a:rPr>
+                        <a:t>LAROCCA MODA E ACESS - SAO PAULO / SP</a:t>
                       </a:r>
                     </a:p>
                   </a:txBody>
@@ -8561,7 +8444,7 @@
                 </a:tc>
                 <a:tc>
                   <a:txBody>
-                    <a:bodyPr wrap="square"/>
+                    <a:bodyPr/>
                     <a:lstStyle/>
                     <a:p>
                       <a:pPr algn="l"/>
@@ -8584,18 +8467,18 @@
                 </a:tc>
                 <a:tc>
                   <a:txBody>
-                    <a:bodyPr wrap="square"/>
-                    <a:lstStyle/>
-                    <a:p>
-                      <a:pPr algn="l"/>
-                      <a:r>
-                        <a:rPr sz="1000" b="0">
-                          <a:solidFill>
-                            <a:srgbClr val="1D1B43"/>
-                          </a:solidFill>
-                          <a:latin typeface="Calibri"/>
-                        </a:rPr>
-                        <a:t>3</a:t>
+                    <a:bodyPr/>
+                    <a:lstStyle/>
+                    <a:p>
+                      <a:pPr algn="l"/>
+                      <a:r>
+                        <a:rPr sz="1000" b="0">
+                          <a:solidFill>
+                            <a:srgbClr val="1D1B43"/>
+                          </a:solidFill>
+                          <a:latin typeface="Calibri"/>
+                        </a:rPr>
+                        <a:t>4</a:t>
                       </a:r>
                     </a:p>
                   </a:txBody>
@@ -8607,18 +8490,18 @@
                 </a:tc>
                 <a:tc>
                   <a:txBody>
-                    <a:bodyPr wrap="square"/>
-                    <a:lstStyle/>
-                    <a:p>
-                      <a:pPr algn="l"/>
-                      <a:r>
-                        <a:rPr sz="1000" b="0">
-                          <a:solidFill>
-                            <a:srgbClr val="1D1B43"/>
-                          </a:solidFill>
-                          <a:latin typeface="Calibri"/>
-                        </a:rPr>
-                        <a:t>1</a:t>
+                    <a:bodyPr/>
+                    <a:lstStyle/>
+                    <a:p>
+                      <a:pPr algn="l"/>
+                      <a:r>
+                        <a:rPr sz="1000" b="0">
+                          <a:solidFill>
+                            <a:srgbClr val="1D1B43"/>
+                          </a:solidFill>
+                          <a:latin typeface="Calibri"/>
+                        </a:rPr>
+                        <a:t>0</a:t>
                       </a:r>
                     </a:p>
                   </a:txBody>
@@ -8630,18 +8513,18 @@
                 </a:tc>
                 <a:tc>
                   <a:txBody>
-                    <a:bodyPr wrap="square"/>
-                    <a:lstStyle/>
-                    <a:p>
-                      <a:pPr algn="l"/>
-                      <a:r>
-                        <a:rPr sz="1000" b="0">
-                          <a:solidFill>
-                            <a:srgbClr val="1D1B43"/>
-                          </a:solidFill>
-                          <a:latin typeface="Calibri"/>
-                        </a:rPr>
-                        <a:t>75.0%</a:t>
+                    <a:bodyPr/>
+                    <a:lstStyle/>
+                    <a:p>
+                      <a:pPr algn="l"/>
+                      <a:r>
+                        <a:rPr sz="1000" b="0">
+                          <a:solidFill>
+                            <a:srgbClr val="1D1B43"/>
+                          </a:solidFill>
+                          <a:latin typeface="Calibri"/>
+                        </a:rPr>
+                        <a:t>100.0%</a:t>
                       </a:r>
                     </a:p>
                   </a:txBody>
@@ -8653,18 +8536,18 @@
                 </a:tc>
                 <a:tc>
                   <a:txBody>
-                    <a:bodyPr wrap="square"/>
-                    <a:lstStyle/>
-                    <a:p>
-                      <a:pPr algn="l"/>
-                      <a:r>
-                        <a:rPr sz="1000" b="0">
-                          <a:solidFill>
-                            <a:srgbClr val="1D1B43"/>
-                          </a:solidFill>
-                          <a:latin typeface="Calibri"/>
-                        </a:rPr>
-                        <a:t>Atencao</a:t>
+                    <a:bodyPr/>
+                    <a:lstStyle/>
+                    <a:p>
+                      <a:pPr algn="l"/>
+                      <a:r>
+                        <a:rPr sz="1000" b="0">
+                          <a:solidFill>
+                            <a:srgbClr val="1D1B43"/>
+                          </a:solidFill>
+                          <a:latin typeface="Calibri"/>
+                        </a:rPr>
+                        <a:t>Excelente</a:t>
                       </a:r>
                     </a:p>
                   </a:txBody>
@@ -8678,7 +8561,7 @@
               <a:tr h="292608">
                 <a:tc>
                   <a:txBody>
-                    <a:bodyPr wrap="square"/>
+                    <a:bodyPr/>
                     <a:lstStyle/>
                     <a:p>
                       <a:pPr algn="l"/>
@@ -8701,18 +8584,18 @@
                 </a:tc>
                 <a:tc>
                   <a:txBody>
-                    <a:bodyPr wrap="square"/>
-                    <a:lstStyle/>
-                    <a:p>
-                      <a:pPr algn="l"/>
-                      <a:r>
-                        <a:rPr sz="1000" b="0">
-                          <a:solidFill>
-                            <a:srgbClr val="1D1B43"/>
-                          </a:solidFill>
-                          <a:latin typeface="Calibri"/>
-                        </a:rPr>
-                        <a:t>SASAKI MODA E ACESSO - SAO PAULO / SP</a:t>
+                    <a:bodyPr/>
+                    <a:lstStyle/>
+                    <a:p>
+                      <a:pPr algn="l"/>
+                      <a:r>
+                        <a:rPr sz="1000" b="0">
+                          <a:solidFill>
+                            <a:srgbClr val="1D1B43"/>
+                          </a:solidFill>
+                          <a:latin typeface="Calibri"/>
+                        </a:rPr>
+                        <a:t>GIRASSOL ACESSORIOS - SAO PAULO / SP</a:t>
                       </a:r>
                     </a:p>
                   </a:txBody>
@@ -8724,18 +8607,18 @@
                 </a:tc>
                 <a:tc>
                   <a:txBody>
-                    <a:bodyPr wrap="square"/>
-                    <a:lstStyle/>
-                    <a:p>
-                      <a:pPr algn="l"/>
-                      <a:r>
-                        <a:rPr sz="1000" b="0">
-                          <a:solidFill>
-                            <a:srgbClr val="1D1B43"/>
-                          </a:solidFill>
-                          <a:latin typeface="Calibri"/>
-                        </a:rPr>
-                        <a:t>4</a:t>
+                    <a:bodyPr/>
+                    <a:lstStyle/>
+                    <a:p>
+                      <a:pPr algn="l"/>
+                      <a:r>
+                        <a:rPr sz="1000" b="0">
+                          <a:solidFill>
+                            <a:srgbClr val="1D1B43"/>
+                          </a:solidFill>
+                          <a:latin typeface="Calibri"/>
+                        </a:rPr>
+                        <a:t>3</a:t>
                       </a:r>
                     </a:p>
                   </a:txBody>
@@ -8747,18 +8630,18 @@
                 </a:tc>
                 <a:tc>
                   <a:txBody>
-                    <a:bodyPr wrap="square"/>
-                    <a:lstStyle/>
-                    <a:p>
-                      <a:pPr algn="l"/>
-                      <a:r>
-                        <a:rPr sz="1000" b="0">
-                          <a:solidFill>
-                            <a:srgbClr val="1D1B43"/>
-                          </a:solidFill>
-                          <a:latin typeface="Calibri"/>
-                        </a:rPr>
-                        <a:t>4</a:t>
+                    <a:bodyPr/>
+                    <a:lstStyle/>
+                    <a:p>
+                      <a:pPr algn="l"/>
+                      <a:r>
+                        <a:rPr sz="1000" b="0">
+                          <a:solidFill>
+                            <a:srgbClr val="1D1B43"/>
+                          </a:solidFill>
+                          <a:latin typeface="Calibri"/>
+                        </a:rPr>
+                        <a:t>3</a:t>
                       </a:r>
                     </a:p>
                   </a:txBody>
@@ -8770,7 +8653,7 @@
                 </a:tc>
                 <a:tc>
                   <a:txBody>
-                    <a:bodyPr wrap="square"/>
+                    <a:bodyPr/>
                     <a:lstStyle/>
                     <a:p>
                       <a:pPr algn="l"/>
@@ -8793,7 +8676,7 @@
                 </a:tc>
                 <a:tc>
                   <a:txBody>
-                    <a:bodyPr wrap="square"/>
+                    <a:bodyPr/>
                     <a:lstStyle/>
                     <a:p>
                       <a:pPr algn="l"/>
@@ -8816,7 +8699,7 @@
                 </a:tc>
                 <a:tc>
                   <a:txBody>
-                    <a:bodyPr wrap="square"/>
+                    <a:bodyPr/>
                     <a:lstStyle/>
                     <a:p>
                       <a:pPr algn="l"/>
@@ -8841,7 +8724,7 @@
               <a:tr h="292608">
                 <a:tc>
                   <a:txBody>
-                    <a:bodyPr wrap="square"/>
+                    <a:bodyPr/>
                     <a:lstStyle/>
                     <a:p>
                       <a:pPr algn="l"/>
@@ -8864,18 +8747,18 @@
                 </a:tc>
                 <a:tc>
                   <a:txBody>
-                    <a:bodyPr wrap="square"/>
-                    <a:lstStyle/>
-                    <a:p>
-                      <a:pPr algn="l"/>
-                      <a:r>
-                        <a:rPr sz="1000" b="0">
-                          <a:solidFill>
-                            <a:srgbClr val="1D1B43"/>
-                          </a:solidFill>
-                          <a:latin typeface="Calibri"/>
-                        </a:rPr>
-                        <a:t>MAJO MODAS E ACESSOR - MOGI GUACU / SP</a:t>
+                    <a:bodyPr/>
+                    <a:lstStyle/>
+                    <a:p>
+                      <a:pPr algn="l"/>
+                      <a:r>
+                        <a:rPr sz="1000" b="0">
+                          <a:solidFill>
+                            <a:srgbClr val="1D1B43"/>
+                          </a:solidFill>
+                          <a:latin typeface="Calibri"/>
+                        </a:rPr>
+                        <a:t>CMGL MORUMBI ACESSOR - SAO PAULO / SP</a:t>
                       </a:r>
                     </a:p>
                   </a:txBody>
@@ -8887,18 +8770,18 @@
                 </a:tc>
                 <a:tc>
                   <a:txBody>
-                    <a:bodyPr wrap="square"/>
-                    <a:lstStyle/>
-                    <a:p>
-                      <a:pPr algn="l"/>
-                      <a:r>
-                        <a:rPr sz="1000" b="0">
-                          <a:solidFill>
-                            <a:srgbClr val="1D1B43"/>
-                          </a:solidFill>
-                          <a:latin typeface="Calibri"/>
-                        </a:rPr>
-                        <a:t>4</a:t>
+                    <a:bodyPr/>
+                    <a:lstStyle/>
+                    <a:p>
+                      <a:pPr algn="l"/>
+                      <a:r>
+                        <a:rPr sz="1000" b="0">
+                          <a:solidFill>
+                            <a:srgbClr val="1D1B43"/>
+                          </a:solidFill>
+                          <a:latin typeface="Calibri"/>
+                        </a:rPr>
+                        <a:t>3</a:t>
                       </a:r>
                     </a:p>
                   </a:txBody>
@@ -8910,18 +8793,18 @@
                 </a:tc>
                 <a:tc>
                   <a:txBody>
-                    <a:bodyPr wrap="square"/>
-                    <a:lstStyle/>
-                    <a:p>
-                      <a:pPr algn="l"/>
-                      <a:r>
-                        <a:rPr sz="1000" b="0">
-                          <a:solidFill>
-                            <a:srgbClr val="1D1B43"/>
-                          </a:solidFill>
-                          <a:latin typeface="Calibri"/>
-                        </a:rPr>
-                        <a:t>4</a:t>
+                    <a:bodyPr/>
+                    <a:lstStyle/>
+                    <a:p>
+                      <a:pPr algn="l"/>
+                      <a:r>
+                        <a:rPr sz="1000" b="0">
+                          <a:solidFill>
+                            <a:srgbClr val="1D1B43"/>
+                          </a:solidFill>
+                          <a:latin typeface="Calibri"/>
+                        </a:rPr>
+                        <a:t>3</a:t>
                       </a:r>
                     </a:p>
                   </a:txBody>
@@ -8933,7 +8816,7 @@
                 </a:tc>
                 <a:tc>
                   <a:txBody>
-                    <a:bodyPr wrap="square"/>
+                    <a:bodyPr/>
                     <a:lstStyle/>
                     <a:p>
                       <a:pPr algn="l"/>
@@ -8956,7 +8839,7 @@
                 </a:tc>
                 <a:tc>
                   <a:txBody>
-                    <a:bodyPr wrap="square"/>
+                    <a:bodyPr/>
                     <a:lstStyle/>
                     <a:p>
                       <a:pPr algn="l"/>
@@ -8979,7 +8862,7 @@
                 </a:tc>
                 <a:tc>
                   <a:txBody>
-                    <a:bodyPr wrap="square"/>
+                    <a:bodyPr/>
                     <a:lstStyle/>
                     <a:p>
                       <a:pPr algn="l"/>
@@ -9004,7 +8887,7 @@
               <a:tr h="292608">
                 <a:tc>
                   <a:txBody>
-                    <a:bodyPr wrap="square"/>
+                    <a:bodyPr/>
                     <a:lstStyle/>
                     <a:p>
                       <a:pPr algn="l"/>
@@ -9027,18 +8910,18 @@
                 </a:tc>
                 <a:tc>
                   <a:txBody>
-                    <a:bodyPr wrap="square"/>
-                    <a:lstStyle/>
-                    <a:p>
-                      <a:pPr algn="l"/>
-                      <a:r>
-                        <a:rPr sz="1000" b="0">
-                          <a:solidFill>
-                            <a:srgbClr val="1D1B43"/>
-                          </a:solidFill>
-                          <a:latin typeface="Calibri"/>
-                        </a:rPr>
-                        <a:t>RAPIDO XAPURI TRANSP - GUARULHOS / SP</a:t>
+                    <a:bodyPr/>
+                    <a:lstStyle/>
+                    <a:p>
+                      <a:pPr algn="l"/>
+                      <a:r>
+                        <a:rPr sz="1000" b="0">
+                          <a:solidFill>
+                            <a:srgbClr val="1D1B43"/>
+                          </a:solidFill>
+                          <a:latin typeface="Calibri"/>
+                        </a:rPr>
+                        <a:t>CMC LUNA ACESSORIOS - SAO CAETANO DO SUL / SP</a:t>
                       </a:r>
                     </a:p>
                   </a:txBody>
@@ -9050,18 +8933,18 @@
                 </a:tc>
                 <a:tc>
                   <a:txBody>
-                    <a:bodyPr wrap="square"/>
-                    <a:lstStyle/>
-                    <a:p>
-                      <a:pPr algn="l"/>
-                      <a:r>
-                        <a:rPr sz="1000" b="0">
-                          <a:solidFill>
-                            <a:srgbClr val="1D1B43"/>
-                          </a:solidFill>
-                          <a:latin typeface="Calibri"/>
-                        </a:rPr>
-                        <a:t>4</a:t>
+                    <a:bodyPr/>
+                    <a:lstStyle/>
+                    <a:p>
+                      <a:pPr algn="l"/>
+                      <a:r>
+                        <a:rPr sz="1000" b="0">
+                          <a:solidFill>
+                            <a:srgbClr val="1D1B43"/>
+                          </a:solidFill>
+                          <a:latin typeface="Calibri"/>
+                        </a:rPr>
+                        <a:t>3</a:t>
                       </a:r>
                     </a:p>
                   </a:txBody>
@@ -9073,18 +8956,18 @@
                 </a:tc>
                 <a:tc>
                   <a:txBody>
-                    <a:bodyPr wrap="square"/>
-                    <a:lstStyle/>
-                    <a:p>
-                      <a:pPr algn="l"/>
-                      <a:r>
-                        <a:rPr sz="1000" b="0">
-                          <a:solidFill>
-                            <a:srgbClr val="1D1B43"/>
-                          </a:solidFill>
-                          <a:latin typeface="Calibri"/>
-                        </a:rPr>
-                        <a:t>4</a:t>
+                    <a:bodyPr/>
+                    <a:lstStyle/>
+                    <a:p>
+                      <a:pPr algn="l"/>
+                      <a:r>
+                        <a:rPr sz="1000" b="0">
+                          <a:solidFill>
+                            <a:srgbClr val="1D1B43"/>
+                          </a:solidFill>
+                          <a:latin typeface="Calibri"/>
+                        </a:rPr>
+                        <a:t>2</a:t>
                       </a:r>
                     </a:p>
                   </a:txBody>
@@ -9096,18 +8979,18 @@
                 </a:tc>
                 <a:tc>
                   <a:txBody>
-                    <a:bodyPr wrap="square"/>
-                    <a:lstStyle/>
-                    <a:p>
-                      <a:pPr algn="l"/>
-                      <a:r>
-                        <a:rPr sz="1000" b="0">
-                          <a:solidFill>
-                            <a:srgbClr val="1D1B43"/>
-                          </a:solidFill>
-                          <a:latin typeface="Calibri"/>
-                        </a:rPr>
-                        <a:t>0</a:t>
+                    <a:bodyPr/>
+                    <a:lstStyle/>
+                    <a:p>
+                      <a:pPr algn="l"/>
+                      <a:r>
+                        <a:rPr sz="1000" b="0">
+                          <a:solidFill>
+                            <a:srgbClr val="1D1B43"/>
+                          </a:solidFill>
+                          <a:latin typeface="Calibri"/>
+                        </a:rPr>
+                        <a:t>1</a:t>
                       </a:r>
                     </a:p>
                   </a:txBody>
@@ -9119,18 +9002,18 @@
                 </a:tc>
                 <a:tc>
                   <a:txBody>
-                    <a:bodyPr wrap="square"/>
-                    <a:lstStyle/>
-                    <a:p>
-                      <a:pPr algn="l"/>
-                      <a:r>
-                        <a:rPr sz="1000" b="0">
-                          <a:solidFill>
-                            <a:srgbClr val="1D1B43"/>
-                          </a:solidFill>
-                          <a:latin typeface="Calibri"/>
-                        </a:rPr>
-                        <a:t>100.0%</a:t>
+                    <a:bodyPr/>
+                    <a:lstStyle/>
+                    <a:p>
+                      <a:pPr algn="l"/>
+                      <a:r>
+                        <a:rPr sz="1000" b="0">
+                          <a:solidFill>
+                            <a:srgbClr val="1D1B43"/>
+                          </a:solidFill>
+                          <a:latin typeface="Calibri"/>
+                        </a:rPr>
+                        <a:t>66.7%</a:t>
                       </a:r>
                     </a:p>
                   </a:txBody>
@@ -9142,18 +9025,18 @@
                 </a:tc>
                 <a:tc>
                   <a:txBody>
-                    <a:bodyPr wrap="square"/>
-                    <a:lstStyle/>
-                    <a:p>
-                      <a:pPr algn="l"/>
-                      <a:r>
-                        <a:rPr sz="1000" b="0">
-                          <a:solidFill>
-                            <a:srgbClr val="1D1B43"/>
-                          </a:solidFill>
-                          <a:latin typeface="Calibri"/>
-                        </a:rPr>
-                        <a:t>Excelente</a:t>
+                    <a:bodyPr/>
+                    <a:lstStyle/>
+                    <a:p>
+                      <a:pPr algn="l"/>
+                      <a:r>
+                        <a:rPr sz="1000" b="0">
+                          <a:solidFill>
+                            <a:srgbClr val="1D1B43"/>
+                          </a:solidFill>
+                          <a:latin typeface="Calibri"/>
+                        </a:rPr>
+                        <a:t>Atencao</a:t>
                       </a:r>
                     </a:p>
                   </a:txBody>
@@ -9167,7 +9050,7 @@
               <a:tr h="292608">
                 <a:tc>
                   <a:txBody>
-                    <a:bodyPr wrap="square"/>
+                    <a:bodyPr/>
                     <a:lstStyle/>
                     <a:p>
                       <a:pPr algn="l"/>
@@ -9190,18 +9073,18 @@
                 </a:tc>
                 <a:tc>
                   <a:txBody>
-                    <a:bodyPr wrap="square"/>
-                    <a:lstStyle/>
-                    <a:p>
-                      <a:pPr algn="l"/>
-                      <a:r>
-                        <a:rPr sz="1000" b="0">
-                          <a:solidFill>
-                            <a:srgbClr val="1D1B43"/>
-                          </a:solidFill>
-                          <a:latin typeface="Calibri"/>
-                        </a:rPr>
-                        <a:t>GIRASSOL ACESSORIOS - SAO PAULO / SP</a:t>
+                    <a:bodyPr/>
+                    <a:lstStyle/>
+                    <a:p>
+                      <a:pPr algn="l"/>
+                      <a:r>
+                        <a:rPr sz="1000" b="0">
+                          <a:solidFill>
+                            <a:srgbClr val="1D1B43"/>
+                          </a:solidFill>
+                          <a:latin typeface="Calibri"/>
+                        </a:rPr>
+                        <a:t>CMC LITTLE STORE LTD - SAO PAULO / SP</a:t>
                       </a:r>
                     </a:p>
                   </a:txBody>
@@ -9213,7 +9096,7 @@
                 </a:tc>
                 <a:tc>
                   <a:txBody>
-                    <a:bodyPr wrap="square"/>
+                    <a:bodyPr/>
                     <a:lstStyle/>
                     <a:p>
                       <a:pPr algn="l"/>
@@ -9236,18 +9119,18 @@
                 </a:tc>
                 <a:tc>
                   <a:txBody>
-                    <a:bodyPr wrap="square"/>
-                    <a:lstStyle/>
-                    <a:p>
-                      <a:pPr algn="l"/>
-                      <a:r>
-                        <a:rPr sz="1000" b="0">
-                          <a:solidFill>
-                            <a:srgbClr val="1D1B43"/>
-                          </a:solidFill>
-                          <a:latin typeface="Calibri"/>
-                        </a:rPr>
-                        <a:t>3</a:t>
+                    <a:bodyPr/>
+                    <a:lstStyle/>
+                    <a:p>
+                      <a:pPr algn="l"/>
+                      <a:r>
+                        <a:rPr sz="1000" b="0">
+                          <a:solidFill>
+                            <a:srgbClr val="1D1B43"/>
+                          </a:solidFill>
+                          <a:latin typeface="Calibri"/>
+                        </a:rPr>
+                        <a:t>2</a:t>
                       </a:r>
                     </a:p>
                   </a:txBody>
@@ -9259,18 +9142,18 @@
                 </a:tc>
                 <a:tc>
                   <a:txBody>
-                    <a:bodyPr wrap="square"/>
-                    <a:lstStyle/>
-                    <a:p>
-                      <a:pPr algn="l"/>
-                      <a:r>
-                        <a:rPr sz="1000" b="0">
-                          <a:solidFill>
-                            <a:srgbClr val="1D1B43"/>
-                          </a:solidFill>
-                          <a:latin typeface="Calibri"/>
-                        </a:rPr>
-                        <a:t>0</a:t>
+                    <a:bodyPr/>
+                    <a:lstStyle/>
+                    <a:p>
+                      <a:pPr algn="l"/>
+                      <a:r>
+                        <a:rPr sz="1000" b="0">
+                          <a:solidFill>
+                            <a:srgbClr val="1D1B43"/>
+                          </a:solidFill>
+                          <a:latin typeface="Calibri"/>
+                        </a:rPr>
+                        <a:t>1</a:t>
                       </a:r>
                     </a:p>
                   </a:txBody>
@@ -9282,18 +9165,18 @@
                 </a:tc>
                 <a:tc>
                   <a:txBody>
-                    <a:bodyPr wrap="square"/>
-                    <a:lstStyle/>
-                    <a:p>
-                      <a:pPr algn="l"/>
-                      <a:r>
-                        <a:rPr sz="1000" b="0">
-                          <a:solidFill>
-                            <a:srgbClr val="1D1B43"/>
-                          </a:solidFill>
-                          <a:latin typeface="Calibri"/>
-                        </a:rPr>
-                        <a:t>100.0%</a:t>
+                    <a:bodyPr/>
+                    <a:lstStyle/>
+                    <a:p>
+                      <a:pPr algn="l"/>
+                      <a:r>
+                        <a:rPr sz="1000" b="0">
+                          <a:solidFill>
+                            <a:srgbClr val="1D1B43"/>
+                          </a:solidFill>
+                          <a:latin typeface="Calibri"/>
+                        </a:rPr>
+                        <a:t>66.7%</a:t>
                       </a:r>
                     </a:p>
                   </a:txBody>
@@ -9305,18 +9188,18 @@
                 </a:tc>
                 <a:tc>
                   <a:txBody>
-                    <a:bodyPr wrap="square"/>
-                    <a:lstStyle/>
-                    <a:p>
-                      <a:pPr algn="l"/>
-                      <a:r>
-                        <a:rPr sz="1000" b="0">
-                          <a:solidFill>
-                            <a:srgbClr val="1D1B43"/>
-                          </a:solidFill>
-                          <a:latin typeface="Calibri"/>
-                        </a:rPr>
-                        <a:t>Excelente</a:t>
+                    <a:bodyPr/>
+                    <a:lstStyle/>
+                    <a:p>
+                      <a:pPr algn="l"/>
+                      <a:r>
+                        <a:rPr sz="1000" b="0">
+                          <a:solidFill>
+                            <a:srgbClr val="1D1B43"/>
+                          </a:solidFill>
+                          <a:latin typeface="Calibri"/>
+                        </a:rPr>
+                        <a:t>Atencao</a:t>
                       </a:r>
                     </a:p>
                   </a:txBody>
@@ -9330,7 +9213,7 @@
               <a:tr h="292608">
                 <a:tc>
                   <a:txBody>
-                    <a:bodyPr wrap="square"/>
+                    <a:bodyPr/>
                     <a:lstStyle/>
                     <a:p>
                       <a:pPr algn="l"/>
@@ -9353,7 +9236,7 @@
                 </a:tc>
                 <a:tc>
                   <a:txBody>
-                    <a:bodyPr wrap="square"/>
+                    <a:bodyPr/>
                     <a:lstStyle/>
                     <a:p>
                       <a:pPr algn="l"/>
@@ -9376,7 +9259,7 @@
                 </a:tc>
                 <a:tc>
                   <a:txBody>
-                    <a:bodyPr wrap="square"/>
+                    <a:bodyPr/>
                     <a:lstStyle/>
                     <a:p>
                       <a:pPr algn="l"/>
@@ -9399,7 +9282,7 @@
                 </a:tc>
                 <a:tc>
                   <a:txBody>
-                    <a:bodyPr wrap="square"/>
+                    <a:bodyPr/>
                     <a:lstStyle/>
                     <a:p>
                       <a:pPr algn="l"/>
@@ -9422,7 +9305,7 @@
                 </a:tc>
                 <a:tc>
                   <a:txBody>
-                    <a:bodyPr wrap="square"/>
+                    <a:bodyPr/>
                     <a:lstStyle/>
                     <a:p>
                       <a:pPr algn="l"/>
@@ -9445,7 +9328,7 @@
                 </a:tc>
                 <a:tc>
                   <a:txBody>
-                    <a:bodyPr wrap="square"/>
+                    <a:bodyPr/>
                     <a:lstStyle/>
                     <a:p>
                       <a:pPr algn="l"/>
@@ -9468,7 +9351,7 @@
                 </a:tc>
                 <a:tc>
                   <a:txBody>
-                    <a:bodyPr wrap="square"/>
+                    <a:bodyPr/>
                     <a:lstStyle/>
                     <a:p>
                       <a:pPr algn="l"/>

--- a/BSG_BIJOU_BRASIL_COMERCIO_VARE.pptx
+++ b/BSG_BIJOU_BRASIL_COMERCIO_VARE.pptx
@@ -147,10 +147,10 @@
               <c:strCache>
                 <c:ptCount val="2"/>
                 <c:pt idx="0">
-                  <c:v>Marco 2026</c:v>
+                  <c:v>Abril 2026</c:v>
                 </c:pt>
                 <c:pt idx="1">
-                  <c:v>Abril 2026</c:v>
+                  <c:v>Maio 2026</c:v>
                 </c:pt>
               </c:strCache>
             </c:strRef>
@@ -162,10 +162,10 @@
                 <c:formatCode>General</c:formatCode>
                 <c:ptCount val="2"/>
                 <c:pt idx="0">
-                  <c:v>0</c:v>
+                  <c:v>120</c:v>
                 </c:pt>
                 <c:pt idx="1">
-                  <c:v>115</c:v>
+                  <c:v>74</c:v>
                 </c:pt>
               </c:numCache>
             </c:numRef>
@@ -196,10 +196,10 @@
               <c:strCache>
                 <c:ptCount val="2"/>
                 <c:pt idx="0">
-                  <c:v>Marco 2026</c:v>
+                  <c:v>Abril 2026</c:v>
                 </c:pt>
                 <c:pt idx="1">
-                  <c:v>Abril 2026</c:v>
+                  <c:v>Maio 2026</c:v>
                 </c:pt>
               </c:strCache>
             </c:strRef>
@@ -211,10 +211,10 @@
                 <c:formatCode>General</c:formatCode>
                 <c:ptCount val="2"/>
                 <c:pt idx="0">
-                  <c:v>0</c:v>
+                  <c:v>4</c:v>
                 </c:pt>
                 <c:pt idx="1">
-                  <c:v>5</c:v>
+                  <c:v>12</c:v>
                 </c:pt>
               </c:numCache>
             </c:numRef>
@@ -3387,7 +3387,7 @@
                 </a:solidFill>
                 <a:latin typeface="Calibri"/>
               </a:rPr>
-              <a:t>INDICADORES ABRIL 2026</a:t>
+              <a:t>INDICADORES MAIO 2026</a:t>
             </a:r>
           </a:p>
         </p:txBody>
@@ -3709,7 +3709,7 @@
                 </a:solidFill>
                 <a:latin typeface="Calibri"/>
               </a:rPr>
-              <a:t>120</a:t>
+              <a:t>86</a:t>
             </a:r>
           </a:p>
         </p:txBody>
@@ -3824,7 +3824,7 @@
                 </a:solidFill>
                 <a:latin typeface="Calibri"/>
               </a:rPr>
-              <a:t>115</a:t>
+              <a:t>74</a:t>
             </a:r>
           </a:p>
         </p:txBody>
@@ -3939,7 +3939,7 @@
                 </a:solidFill>
                 <a:latin typeface="Calibri"/>
               </a:rPr>
-              <a:t>5</a:t>
+              <a:t>12</a:t>
             </a:r>
           </a:p>
         </p:txBody>
@@ -4054,7 +4054,7 @@
                 </a:solidFill>
                 <a:latin typeface="Calibri"/>
               </a:rPr>
-              <a:t>95.8%</a:t>
+              <a:t>86.0%</a:t>
             </a:r>
           </a:p>
         </p:txBody>
@@ -4155,7 +4155,7 @@
                           </a:solidFill>
                           <a:latin typeface="Calibri"/>
                         </a:rPr>
-                        <a:t>Marco 2026</a:t>
+                        <a:t>Abril 2026</a:t>
                       </a:r>
                     </a:p>
                   </a:txBody>
@@ -4178,7 +4178,7 @@
                           </a:solidFill>
                           <a:latin typeface="Calibri"/>
                         </a:rPr>
-                        <a:t>Abril 2026</a:t>
+                        <a:t>Maio 2026</a:t>
                       </a:r>
                     </a:p>
                   </a:txBody>
@@ -4249,7 +4249,7 @@
                           </a:solidFill>
                           <a:latin typeface="Calibri"/>
                         </a:rPr>
-                        <a:t>0</a:t>
+                        <a:t>124</a:t>
                       </a:r>
                     </a:p>
                   </a:txBody>
@@ -4272,7 +4272,7 @@
                           </a:solidFill>
                           <a:latin typeface="Calibri"/>
                         </a:rPr>
-                        <a:t>120</a:t>
+                        <a:t>86</a:t>
                       </a:r>
                     </a:p>
                   </a:txBody>
@@ -4295,7 +4295,7 @@
                           </a:solidFill>
                           <a:latin typeface="Calibri"/>
                         </a:rPr>
-                        <a:t>+ 120</a:t>
+                        <a:t>- 38</a:t>
                       </a:r>
                     </a:p>
                   </a:txBody>
@@ -4343,7 +4343,7 @@
                           </a:solidFill>
                           <a:latin typeface="Calibri"/>
                         </a:rPr>
-                        <a:t>0</a:t>
+                        <a:t>120</a:t>
                       </a:r>
                     </a:p>
                   </a:txBody>
@@ -4366,7 +4366,7 @@
                           </a:solidFill>
                           <a:latin typeface="Calibri"/>
                         </a:rPr>
-                        <a:t>115</a:t>
+                        <a:t>74</a:t>
                       </a:r>
                     </a:p>
                   </a:txBody>
@@ -4389,7 +4389,7 @@
                           </a:solidFill>
                           <a:latin typeface="Calibri"/>
                         </a:rPr>
-                        <a:t>+ 115</a:t>
+                        <a:t>- 46</a:t>
                       </a:r>
                     </a:p>
                   </a:txBody>
@@ -4437,7 +4437,7 @@
                           </a:solidFill>
                           <a:latin typeface="Calibri"/>
                         </a:rPr>
-                        <a:t>0</a:t>
+                        <a:t>4</a:t>
                       </a:r>
                     </a:p>
                   </a:txBody>
@@ -4460,7 +4460,7 @@
                           </a:solidFill>
                           <a:latin typeface="Calibri"/>
                         </a:rPr>
-                        <a:t>5</a:t>
+                        <a:t>12</a:t>
                       </a:r>
                     </a:p>
                   </a:txBody>
@@ -4483,7 +4483,7 @@
                           </a:solidFill>
                           <a:latin typeface="Calibri"/>
                         </a:rPr>
-                        <a:t>+ 5</a:t>
+                        <a:t>+ 8</a:t>
                       </a:r>
                     </a:p>
                   </a:txBody>
@@ -4531,7 +4531,7 @@
                           </a:solidFill>
                           <a:latin typeface="Calibri"/>
                         </a:rPr>
-                        <a:t>95.8%</a:t>
+                        <a:t>96.8%</a:t>
                       </a:r>
                     </a:p>
                   </a:txBody>
@@ -4554,7 +4554,7 @@
                           </a:solidFill>
                           <a:latin typeface="Calibri"/>
                         </a:rPr>
-                        <a:t>95.8%</a:t>
+                        <a:t>86.0%</a:t>
                       </a:r>
                     </a:p>
                   </a:txBody>
@@ -4577,7 +4577,7 @@
                           </a:solidFill>
                           <a:latin typeface="Calibri"/>
                         </a:rPr>
-                        <a:t>+ 0.0pp</a:t>
+                        <a:t>- 10.8pp</a:t>
                       </a:r>
                     </a:p>
                   </a:txBody>
@@ -4894,7 +4894,7 @@
                           </a:solidFill>
                           <a:latin typeface="Calibri"/>
                         </a:rPr>
-                        <a:t>Marco 2026</a:t>
+                        <a:t>Abril 2026</a:t>
                       </a:r>
                     </a:p>
                   </a:txBody>
@@ -4917,7 +4917,7 @@
                           </a:solidFill>
                           <a:latin typeface="Calibri"/>
                         </a:rPr>
-                        <a:t>0</a:t>
+                        <a:t>124</a:t>
                       </a:r>
                     </a:p>
                   </a:txBody>
@@ -4940,7 +4940,7 @@
                           </a:solidFill>
                           <a:latin typeface="Calibri"/>
                         </a:rPr>
-                        <a:t>0</a:t>
+                        <a:t>120</a:t>
                       </a:r>
                     </a:p>
                   </a:txBody>
@@ -4963,7 +4963,7 @@
                           </a:solidFill>
                           <a:latin typeface="Calibri"/>
                         </a:rPr>
-                        <a:t>0</a:t>
+                        <a:t>4</a:t>
                       </a:r>
                     </a:p>
                   </a:txBody>
@@ -4986,7 +4986,7 @@
                           </a:solidFill>
                           <a:latin typeface="Calibri"/>
                         </a:rPr>
-                        <a:t>95.8%</a:t>
+                        <a:t>96.8%</a:t>
                       </a:r>
                     </a:p>
                   </a:txBody>
@@ -5011,7 +5011,7 @@
                           </a:solidFill>
                           <a:latin typeface="Calibri"/>
                         </a:rPr>
-                        <a:t>Abril 2026</a:t>
+                        <a:t>Maio 2026</a:t>
                       </a:r>
                     </a:p>
                   </a:txBody>
@@ -5034,7 +5034,7 @@
                           </a:solidFill>
                           <a:latin typeface="Calibri"/>
                         </a:rPr>
-                        <a:t>120</a:t>
+                        <a:t>86</a:t>
                       </a:r>
                     </a:p>
                   </a:txBody>
@@ -5057,7 +5057,7 @@
                           </a:solidFill>
                           <a:latin typeface="Calibri"/>
                         </a:rPr>
-                        <a:t>115</a:t>
+                        <a:t>74</a:t>
                       </a:r>
                     </a:p>
                   </a:txBody>
@@ -5080,7 +5080,7 @@
                           </a:solidFill>
                           <a:latin typeface="Calibri"/>
                         </a:rPr>
-                        <a:t>5</a:t>
+                        <a:t>12</a:t>
                       </a:r>
                     </a:p>
                   </a:txBody>
@@ -5103,7 +5103,7 @@
                           </a:solidFill>
                           <a:latin typeface="Calibri"/>
                         </a:rPr>
-                        <a:t>95.8%</a:t>
+                        <a:t>86.0%</a:t>
                       </a:r>
                     </a:p>
                   </a:txBody>
@@ -5191,7 +5191,7 @@
                 </a:solidFill>
                 <a:latin typeface="Calibri"/>
               </a:rPr>
-              <a:t>PERFORMANCE: 95.8% - REGULAR</a:t>
+              <a:t>PERFORMANCE: 86.0% - REGULAR</a:t>
             </a:r>
           </a:p>
         </p:txBody>
@@ -5276,7 +5276,7 @@
                 </a:solidFill>
                 <a:latin typeface="Calibri"/>
               </a:rPr>
-              <a:t>OCORRENCIAS FORA DO PRAZO (5)</a:t>
+              <a:t>OCORRENCIAS FORA DO PRAZO (12)</a:t>
             </a:r>
           </a:p>
         </p:txBody>
@@ -5334,7 +5334,7 @@
         </p:nvGraphicFramePr>
         <p:xfrm>
           <a:off x="457200" y="1828800"/>
-          <a:ext cx="11429999" cy="2304288"/>
+          <a:ext cx="11429999" cy="4571996"/>
         </p:xfrm>
         <a:graphic>
           <a:graphicData uri="http://schemas.openxmlformats.org/drawingml/2006/table">
@@ -5349,7 +5349,7 @@
                 <a:gridCol w="1554480"/>
                 <a:gridCol w="2743200"/>
               </a:tblGrid>
-              <a:tr h="384048">
+              <a:tr h="351692">
                 <a:tc>
                   <a:txBody>
                     <a:bodyPr/>
@@ -5466,21 +5466,21 @@
                   </a:tcPr>
                 </a:tc>
               </a:tr>
-              <a:tr h="384048">
-                <a:tc>
-                  <a:txBody>
-                    <a:bodyPr/>
-                    <a:lstStyle/>
-                    <a:p>
-                      <a:pPr algn="l"/>
-                      <a:r>
-                        <a:rPr sz="1000" b="0">
-                          <a:solidFill>
-                            <a:srgbClr val="1D1B43"/>
-                          </a:solidFill>
-                          <a:latin typeface="Calibri"/>
-                        </a:rPr>
-                        <a:t>277610</a:t>
+              <a:tr h="351692">
+                <a:tc>
+                  <a:txBody>
+                    <a:bodyPr/>
+                    <a:lstStyle/>
+                    <a:p>
+                      <a:pPr algn="l"/>
+                      <a:r>
+                        <a:rPr sz="1000" b="0">
+                          <a:solidFill>
+                            <a:srgbClr val="1D1B43"/>
+                          </a:solidFill>
+                          <a:latin typeface="Calibri"/>
+                        </a:rPr>
+                        <a:t>281602</a:t>
                       </a:r>
                     </a:p>
                   </a:txBody>
@@ -5503,7 +5503,7 @@
                           </a:solidFill>
                           <a:latin typeface="Calibri"/>
                         </a:rPr>
-                        <a:t>BSG BIJOU BRASIL COM - ITAJAI / SC</a:t>
+                        <a:t>BSG BIJOU BRASIL COM - SAO PAULO / SP</a:t>
                       </a:r>
                     </a:p>
                   </a:txBody>
@@ -5526,7 +5526,7 @@
                           </a:solidFill>
                           <a:latin typeface="Calibri"/>
                         </a:rPr>
-                        <a:t>ITAJAI/SC</a:t>
+                        <a:t>SAO PAULO/SP</a:t>
                       </a:r>
                     </a:p>
                   </a:txBody>
@@ -5549,7 +5549,7 @@
                           </a:solidFill>
                           <a:latin typeface="Calibri"/>
                         </a:rPr>
-                        <a:t>01/04/2026</a:t>
+                        <a:t>05/05/2026</a:t>
                       </a:r>
                     </a:p>
                   </a:txBody>
@@ -5583,21 +5583,21 @@
                   </a:tcPr>
                 </a:tc>
               </a:tr>
-              <a:tr h="384048">
-                <a:tc>
-                  <a:txBody>
-                    <a:bodyPr/>
-                    <a:lstStyle/>
-                    <a:p>
-                      <a:pPr algn="l"/>
-                      <a:r>
-                        <a:rPr sz="1000" b="0">
-                          <a:solidFill>
-                            <a:srgbClr val="1D1B43"/>
-                          </a:solidFill>
-                          <a:latin typeface="Calibri"/>
-                        </a:rPr>
-                        <a:t>278271</a:t>
+              <a:tr h="351692">
+                <a:tc>
+                  <a:txBody>
+                    <a:bodyPr/>
+                    <a:lstStyle/>
+                    <a:p>
+                      <a:pPr algn="l"/>
+                      <a:r>
+                        <a:rPr sz="1000" b="0">
+                          <a:solidFill>
+                            <a:srgbClr val="1D1B43"/>
+                          </a:solidFill>
+                          <a:latin typeface="Calibri"/>
+                        </a:rPr>
+                        <a:t>281603</a:t>
                       </a:r>
                     </a:p>
                   </a:txBody>
@@ -5620,7 +5620,7 @@
                           </a:solidFill>
                           <a:latin typeface="Calibri"/>
                         </a:rPr>
-                        <a:t>CMC LUNA ACESSORIOS - SAO CAETANO DO SUL / SP</a:t>
+                        <a:t>BSG BIJOU BRASIL COM - SAO PAULO / SP</a:t>
                       </a:r>
                     </a:p>
                   </a:txBody>
@@ -5643,7 +5643,7 @@
                           </a:solidFill>
                           <a:latin typeface="Calibri"/>
                         </a:rPr>
-                        <a:t>SAO CAETANO DO SUL/SP</a:t>
+                        <a:t>SAO PAULO/SP</a:t>
                       </a:r>
                     </a:p>
                   </a:txBody>
@@ -5666,7 +5666,7 @@
                           </a:solidFill>
                           <a:latin typeface="Calibri"/>
                         </a:rPr>
-                        <a:t>10/04/2026</a:t>
+                        <a:t>05/05/2026</a:t>
                       </a:r>
                     </a:p>
                   </a:txBody>
@@ -5700,21 +5700,21 @@
                   </a:tcPr>
                 </a:tc>
               </a:tr>
-              <a:tr h="384048">
-                <a:tc>
-                  <a:txBody>
-                    <a:bodyPr/>
-                    <a:lstStyle/>
-                    <a:p>
-                      <a:pPr algn="l"/>
-                      <a:r>
-                        <a:rPr sz="1000" b="0">
-                          <a:solidFill>
-                            <a:srgbClr val="1D1B43"/>
-                          </a:solidFill>
-                          <a:latin typeface="Calibri"/>
-                        </a:rPr>
-                        <a:t>278272</a:t>
+              <a:tr h="351692">
+                <a:tc>
+                  <a:txBody>
+                    <a:bodyPr/>
+                    <a:lstStyle/>
+                    <a:p>
+                      <a:pPr algn="l"/>
+                      <a:r>
+                        <a:rPr sz="1000" b="0">
+                          <a:solidFill>
+                            <a:srgbClr val="1D1B43"/>
+                          </a:solidFill>
+                          <a:latin typeface="Calibri"/>
+                        </a:rPr>
+                        <a:t>281604</a:t>
                       </a:r>
                     </a:p>
                   </a:txBody>
@@ -5737,7 +5737,7 @@
                           </a:solidFill>
                           <a:latin typeface="Calibri"/>
                         </a:rPr>
-                        <a:t>CMC LITTLE STORE LTD - SAO PAULO / SP</a:t>
+                        <a:t>BSG BIJOU BRASIL COM - SAO PAULO / SP</a:t>
                       </a:r>
                     </a:p>
                   </a:txBody>
@@ -5783,7 +5783,7 @@
                           </a:solidFill>
                           <a:latin typeface="Calibri"/>
                         </a:rPr>
-                        <a:t>10/04/2026</a:t>
+                        <a:t>06/05/2026</a:t>
                       </a:r>
                     </a:p>
                   </a:txBody>
@@ -5817,21 +5817,21 @@
                   </a:tcPr>
                 </a:tc>
               </a:tr>
-              <a:tr h="384048">
-                <a:tc>
-                  <a:txBody>
-                    <a:bodyPr/>
-                    <a:lstStyle/>
-                    <a:p>
-                      <a:pPr algn="l"/>
-                      <a:r>
-                        <a:rPr sz="1000" b="0">
-                          <a:solidFill>
-                            <a:srgbClr val="1D1B43"/>
-                          </a:solidFill>
-                          <a:latin typeface="Calibri"/>
-                        </a:rPr>
-                        <a:t>280127</a:t>
+              <a:tr h="351692">
+                <a:tc>
+                  <a:txBody>
+                    <a:bodyPr/>
+                    <a:lstStyle/>
+                    <a:p>
+                      <a:pPr algn="l"/>
+                      <a:r>
+                        <a:rPr sz="1000" b="0">
+                          <a:solidFill>
+                            <a:srgbClr val="1D1B43"/>
+                          </a:solidFill>
+                          <a:latin typeface="Calibri"/>
+                        </a:rPr>
+                        <a:t>281605</a:t>
                       </a:r>
                     </a:p>
                   </a:txBody>
@@ -5900,7 +5900,7 @@
                           </a:solidFill>
                           <a:latin typeface="Calibri"/>
                         </a:rPr>
-                        <a:t>27/04/2026</a:t>
+                        <a:t>06/05/2026</a:t>
                       </a:r>
                     </a:p>
                   </a:txBody>
@@ -5934,21 +5934,21 @@
                   </a:tcPr>
                 </a:tc>
               </a:tr>
-              <a:tr h="384048">
-                <a:tc>
-                  <a:txBody>
-                    <a:bodyPr/>
-                    <a:lstStyle/>
-                    <a:p>
-                      <a:pPr algn="l"/>
-                      <a:r>
-                        <a:rPr sz="1000" b="0">
-                          <a:solidFill>
-                            <a:srgbClr val="1D1B43"/>
-                          </a:solidFill>
-                          <a:latin typeface="Calibri"/>
-                        </a:rPr>
-                        <a:t>281288</a:t>
+              <a:tr h="351692">
+                <a:tc>
+                  <a:txBody>
+                    <a:bodyPr/>
+                    <a:lstStyle/>
+                    <a:p>
+                      <a:pPr algn="l"/>
+                      <a:r>
+                        <a:rPr sz="1000" b="0">
+                          <a:solidFill>
+                            <a:srgbClr val="1D1B43"/>
+                          </a:solidFill>
+                          <a:latin typeface="Calibri"/>
+                        </a:rPr>
+                        <a:t>281606</a:t>
                       </a:r>
                     </a:p>
                   </a:txBody>
@@ -6017,7 +6017,7 @@
                           </a:solidFill>
                           <a:latin typeface="Calibri"/>
                         </a:rPr>
-                        <a:t>30/04/2026</a:t>
+                        <a:t>06/05/2026</a:t>
                       </a:r>
                     </a:p>
                   </a:txBody>
@@ -6047,6 +6047,825 @@
                   <a:tcPr>
                     <a:solidFill>
                       <a:srgbClr val="FFFFFF"/>
+                    </a:solidFill>
+                  </a:tcPr>
+                </a:tc>
+              </a:tr>
+              <a:tr h="351692">
+                <a:tc>
+                  <a:txBody>
+                    <a:bodyPr/>
+                    <a:lstStyle/>
+                    <a:p>
+                      <a:pPr algn="l"/>
+                      <a:r>
+                        <a:rPr sz="1000" b="0">
+                          <a:solidFill>
+                            <a:srgbClr val="1D1B43"/>
+                          </a:solidFill>
+                          <a:latin typeface="Calibri"/>
+                        </a:rPr>
+                        <a:t>281607</a:t>
+                      </a:r>
+                    </a:p>
+                  </a:txBody>
+                  <a:tcPr>
+                    <a:solidFill>
+                      <a:srgbClr val="F2F2F2"/>
+                    </a:solidFill>
+                  </a:tcPr>
+                </a:tc>
+                <a:tc>
+                  <a:txBody>
+                    <a:bodyPr/>
+                    <a:lstStyle/>
+                    <a:p>
+                      <a:pPr algn="l"/>
+                      <a:r>
+                        <a:rPr sz="1000" b="0">
+                          <a:solidFill>
+                            <a:srgbClr val="1D1B43"/>
+                          </a:solidFill>
+                          <a:latin typeface="Calibri"/>
+                        </a:rPr>
+                        <a:t>BSG BIJOU BRASIL COM - SAO PAULO / SP</a:t>
+                      </a:r>
+                    </a:p>
+                  </a:txBody>
+                  <a:tcPr>
+                    <a:solidFill>
+                      <a:srgbClr val="F2F2F2"/>
+                    </a:solidFill>
+                  </a:tcPr>
+                </a:tc>
+                <a:tc>
+                  <a:txBody>
+                    <a:bodyPr/>
+                    <a:lstStyle/>
+                    <a:p>
+                      <a:pPr algn="l"/>
+                      <a:r>
+                        <a:rPr sz="1000" b="0">
+                          <a:solidFill>
+                            <a:srgbClr val="1D1B43"/>
+                          </a:solidFill>
+                          <a:latin typeface="Calibri"/>
+                        </a:rPr>
+                        <a:t>SAO PAULO/SP</a:t>
+                      </a:r>
+                    </a:p>
+                  </a:txBody>
+                  <a:tcPr>
+                    <a:solidFill>
+                      <a:srgbClr val="F2F2F2"/>
+                    </a:solidFill>
+                  </a:tcPr>
+                </a:tc>
+                <a:tc>
+                  <a:txBody>
+                    <a:bodyPr/>
+                    <a:lstStyle/>
+                    <a:p>
+                      <a:pPr algn="l"/>
+                      <a:r>
+                        <a:rPr sz="1000" b="0">
+                          <a:solidFill>
+                            <a:srgbClr val="1D1B43"/>
+                          </a:solidFill>
+                          <a:latin typeface="Calibri"/>
+                        </a:rPr>
+                        <a:t>06/05/2026</a:t>
+                      </a:r>
+                    </a:p>
+                  </a:txBody>
+                  <a:tcPr>
+                    <a:solidFill>
+                      <a:srgbClr val="F2F2F2"/>
+                    </a:solidFill>
+                  </a:tcPr>
+                </a:tc>
+                <a:tc>
+                  <a:txBody>
+                    <a:bodyPr/>
+                    <a:lstStyle/>
+                    <a:p>
+                      <a:pPr algn="l"/>
+                      <a:r>
+                        <a:rPr sz="1000" b="0">
+                          <a:solidFill>
+                            <a:srgbClr val="1D1B43"/>
+                          </a:solidFill>
+                          <a:latin typeface="Calibri"/>
+                        </a:rPr>
+                        <a:t>ENTREGUE FORA DO PRAZO</a:t>
+                      </a:r>
+                    </a:p>
+                  </a:txBody>
+                  <a:tcPr>
+                    <a:solidFill>
+                      <a:srgbClr val="F2F2F2"/>
+                    </a:solidFill>
+                  </a:tcPr>
+                </a:tc>
+              </a:tr>
+              <a:tr h="351692">
+                <a:tc>
+                  <a:txBody>
+                    <a:bodyPr/>
+                    <a:lstStyle/>
+                    <a:p>
+                      <a:pPr algn="l"/>
+                      <a:r>
+                        <a:rPr sz="1000" b="0">
+                          <a:solidFill>
+                            <a:srgbClr val="1D1B43"/>
+                          </a:solidFill>
+                          <a:latin typeface="Calibri"/>
+                        </a:rPr>
+                        <a:t>281608</a:t>
+                      </a:r>
+                    </a:p>
+                  </a:txBody>
+                  <a:tcPr>
+                    <a:solidFill>
+                      <a:srgbClr val="FFFFFF"/>
+                    </a:solidFill>
+                  </a:tcPr>
+                </a:tc>
+                <a:tc>
+                  <a:txBody>
+                    <a:bodyPr/>
+                    <a:lstStyle/>
+                    <a:p>
+                      <a:pPr algn="l"/>
+                      <a:r>
+                        <a:rPr sz="1000" b="0">
+                          <a:solidFill>
+                            <a:srgbClr val="1D1B43"/>
+                          </a:solidFill>
+                          <a:latin typeface="Calibri"/>
+                        </a:rPr>
+                        <a:t>BSG BIJOU BRASIL COM - SAO PAULO / SP</a:t>
+                      </a:r>
+                    </a:p>
+                  </a:txBody>
+                  <a:tcPr>
+                    <a:solidFill>
+                      <a:srgbClr val="FFFFFF"/>
+                    </a:solidFill>
+                  </a:tcPr>
+                </a:tc>
+                <a:tc>
+                  <a:txBody>
+                    <a:bodyPr/>
+                    <a:lstStyle/>
+                    <a:p>
+                      <a:pPr algn="l"/>
+                      <a:r>
+                        <a:rPr sz="1000" b="0">
+                          <a:solidFill>
+                            <a:srgbClr val="1D1B43"/>
+                          </a:solidFill>
+                          <a:latin typeface="Calibri"/>
+                        </a:rPr>
+                        <a:t>SAO PAULO/SP</a:t>
+                      </a:r>
+                    </a:p>
+                  </a:txBody>
+                  <a:tcPr>
+                    <a:solidFill>
+                      <a:srgbClr val="FFFFFF"/>
+                    </a:solidFill>
+                  </a:tcPr>
+                </a:tc>
+                <a:tc>
+                  <a:txBody>
+                    <a:bodyPr/>
+                    <a:lstStyle/>
+                    <a:p>
+                      <a:pPr algn="l"/>
+                      <a:r>
+                        <a:rPr sz="1000" b="0">
+                          <a:solidFill>
+                            <a:srgbClr val="1D1B43"/>
+                          </a:solidFill>
+                          <a:latin typeface="Calibri"/>
+                        </a:rPr>
+                        <a:t>06/05/2026</a:t>
+                      </a:r>
+                    </a:p>
+                  </a:txBody>
+                  <a:tcPr>
+                    <a:solidFill>
+                      <a:srgbClr val="FFFFFF"/>
+                    </a:solidFill>
+                  </a:tcPr>
+                </a:tc>
+                <a:tc>
+                  <a:txBody>
+                    <a:bodyPr/>
+                    <a:lstStyle/>
+                    <a:p>
+                      <a:pPr algn="l"/>
+                      <a:r>
+                        <a:rPr sz="1000" b="0">
+                          <a:solidFill>
+                            <a:srgbClr val="1D1B43"/>
+                          </a:solidFill>
+                          <a:latin typeface="Calibri"/>
+                        </a:rPr>
+                        <a:t>ENTREGUE FORA DO PRAZO</a:t>
+                      </a:r>
+                    </a:p>
+                  </a:txBody>
+                  <a:tcPr>
+                    <a:solidFill>
+                      <a:srgbClr val="FFFFFF"/>
+                    </a:solidFill>
+                  </a:tcPr>
+                </a:tc>
+              </a:tr>
+              <a:tr h="351692">
+                <a:tc>
+                  <a:txBody>
+                    <a:bodyPr/>
+                    <a:lstStyle/>
+                    <a:p>
+                      <a:pPr algn="l"/>
+                      <a:r>
+                        <a:rPr sz="1000" b="0">
+                          <a:solidFill>
+                            <a:srgbClr val="1D1B43"/>
+                          </a:solidFill>
+                          <a:latin typeface="Calibri"/>
+                        </a:rPr>
+                        <a:t>281609</a:t>
+                      </a:r>
+                    </a:p>
+                  </a:txBody>
+                  <a:tcPr>
+                    <a:solidFill>
+                      <a:srgbClr val="F2F2F2"/>
+                    </a:solidFill>
+                  </a:tcPr>
+                </a:tc>
+                <a:tc>
+                  <a:txBody>
+                    <a:bodyPr/>
+                    <a:lstStyle/>
+                    <a:p>
+                      <a:pPr algn="l"/>
+                      <a:r>
+                        <a:rPr sz="1000" b="0">
+                          <a:solidFill>
+                            <a:srgbClr val="1D1B43"/>
+                          </a:solidFill>
+                          <a:latin typeface="Calibri"/>
+                        </a:rPr>
+                        <a:t>BSG BIJOU BRASIL COM - SAO PAULO / SP</a:t>
+                      </a:r>
+                    </a:p>
+                  </a:txBody>
+                  <a:tcPr>
+                    <a:solidFill>
+                      <a:srgbClr val="F2F2F2"/>
+                    </a:solidFill>
+                  </a:tcPr>
+                </a:tc>
+                <a:tc>
+                  <a:txBody>
+                    <a:bodyPr/>
+                    <a:lstStyle/>
+                    <a:p>
+                      <a:pPr algn="l"/>
+                      <a:r>
+                        <a:rPr sz="1000" b="0">
+                          <a:solidFill>
+                            <a:srgbClr val="1D1B43"/>
+                          </a:solidFill>
+                          <a:latin typeface="Calibri"/>
+                        </a:rPr>
+                        <a:t>SAO PAULO/SP</a:t>
+                      </a:r>
+                    </a:p>
+                  </a:txBody>
+                  <a:tcPr>
+                    <a:solidFill>
+                      <a:srgbClr val="F2F2F2"/>
+                    </a:solidFill>
+                  </a:tcPr>
+                </a:tc>
+                <a:tc>
+                  <a:txBody>
+                    <a:bodyPr/>
+                    <a:lstStyle/>
+                    <a:p>
+                      <a:pPr algn="l"/>
+                      <a:r>
+                        <a:rPr sz="1000" b="0">
+                          <a:solidFill>
+                            <a:srgbClr val="1D1B43"/>
+                          </a:solidFill>
+                          <a:latin typeface="Calibri"/>
+                        </a:rPr>
+                        <a:t>06/05/2026</a:t>
+                      </a:r>
+                    </a:p>
+                  </a:txBody>
+                  <a:tcPr>
+                    <a:solidFill>
+                      <a:srgbClr val="F2F2F2"/>
+                    </a:solidFill>
+                  </a:tcPr>
+                </a:tc>
+                <a:tc>
+                  <a:txBody>
+                    <a:bodyPr/>
+                    <a:lstStyle/>
+                    <a:p>
+                      <a:pPr algn="l"/>
+                      <a:r>
+                        <a:rPr sz="1000" b="0">
+                          <a:solidFill>
+                            <a:srgbClr val="1D1B43"/>
+                          </a:solidFill>
+                          <a:latin typeface="Calibri"/>
+                        </a:rPr>
+                        <a:t>ENTREGUE FORA DO PRAZO</a:t>
+                      </a:r>
+                    </a:p>
+                  </a:txBody>
+                  <a:tcPr>
+                    <a:solidFill>
+                      <a:srgbClr val="F2F2F2"/>
+                    </a:solidFill>
+                  </a:tcPr>
+                </a:tc>
+              </a:tr>
+              <a:tr h="351692">
+                <a:tc>
+                  <a:txBody>
+                    <a:bodyPr/>
+                    <a:lstStyle/>
+                    <a:p>
+                      <a:pPr algn="l"/>
+                      <a:r>
+                        <a:rPr sz="1000" b="0">
+                          <a:solidFill>
+                            <a:srgbClr val="1D1B43"/>
+                          </a:solidFill>
+                          <a:latin typeface="Calibri"/>
+                        </a:rPr>
+                        <a:t>281610</a:t>
+                      </a:r>
+                    </a:p>
+                  </a:txBody>
+                  <a:tcPr>
+                    <a:solidFill>
+                      <a:srgbClr val="FFFFFF"/>
+                    </a:solidFill>
+                  </a:tcPr>
+                </a:tc>
+                <a:tc>
+                  <a:txBody>
+                    <a:bodyPr/>
+                    <a:lstStyle/>
+                    <a:p>
+                      <a:pPr algn="l"/>
+                      <a:r>
+                        <a:rPr sz="1000" b="0">
+                          <a:solidFill>
+                            <a:srgbClr val="1D1B43"/>
+                          </a:solidFill>
+                          <a:latin typeface="Calibri"/>
+                        </a:rPr>
+                        <a:t>BSG BIJOU BRASIL COM - SAO PAULO / SP</a:t>
+                      </a:r>
+                    </a:p>
+                  </a:txBody>
+                  <a:tcPr>
+                    <a:solidFill>
+                      <a:srgbClr val="FFFFFF"/>
+                    </a:solidFill>
+                  </a:tcPr>
+                </a:tc>
+                <a:tc>
+                  <a:txBody>
+                    <a:bodyPr/>
+                    <a:lstStyle/>
+                    <a:p>
+                      <a:pPr algn="l"/>
+                      <a:r>
+                        <a:rPr sz="1000" b="0">
+                          <a:solidFill>
+                            <a:srgbClr val="1D1B43"/>
+                          </a:solidFill>
+                          <a:latin typeface="Calibri"/>
+                        </a:rPr>
+                        <a:t>SAO PAULO/SP</a:t>
+                      </a:r>
+                    </a:p>
+                  </a:txBody>
+                  <a:tcPr>
+                    <a:solidFill>
+                      <a:srgbClr val="FFFFFF"/>
+                    </a:solidFill>
+                  </a:tcPr>
+                </a:tc>
+                <a:tc>
+                  <a:txBody>
+                    <a:bodyPr/>
+                    <a:lstStyle/>
+                    <a:p>
+                      <a:pPr algn="l"/>
+                      <a:r>
+                        <a:rPr sz="1000" b="0">
+                          <a:solidFill>
+                            <a:srgbClr val="1D1B43"/>
+                          </a:solidFill>
+                          <a:latin typeface="Calibri"/>
+                        </a:rPr>
+                        <a:t>06/05/2026</a:t>
+                      </a:r>
+                    </a:p>
+                  </a:txBody>
+                  <a:tcPr>
+                    <a:solidFill>
+                      <a:srgbClr val="FFFFFF"/>
+                    </a:solidFill>
+                  </a:tcPr>
+                </a:tc>
+                <a:tc>
+                  <a:txBody>
+                    <a:bodyPr/>
+                    <a:lstStyle/>
+                    <a:p>
+                      <a:pPr algn="l"/>
+                      <a:r>
+                        <a:rPr sz="1000" b="0">
+                          <a:solidFill>
+                            <a:srgbClr val="1D1B43"/>
+                          </a:solidFill>
+                          <a:latin typeface="Calibri"/>
+                        </a:rPr>
+                        <a:t>ENTREGUE FORA DO PRAZO</a:t>
+                      </a:r>
+                    </a:p>
+                  </a:txBody>
+                  <a:tcPr>
+                    <a:solidFill>
+                      <a:srgbClr val="FFFFFF"/>
+                    </a:solidFill>
+                  </a:tcPr>
+                </a:tc>
+              </a:tr>
+              <a:tr h="351692">
+                <a:tc>
+                  <a:txBody>
+                    <a:bodyPr/>
+                    <a:lstStyle/>
+                    <a:p>
+                      <a:pPr algn="l"/>
+                      <a:r>
+                        <a:rPr sz="1000" b="0">
+                          <a:solidFill>
+                            <a:srgbClr val="1D1B43"/>
+                          </a:solidFill>
+                          <a:latin typeface="Calibri"/>
+                        </a:rPr>
+                        <a:t>281611</a:t>
+                      </a:r>
+                    </a:p>
+                  </a:txBody>
+                  <a:tcPr>
+                    <a:solidFill>
+                      <a:srgbClr val="F2F2F2"/>
+                    </a:solidFill>
+                  </a:tcPr>
+                </a:tc>
+                <a:tc>
+                  <a:txBody>
+                    <a:bodyPr/>
+                    <a:lstStyle/>
+                    <a:p>
+                      <a:pPr algn="l"/>
+                      <a:r>
+                        <a:rPr sz="1000" b="0">
+                          <a:solidFill>
+                            <a:srgbClr val="1D1B43"/>
+                          </a:solidFill>
+                          <a:latin typeface="Calibri"/>
+                        </a:rPr>
+                        <a:t>BSG BIJOU BRASIL COM - SAO PAULO / SP</a:t>
+                      </a:r>
+                    </a:p>
+                  </a:txBody>
+                  <a:tcPr>
+                    <a:solidFill>
+                      <a:srgbClr val="F2F2F2"/>
+                    </a:solidFill>
+                  </a:tcPr>
+                </a:tc>
+                <a:tc>
+                  <a:txBody>
+                    <a:bodyPr/>
+                    <a:lstStyle/>
+                    <a:p>
+                      <a:pPr algn="l"/>
+                      <a:r>
+                        <a:rPr sz="1000" b="0">
+                          <a:solidFill>
+                            <a:srgbClr val="1D1B43"/>
+                          </a:solidFill>
+                          <a:latin typeface="Calibri"/>
+                        </a:rPr>
+                        <a:t>SAO PAULO/SP</a:t>
+                      </a:r>
+                    </a:p>
+                  </a:txBody>
+                  <a:tcPr>
+                    <a:solidFill>
+                      <a:srgbClr val="F2F2F2"/>
+                    </a:solidFill>
+                  </a:tcPr>
+                </a:tc>
+                <a:tc>
+                  <a:txBody>
+                    <a:bodyPr/>
+                    <a:lstStyle/>
+                    <a:p>
+                      <a:pPr algn="l"/>
+                      <a:r>
+                        <a:rPr sz="1000" b="0">
+                          <a:solidFill>
+                            <a:srgbClr val="1D1B43"/>
+                          </a:solidFill>
+                          <a:latin typeface="Calibri"/>
+                        </a:rPr>
+                        <a:t>06/05/2026</a:t>
+                      </a:r>
+                    </a:p>
+                  </a:txBody>
+                  <a:tcPr>
+                    <a:solidFill>
+                      <a:srgbClr val="F2F2F2"/>
+                    </a:solidFill>
+                  </a:tcPr>
+                </a:tc>
+                <a:tc>
+                  <a:txBody>
+                    <a:bodyPr/>
+                    <a:lstStyle/>
+                    <a:p>
+                      <a:pPr algn="l"/>
+                      <a:r>
+                        <a:rPr sz="1000" b="0">
+                          <a:solidFill>
+                            <a:srgbClr val="1D1B43"/>
+                          </a:solidFill>
+                          <a:latin typeface="Calibri"/>
+                        </a:rPr>
+                        <a:t>ENTREGUE FORA DO PRAZO</a:t>
+                      </a:r>
+                    </a:p>
+                  </a:txBody>
+                  <a:tcPr>
+                    <a:solidFill>
+                      <a:srgbClr val="F2F2F2"/>
+                    </a:solidFill>
+                  </a:tcPr>
+                </a:tc>
+              </a:tr>
+              <a:tr h="351692">
+                <a:tc>
+                  <a:txBody>
+                    <a:bodyPr/>
+                    <a:lstStyle/>
+                    <a:p>
+                      <a:pPr algn="l"/>
+                      <a:r>
+                        <a:rPr sz="1000" b="0">
+                          <a:solidFill>
+                            <a:srgbClr val="1D1B43"/>
+                          </a:solidFill>
+                          <a:latin typeface="Calibri"/>
+                        </a:rPr>
+                        <a:t>282392</a:t>
+                      </a:r>
+                    </a:p>
+                  </a:txBody>
+                  <a:tcPr>
+                    <a:solidFill>
+                      <a:srgbClr val="FFFFFF"/>
+                    </a:solidFill>
+                  </a:tcPr>
+                </a:tc>
+                <a:tc>
+                  <a:txBody>
+                    <a:bodyPr/>
+                    <a:lstStyle/>
+                    <a:p>
+                      <a:pPr algn="l"/>
+                      <a:r>
+                        <a:rPr sz="1000" b="0">
+                          <a:solidFill>
+                            <a:srgbClr val="1D1B43"/>
+                          </a:solidFill>
+                          <a:latin typeface="Calibri"/>
+                        </a:rPr>
+                        <a:t>LAROCCA MODA E ACESS - SAO PAULO / SP</a:t>
+                      </a:r>
+                    </a:p>
+                  </a:txBody>
+                  <a:tcPr>
+                    <a:solidFill>
+                      <a:srgbClr val="FFFFFF"/>
+                    </a:solidFill>
+                  </a:tcPr>
+                </a:tc>
+                <a:tc>
+                  <a:txBody>
+                    <a:bodyPr/>
+                    <a:lstStyle/>
+                    <a:p>
+                      <a:pPr algn="l"/>
+                      <a:r>
+                        <a:rPr sz="1000" b="0">
+                          <a:solidFill>
+                            <a:srgbClr val="1D1B43"/>
+                          </a:solidFill>
+                          <a:latin typeface="Calibri"/>
+                        </a:rPr>
+                        <a:t>SAO PAULO/SP</a:t>
+                      </a:r>
+                    </a:p>
+                  </a:txBody>
+                  <a:tcPr>
+                    <a:solidFill>
+                      <a:srgbClr val="FFFFFF"/>
+                    </a:solidFill>
+                  </a:tcPr>
+                </a:tc>
+                <a:tc>
+                  <a:txBody>
+                    <a:bodyPr/>
+                    <a:lstStyle/>
+                    <a:p>
+                      <a:pPr algn="l"/>
+                      <a:r>
+                        <a:rPr sz="1000" b="0">
+                          <a:solidFill>
+                            <a:srgbClr val="1D1B43"/>
+                          </a:solidFill>
+                          <a:latin typeface="Calibri"/>
+                        </a:rPr>
+                        <a:t>09/05/2026</a:t>
+                      </a:r>
+                    </a:p>
+                  </a:txBody>
+                  <a:tcPr>
+                    <a:solidFill>
+                      <a:srgbClr val="FFFFFF"/>
+                    </a:solidFill>
+                  </a:tcPr>
+                </a:tc>
+                <a:tc>
+                  <a:txBody>
+                    <a:bodyPr/>
+                    <a:lstStyle/>
+                    <a:p>
+                      <a:pPr algn="l"/>
+                      <a:r>
+                        <a:rPr sz="1000" b="0">
+                          <a:solidFill>
+                            <a:srgbClr val="1D1B43"/>
+                          </a:solidFill>
+                          <a:latin typeface="Calibri"/>
+                        </a:rPr>
+                        <a:t>ENTREGUE FORA DO PRAZO</a:t>
+                      </a:r>
+                    </a:p>
+                  </a:txBody>
+                  <a:tcPr>
+                    <a:solidFill>
+                      <a:srgbClr val="FFFFFF"/>
+                    </a:solidFill>
+                  </a:tcPr>
+                </a:tc>
+              </a:tr>
+              <a:tr h="351692">
+                <a:tc>
+                  <a:txBody>
+                    <a:bodyPr/>
+                    <a:lstStyle/>
+                    <a:p>
+                      <a:pPr algn="l"/>
+                      <a:r>
+                        <a:rPr sz="1000" b="0">
+                          <a:solidFill>
+                            <a:srgbClr val="1D1B43"/>
+                          </a:solidFill>
+                          <a:latin typeface="Calibri"/>
+                        </a:rPr>
+                        <a:t>283102</a:t>
+                      </a:r>
+                    </a:p>
+                  </a:txBody>
+                  <a:tcPr>
+                    <a:solidFill>
+                      <a:srgbClr val="F2F2F2"/>
+                    </a:solidFill>
+                  </a:tcPr>
+                </a:tc>
+                <a:tc>
+                  <a:txBody>
+                    <a:bodyPr/>
+                    <a:lstStyle/>
+                    <a:p>
+                      <a:pPr algn="l"/>
+                      <a:r>
+                        <a:rPr sz="1000" b="0">
+                          <a:solidFill>
+                            <a:srgbClr val="1D1B43"/>
+                          </a:solidFill>
+                          <a:latin typeface="Calibri"/>
+                        </a:rPr>
+                        <a:t>BSG BIJOU BRASIL COM - SAO PAULO / SP</a:t>
+                      </a:r>
+                    </a:p>
+                  </a:txBody>
+                  <a:tcPr>
+                    <a:solidFill>
+                      <a:srgbClr val="F2F2F2"/>
+                    </a:solidFill>
+                  </a:tcPr>
+                </a:tc>
+                <a:tc>
+                  <a:txBody>
+                    <a:bodyPr/>
+                    <a:lstStyle/>
+                    <a:p>
+                      <a:pPr algn="l"/>
+                      <a:r>
+                        <a:rPr sz="1000" b="0">
+                          <a:solidFill>
+                            <a:srgbClr val="1D1B43"/>
+                          </a:solidFill>
+                          <a:latin typeface="Calibri"/>
+                        </a:rPr>
+                        <a:t>SAO PAULO/SP</a:t>
+                      </a:r>
+                    </a:p>
+                  </a:txBody>
+                  <a:tcPr>
+                    <a:solidFill>
+                      <a:srgbClr val="F2F2F2"/>
+                    </a:solidFill>
+                  </a:tcPr>
+                </a:tc>
+                <a:tc>
+                  <a:txBody>
+                    <a:bodyPr/>
+                    <a:lstStyle/>
+                    <a:p>
+                      <a:pPr algn="l"/>
+                      <a:r>
+                        <a:rPr sz="1000" b="0">
+                          <a:solidFill>
+                            <a:srgbClr val="1D1B43"/>
+                          </a:solidFill>
+                          <a:latin typeface="Calibri"/>
+                        </a:rPr>
+                        <a:t>15/05/2026</a:t>
+                      </a:r>
+                    </a:p>
+                  </a:txBody>
+                  <a:tcPr>
+                    <a:solidFill>
+                      <a:srgbClr val="F2F2F2"/>
+                    </a:solidFill>
+                  </a:tcPr>
+                </a:tc>
+                <a:tc>
+                  <a:txBody>
+                    <a:bodyPr/>
+                    <a:lstStyle/>
+                    <a:p>
+                      <a:pPr algn="l"/>
+                      <a:r>
+                        <a:rPr sz="1000" b="0">
+                          <a:solidFill>
+                            <a:srgbClr val="1D1B43"/>
+                          </a:solidFill>
+                          <a:latin typeface="Calibri"/>
+                        </a:rPr>
+                        <a:t>ENTREGUE FORA DO PRAZO</a:t>
+                      </a:r>
+                    </a:p>
+                  </a:txBody>
+                  <a:tcPr>
+                    <a:solidFill>
+                      <a:srgbClr val="F2F2F2"/>
                     </a:solidFill>
                   </a:tcPr>
                 </a:tc>
@@ -6193,7 +7012,7 @@
         </p:nvGraphicFramePr>
         <p:xfrm>
           <a:off x="731520" y="1920240"/>
-          <a:ext cx="10698480" cy="1828800"/>
+          <a:ext cx="10698480" cy="1371600"/>
         </p:xfrm>
         <a:graphic>
           <a:graphicData uri="http://schemas.openxmlformats.org/drawingml/2006/table">
@@ -6386,7 +7205,7 @@
                           </a:solidFill>
                           <a:latin typeface="Calibri"/>
                         </a:rPr>
-                        <a:t>113</a:t>
+                        <a:t>85</a:t>
                       </a:r>
                     </a:p>
                   </a:txBody>
@@ -6409,7 +7228,7 @@
                           </a:solidFill>
                           <a:latin typeface="Calibri"/>
                         </a:rPr>
-                        <a:t>109</a:t>
+                        <a:t>73</a:t>
                       </a:r>
                     </a:p>
                   </a:txBody>
@@ -6432,7 +7251,7 @@
                           </a:solidFill>
                           <a:latin typeface="Calibri"/>
                         </a:rPr>
-                        <a:t>4</a:t>
+                        <a:t>12</a:t>
                       </a:r>
                     </a:p>
                   </a:txBody>
@@ -6455,7 +7274,7 @@
                           </a:solidFill>
                           <a:latin typeface="Calibri"/>
                         </a:rPr>
-                        <a:t>96.5%</a:t>
+                        <a:t>85.9%</a:t>
                       </a:r>
                     </a:p>
                   </a:txBody>
@@ -6478,7 +7297,7 @@
                           </a:solidFill>
                           <a:latin typeface="Calibri"/>
                         </a:rPr>
-                        <a:t>Excelente</a:t>
+                        <a:t>Regular</a:t>
                       </a:r>
                     </a:p>
                   </a:txBody>
@@ -6503,7 +7322,7 @@
                           </a:solidFill>
                           <a:latin typeface="Calibri"/>
                         </a:rPr>
-                        <a:t>SC</a:t>
+                        <a:t>PR</a:t>
                       </a:r>
                     </a:p>
                   </a:txBody>
@@ -6526,7 +7345,7 @@
                           </a:solidFill>
                           <a:latin typeface="Calibri"/>
                         </a:rPr>
-                        <a:t>4</a:t>
+                        <a:t>1</a:t>
                       </a:r>
                     </a:p>
                   </a:txBody>
@@ -6549,7 +7368,7 @@
                           </a:solidFill>
                           <a:latin typeface="Calibri"/>
                         </a:rPr>
-                        <a:t>3</a:t>
+                        <a:t>1</a:t>
                       </a:r>
                     </a:p>
                   </a:txBody>
@@ -6572,7 +7391,7 @@
                           </a:solidFill>
                           <a:latin typeface="Calibri"/>
                         </a:rPr>
-                        <a:t>1</a:t>
+                        <a:t>0</a:t>
                       </a:r>
                     </a:p>
                   </a:txBody>
@@ -6595,7 +7414,7 @@
                           </a:solidFill>
                           <a:latin typeface="Calibri"/>
                         </a:rPr>
-                        <a:t>75.0%</a:t>
+                        <a:t>100.0%</a:t>
                       </a:r>
                     </a:p>
                   </a:txBody>
@@ -6618,153 +7437,13 @@
                           </a:solidFill>
                           <a:latin typeface="Calibri"/>
                         </a:rPr>
-                        <a:t>Atencao</a:t>
+                        <a:t>Excelente</a:t>
                       </a:r>
                     </a:p>
                   </a:txBody>
                   <a:tcPr>
                     <a:solidFill>
                       <a:srgbClr val="F2F2F2"/>
-                    </a:solidFill>
-                  </a:tcPr>
-                </a:tc>
-              </a:tr>
-              <a:tr h="457200">
-                <a:tc>
-                  <a:txBody>
-                    <a:bodyPr/>
-                    <a:lstStyle/>
-                    <a:p>
-                      <a:pPr algn="l"/>
-                      <a:r>
-                        <a:rPr sz="1000" b="0">
-                          <a:solidFill>
-                            <a:srgbClr val="1D1B43"/>
-                          </a:solidFill>
-                          <a:latin typeface="Calibri"/>
-                        </a:rPr>
-                        <a:t>MG</a:t>
-                      </a:r>
-                    </a:p>
-                  </a:txBody>
-                  <a:tcPr>
-                    <a:solidFill>
-                      <a:srgbClr val="FFFFFF"/>
-                    </a:solidFill>
-                  </a:tcPr>
-                </a:tc>
-                <a:tc>
-                  <a:txBody>
-                    <a:bodyPr/>
-                    <a:lstStyle/>
-                    <a:p>
-                      <a:pPr algn="l"/>
-                      <a:r>
-                        <a:rPr sz="1000" b="0">
-                          <a:solidFill>
-                            <a:srgbClr val="1D1B43"/>
-                          </a:solidFill>
-                          <a:latin typeface="Calibri"/>
-                        </a:rPr>
-                        <a:t>3</a:t>
-                      </a:r>
-                    </a:p>
-                  </a:txBody>
-                  <a:tcPr>
-                    <a:solidFill>
-                      <a:srgbClr val="FFFFFF"/>
-                    </a:solidFill>
-                  </a:tcPr>
-                </a:tc>
-                <a:tc>
-                  <a:txBody>
-                    <a:bodyPr/>
-                    <a:lstStyle/>
-                    <a:p>
-                      <a:pPr algn="l"/>
-                      <a:r>
-                        <a:rPr sz="1000" b="0">
-                          <a:solidFill>
-                            <a:srgbClr val="1D1B43"/>
-                          </a:solidFill>
-                          <a:latin typeface="Calibri"/>
-                        </a:rPr>
-                        <a:t>3</a:t>
-                      </a:r>
-                    </a:p>
-                  </a:txBody>
-                  <a:tcPr>
-                    <a:solidFill>
-                      <a:srgbClr val="FFFFFF"/>
-                    </a:solidFill>
-                  </a:tcPr>
-                </a:tc>
-                <a:tc>
-                  <a:txBody>
-                    <a:bodyPr/>
-                    <a:lstStyle/>
-                    <a:p>
-                      <a:pPr algn="l"/>
-                      <a:r>
-                        <a:rPr sz="1000" b="0">
-                          <a:solidFill>
-                            <a:srgbClr val="1D1B43"/>
-                          </a:solidFill>
-                          <a:latin typeface="Calibri"/>
-                        </a:rPr>
-                        <a:t>0</a:t>
-                      </a:r>
-                    </a:p>
-                  </a:txBody>
-                  <a:tcPr>
-                    <a:solidFill>
-                      <a:srgbClr val="FFFFFF"/>
-                    </a:solidFill>
-                  </a:tcPr>
-                </a:tc>
-                <a:tc>
-                  <a:txBody>
-                    <a:bodyPr/>
-                    <a:lstStyle/>
-                    <a:p>
-                      <a:pPr algn="l"/>
-                      <a:r>
-                        <a:rPr sz="1000" b="0">
-                          <a:solidFill>
-                            <a:srgbClr val="1D1B43"/>
-                          </a:solidFill>
-                          <a:latin typeface="Calibri"/>
-                        </a:rPr>
-                        <a:t>100.0%</a:t>
-                      </a:r>
-                    </a:p>
-                  </a:txBody>
-                  <a:tcPr>
-                    <a:solidFill>
-                      <a:srgbClr val="FFFFFF"/>
-                    </a:solidFill>
-                  </a:tcPr>
-                </a:tc>
-                <a:tc>
-                  <a:txBody>
-                    <a:bodyPr/>
-                    <a:lstStyle/>
-                    <a:p>
-                      <a:pPr algn="l"/>
-                      <a:r>
-                        <a:rPr sz="1000" b="0">
-                          <a:solidFill>
-                            <a:srgbClr val="1D1B43"/>
-                          </a:solidFill>
-                          <a:latin typeface="Calibri"/>
-                        </a:rPr>
-                        <a:t>Excelente</a:t>
-                      </a:r>
-                    </a:p>
-                  </a:txBody>
-                  <a:tcPr>
-                    <a:solidFill>
-                      <a:srgbClr val="FFFFFF"/>
                     </a:solidFill>
                   </a:tcPr>
                 </a:tc>
@@ -6853,7 +7532,7 @@
                 </a:solidFill>
                 <a:latin typeface="Calibri"/>
               </a:rPr>
-              <a:t>TOP DESTINATARIOS (17 pontos)</a:t>
+              <a:t>TOP DESTINATARIOS (15 pontos)</a:t>
             </a:r>
           </a:p>
         </p:txBody>
@@ -7151,7 +7830,7 @@
                           </a:solidFill>
                           <a:latin typeface="Calibri"/>
                         </a:rPr>
-                        <a:t>63</a:t>
+                        <a:t>45</a:t>
                       </a:r>
                     </a:p>
                   </a:txBody>
@@ -7174,7 +7853,7 @@
                           </a:solidFill>
                           <a:latin typeface="Calibri"/>
                         </a:rPr>
-                        <a:t>61</a:t>
+                        <a:t>34</a:t>
                       </a:r>
                     </a:p>
                   </a:txBody>
@@ -7197,7 +7876,7 @@
                           </a:solidFill>
                           <a:latin typeface="Calibri"/>
                         </a:rPr>
-                        <a:t>2</a:t>
+                        <a:t>11</a:t>
                       </a:r>
                     </a:p>
                   </a:txBody>
@@ -7220,7 +7899,7 @@
                           </a:solidFill>
                           <a:latin typeface="Calibri"/>
                         </a:rPr>
-                        <a:t>96.8%</a:t>
+                        <a:t>75.6%</a:t>
                       </a:r>
                     </a:p>
                   </a:txBody>
@@ -7243,7 +7922,7 @@
                           </a:solidFill>
                           <a:latin typeface="Calibri"/>
                         </a:rPr>
-                        <a:t>Excelente</a:t>
+                        <a:t>Atencao</a:t>
                       </a:r>
                     </a:p>
                   </a:txBody>
@@ -7314,7 +7993,7 @@
                           </a:solidFill>
                           <a:latin typeface="Calibri"/>
                         </a:rPr>
-                        <a:t>11</a:t>
+                        <a:t>7</a:t>
                       </a:r>
                     </a:p>
                   </a:txBody>
@@ -7337,7 +8016,7 @@
                           </a:solidFill>
                           <a:latin typeface="Calibri"/>
                         </a:rPr>
-                        <a:t>11</a:t>
+                        <a:t>7</a:t>
                       </a:r>
                     </a:p>
                   </a:txBody>
@@ -7454,7 +8133,7 @@
                           </a:solidFill>
                           <a:latin typeface="Calibri"/>
                         </a:rPr>
-                        <a:t>BL ANALIA BIJUTERIAS - SAO PAULO / SP</a:t>
+                        <a:t>BL TIJU ACESSORIOS L - SAO PAULO / SP</a:t>
                       </a:r>
                     </a:p>
                   </a:txBody>
@@ -7477,7 +8156,7 @@
                           </a:solidFill>
                           <a:latin typeface="Calibri"/>
                         </a:rPr>
-                        <a:t>4</a:t>
+                        <a:t>3</a:t>
                       </a:r>
                     </a:p>
                   </a:txBody>
@@ -7500,7 +8179,7 @@
                           </a:solidFill>
                           <a:latin typeface="Calibri"/>
                         </a:rPr>
-                        <a:t>4</a:t>
+                        <a:t>3</a:t>
                       </a:r>
                     </a:p>
                   </a:txBody>
@@ -7617,7 +8296,7 @@
                           </a:solidFill>
                           <a:latin typeface="Calibri"/>
                         </a:rPr>
-                        <a:t>BSG BIJOU BRASIL COM - ITAJAI / SC</a:t>
+                        <a:t>BM MODAS E ACESSORIO - CAMPINAS / SP</a:t>
                       </a:r>
                     </a:p>
                   </a:txBody>
@@ -7640,7 +8319,7 @@
                           </a:solidFill>
                           <a:latin typeface="Calibri"/>
                         </a:rPr>
-                        <a:t>4</a:t>
+                        <a:t>3</a:t>
                       </a:r>
                     </a:p>
                   </a:txBody>
@@ -7686,7 +8365,7 @@
                           </a:solidFill>
                           <a:latin typeface="Calibri"/>
                         </a:rPr>
-                        <a:t>1</a:t>
+                        <a:t>0</a:t>
                       </a:r>
                     </a:p>
                   </a:txBody>
@@ -7709,7 +8388,7 @@
                           </a:solidFill>
                           <a:latin typeface="Calibri"/>
                         </a:rPr>
-                        <a:t>75.0%</a:t>
+                        <a:t>100.0%</a:t>
                       </a:r>
                     </a:p>
                   </a:txBody>
@@ -7732,7 +8411,7 @@
                           </a:solidFill>
                           <a:latin typeface="Calibri"/>
                         </a:rPr>
-                        <a:t>Atencao</a:t>
+                        <a:t>Excelente</a:t>
                       </a:r>
                     </a:p>
                   </a:txBody>
@@ -7780,7 +8459,7 @@
                           </a:solidFill>
                           <a:latin typeface="Calibri"/>
                         </a:rPr>
-                        <a:t>BM MODAS E ACESSORIO - CAMPINAS / SP</a:t>
+                        <a:t>CMC LITTLE STORE LTD - SAO PAULO / SP</a:t>
                       </a:r>
                     </a:p>
                   </a:txBody>
@@ -7803,7 +8482,7 @@
                           </a:solidFill>
                           <a:latin typeface="Calibri"/>
                         </a:rPr>
-                        <a:t>4</a:t>
+                        <a:t>3</a:t>
                       </a:r>
                     </a:p>
                   </a:txBody>
@@ -7826,7 +8505,7 @@
                           </a:solidFill>
                           <a:latin typeface="Calibri"/>
                         </a:rPr>
-                        <a:t>4</a:t>
+                        <a:t>3</a:t>
                       </a:r>
                     </a:p>
                   </a:txBody>
@@ -7943,7 +8622,7 @@
                           </a:solidFill>
                           <a:latin typeface="Calibri"/>
                         </a:rPr>
-                        <a:t>RAPIDO XAPURI TRANSP - GUARULHOS / SP</a:t>
+                        <a:t>CMC LUNA ACESSORIOS - SAO CAETANO DO SUL / SP</a:t>
                       </a:r>
                     </a:p>
                   </a:txBody>
@@ -7966,7 +8645,7 @@
                           </a:solidFill>
                           <a:latin typeface="Calibri"/>
                         </a:rPr>
-                        <a:t>4</a:t>
+                        <a:t>3</a:t>
                       </a:r>
                     </a:p>
                   </a:txBody>
@@ -7989,7 +8668,7 @@
                           </a:solidFill>
                           <a:latin typeface="Calibri"/>
                         </a:rPr>
-                        <a:t>4</a:t>
+                        <a:t>3</a:t>
                       </a:r>
                     </a:p>
                   </a:txBody>
@@ -8106,7 +8785,7 @@
                           </a:solidFill>
                           <a:latin typeface="Calibri"/>
                         </a:rPr>
-                        <a:t>SASAKI MODA E ACESSO - SAO PAULO / SP</a:t>
+                        <a:t>BL ANALIA BIJUTERIAS - SAO PAULO / SP</a:t>
                       </a:r>
                     </a:p>
                   </a:txBody>
@@ -8129,7 +8808,7 @@
                           </a:solidFill>
                           <a:latin typeface="Calibri"/>
                         </a:rPr>
-                        <a:t>4</a:t>
+                        <a:t>3</a:t>
                       </a:r>
                     </a:p>
                   </a:txBody>
@@ -8152,7 +8831,7 @@
                           </a:solidFill>
                           <a:latin typeface="Calibri"/>
                         </a:rPr>
-                        <a:t>4</a:t>
+                        <a:t>3</a:t>
                       </a:r>
                     </a:p>
                   </a:txBody>
@@ -8269,7 +8948,7 @@
                           </a:solidFill>
                           <a:latin typeface="Calibri"/>
                         </a:rPr>
-                        <a:t>MAJO MODAS E ACESSOR - MOGI GUACU / SP</a:t>
+                        <a:t>CMGL MORUMBI ACESSOR - SAO PAULO / SP</a:t>
                       </a:r>
                     </a:p>
                   </a:txBody>
@@ -8292,7 +8971,7 @@
                           </a:solidFill>
                           <a:latin typeface="Calibri"/>
                         </a:rPr>
-                        <a:t>4</a:t>
+                        <a:t>3</a:t>
                       </a:r>
                     </a:p>
                   </a:txBody>
@@ -8315,7 +8994,7 @@
                           </a:solidFill>
                           <a:latin typeface="Calibri"/>
                         </a:rPr>
-                        <a:t>4</a:t>
+                        <a:t>3</a:t>
                       </a:r>
                     </a:p>
                   </a:txBody>
@@ -8432,7 +9111,7 @@
                           </a:solidFill>
                           <a:latin typeface="Calibri"/>
                         </a:rPr>
-                        <a:t>LAROCCA MODA E ACESS - SAO PAULO / SP</a:t>
+                        <a:t>GIRASSOL ACESSORIOS - SAO PAULO / SP</a:t>
                       </a:r>
                     </a:p>
                   </a:txBody>
@@ -8455,7 +9134,7 @@
                           </a:solidFill>
                           <a:latin typeface="Calibri"/>
                         </a:rPr>
-                        <a:t>4</a:t>
+                        <a:t>3</a:t>
                       </a:r>
                     </a:p>
                   </a:txBody>
@@ -8478,7 +9157,7 @@
                           </a:solidFill>
                           <a:latin typeface="Calibri"/>
                         </a:rPr>
-                        <a:t>4</a:t>
+                        <a:t>3</a:t>
                       </a:r>
                     </a:p>
                   </a:txBody>
@@ -8595,7 +9274,7 @@
                           </a:solidFill>
                           <a:latin typeface="Calibri"/>
                         </a:rPr>
-                        <a:t>GIRASSOL ACESSORIOS - SAO PAULO / SP</a:t>
+                        <a:t>MAJO MODAS E ACESSOR - MOGI GUACU / SP</a:t>
                       </a:r>
                     </a:p>
                   </a:txBody>
@@ -8758,7 +9437,7 @@
                           </a:solidFill>
                           <a:latin typeface="Calibri"/>
                         </a:rPr>
-                        <a:t>CMGL MORUMBI ACESSOR - SAO PAULO / SP</a:t>
+                        <a:t>LAROCCA MODA E ACESS - SAO PAULO / SP</a:t>
                       </a:r>
                     </a:p>
                   </a:txBody>
@@ -8804,7 +9483,7 @@
                           </a:solidFill>
                           <a:latin typeface="Calibri"/>
                         </a:rPr>
-                        <a:t>3</a:t>
+                        <a:t>2</a:t>
                       </a:r>
                     </a:p>
                   </a:txBody>
@@ -8827,7 +9506,7 @@
                           </a:solidFill>
                           <a:latin typeface="Calibri"/>
                         </a:rPr>
-                        <a:t>0</a:t>
+                        <a:t>1</a:t>
                       </a:r>
                     </a:p>
                   </a:txBody>
@@ -8850,7 +9529,7 @@
                           </a:solidFill>
                           <a:latin typeface="Calibri"/>
                         </a:rPr>
-                        <a:t>100.0%</a:t>
+                        <a:t>66.7%</a:t>
                       </a:r>
                     </a:p>
                   </a:txBody>
@@ -8873,7 +9552,7 @@
                           </a:solidFill>
                           <a:latin typeface="Calibri"/>
                         </a:rPr>
-                        <a:t>Excelente</a:t>
+                        <a:t>Atencao</a:t>
                       </a:r>
                     </a:p>
                   </a:txBody>
@@ -8921,7 +9600,7 @@
                           </a:solidFill>
                           <a:latin typeface="Calibri"/>
                         </a:rPr>
-                        <a:t>CMC LUNA ACESSORIOS - SAO CAETANO DO SUL / SP</a:t>
+                        <a:t>SASAKI MODA E ACESSO - SAO PAULO / SP</a:t>
                       </a:r>
                     </a:p>
                   </a:txBody>
@@ -8967,7 +9646,7 @@
                           </a:solidFill>
                           <a:latin typeface="Calibri"/>
                         </a:rPr>
-                        <a:t>2</a:t>
+                        <a:t>3</a:t>
                       </a:r>
                     </a:p>
                   </a:txBody>
@@ -8990,7 +9669,7 @@
                           </a:solidFill>
                           <a:latin typeface="Calibri"/>
                         </a:rPr>
-                        <a:t>1</a:t>
+                        <a:t>0</a:t>
                       </a:r>
                     </a:p>
                   </a:txBody>
@@ -9013,7 +9692,7 @@
                           </a:solidFill>
                           <a:latin typeface="Calibri"/>
                         </a:rPr>
-                        <a:t>66.7%</a:t>
+                        <a:t>100.0%</a:t>
                       </a:r>
                     </a:p>
                   </a:txBody>
@@ -9036,7 +9715,7 @@
                           </a:solidFill>
                           <a:latin typeface="Calibri"/>
                         </a:rPr>
-                        <a:t>Atencao</a:t>
+                        <a:t>Excelente</a:t>
                       </a:r>
                     </a:p>
                   </a:txBody>
@@ -9084,7 +9763,7 @@
                           </a:solidFill>
                           <a:latin typeface="Calibri"/>
                         </a:rPr>
-                        <a:t>CMC LITTLE STORE LTD - SAO PAULO / SP</a:t>
+                        <a:t>RAPIDO XAPURI TRANSP - GUARULHOS / SP</a:t>
                       </a:r>
                     </a:p>
                   </a:txBody>
@@ -9107,7 +9786,7 @@
                           </a:solidFill>
                           <a:latin typeface="Calibri"/>
                         </a:rPr>
-                        <a:t>3</a:t>
+                        <a:t>2</a:t>
                       </a:r>
                     </a:p>
                   </a:txBody>
@@ -9153,7 +9832,7 @@
                           </a:solidFill>
                           <a:latin typeface="Calibri"/>
                         </a:rPr>
-                        <a:t>1</a:t>
+                        <a:t>0</a:t>
                       </a:r>
                     </a:p>
                   </a:txBody>
@@ -9176,7 +9855,7 @@
                           </a:solidFill>
                           <a:latin typeface="Calibri"/>
                         </a:rPr>
-                        <a:t>66.7%</a:t>
+                        <a:t>100.0%</a:t>
                       </a:r>
                     </a:p>
                   </a:txBody>
@@ -9199,7 +9878,7 @@
                           </a:solidFill>
                           <a:latin typeface="Calibri"/>
                         </a:rPr>
-                        <a:t>Atencao</a:t>
+                        <a:t>Excelente</a:t>
                       </a:r>
                     </a:p>
                   </a:txBody>
@@ -9247,7 +9926,7 @@
                           </a:solidFill>
                           <a:latin typeface="Calibri"/>
                         </a:rPr>
-                        <a:t>TM MODA E ACESSORIOS - BELO HORIZONTE / MG</a:t>
+                        <a:t>NATHALIE PEDROZA ALV - SANTANA DE PARNAIBA / SP</a:t>
                       </a:r>
                     </a:p>
                   </a:txBody>
@@ -9270,7 +9949,7 @@
                           </a:solidFill>
                           <a:latin typeface="Calibri"/>
                         </a:rPr>
-                        <a:t>3</a:t>
+                        <a:t>1</a:t>
                       </a:r>
                     </a:p>
                   </a:txBody>
@@ -9293,7 +9972,7 @@
                           </a:solidFill>
                           <a:latin typeface="Calibri"/>
                         </a:rPr>
-                        <a:t>3</a:t>
+                        <a:t>1</a:t>
                       </a:r>
                     </a:p>
                   </a:txBody>

--- a/BSG_BIJOU_BRASIL_COMERCIO_VARE.pptx
+++ b/BSG_BIJOU_BRASIL_COMERCIO_VARE.pptx
@@ -143,29 +143,23 @@
           </c:spPr>
           <c:cat>
             <c:strRef>
-              <c:f>Sheet1!$A$2:$A$3</c:f>
+              <c:f>Sheet1!$A$2:$A$2</c:f>
               <c:strCache>
-                <c:ptCount val="2"/>
+                <c:ptCount val="1"/>
                 <c:pt idx="0">
                   <c:v>Abril 2026</c:v>
-                </c:pt>
-                <c:pt idx="1">
-                  <c:v>Maio 2026</c:v>
                 </c:pt>
               </c:strCache>
             </c:strRef>
           </c:cat>
           <c:val>
             <c:numRef>
-              <c:f>Sheet1!$B$2:$B$3</c:f>
+              <c:f>Sheet1!$B$2:$B$2</c:f>
               <c:numCache>
                 <c:formatCode>General</c:formatCode>
-                <c:ptCount val="2"/>
+                <c:ptCount val="1"/>
                 <c:pt idx="0">
-                  <c:v>120</c:v>
-                </c:pt>
-                <c:pt idx="1">
-                  <c:v>74</c:v>
+                  <c:v>117</c:v>
                 </c:pt>
               </c:numCache>
             </c:numRef>
@@ -192,29 +186,23 @@
           </c:spPr>
           <c:cat>
             <c:strRef>
-              <c:f>Sheet1!$A$2:$A$3</c:f>
+              <c:f>Sheet1!$A$2:$A$2</c:f>
               <c:strCache>
-                <c:ptCount val="2"/>
+                <c:ptCount val="1"/>
                 <c:pt idx="0">
                   <c:v>Abril 2026</c:v>
-                </c:pt>
-                <c:pt idx="1">
-                  <c:v>Maio 2026</c:v>
                 </c:pt>
               </c:strCache>
             </c:strRef>
           </c:cat>
           <c:val>
             <c:numRef>
-              <c:f>Sheet1!$C$2:$C$3</c:f>
+              <c:f>Sheet1!$C$2:$C$2</c:f>
               <c:numCache>
                 <c:formatCode>General</c:formatCode>
-                <c:ptCount val="2"/>
+                <c:ptCount val="1"/>
                 <c:pt idx="0">
-                  <c:v>4</c:v>
-                </c:pt>
-                <c:pt idx="1">
-                  <c:v>12</c:v>
+                  <c:v>3</c:v>
                 </c:pt>
               </c:numCache>
             </c:numRef>
@@ -3387,7 +3375,7 @@
                 </a:solidFill>
                 <a:latin typeface="Calibri"/>
               </a:rPr>
-              <a:t>INDICADORES MAIO 2026</a:t>
+              <a:t>INDICADORES ABRIL 2026</a:t>
             </a:r>
           </a:p>
         </p:txBody>
@@ -3494,14 +3482,13 @@
           <a:p>
             <a:pPr algn="ctr"/>
             <a:r>
-              <a:rPr sz="1600" b="1">
+              <a:rPr sz="1400" b="1">
                 <a:solidFill>
                   <a:srgbClr val="FFFFFF"/>
                 </a:solidFill>
                 <a:latin typeface="Calibri"/>
               </a:rPr>
-              <a:t>Nossa rota e ir alem das
-entregas!</a:t>
+              <a:t>Nossa rota e ir alem das entregas!</a:t>
             </a:r>
           </a:p>
         </p:txBody>
@@ -3709,7 +3696,7 @@
                 </a:solidFill>
                 <a:latin typeface="Calibri"/>
               </a:rPr>
-              <a:t>86</a:t>
+              <a:t>120</a:t>
             </a:r>
           </a:p>
         </p:txBody>
@@ -3824,7 +3811,7 @@
                 </a:solidFill>
                 <a:latin typeface="Calibri"/>
               </a:rPr>
-              <a:t>74</a:t>
+              <a:t>117</a:t>
             </a:r>
           </a:p>
         </p:txBody>
@@ -3939,7 +3926,7 @@
                 </a:solidFill>
                 <a:latin typeface="Calibri"/>
               </a:rPr>
-              <a:t>12</a:t>
+              <a:t>3</a:t>
             </a:r>
           </a:p>
         </p:txBody>
@@ -4050,11 +4037,11 @@
             <a:r>
               <a:rPr sz="2800" b="1">
                 <a:solidFill>
-                  <a:srgbClr val="F59E0B"/>
+                  <a:srgbClr val="10B981"/>
                 </a:solidFill>
                 <a:latin typeface="Calibri"/>
               </a:rPr>
-              <a:t>86.0%</a:t>
+              <a:t>97.5%</a:t>
             </a:r>
           </a:p>
         </p:txBody>
@@ -4155,30 +4142,30 @@
                           </a:solidFill>
                           <a:latin typeface="Calibri"/>
                         </a:rPr>
+                        <a:t>Marco 2026</a:t>
+                      </a:r>
+                    </a:p>
+                  </a:txBody>
+                  <a:tcPr>
+                    <a:solidFill>
+                      <a:srgbClr val="1D1B43"/>
+                    </a:solidFill>
+                  </a:tcPr>
+                </a:tc>
+                <a:tc>
+                  <a:txBody>
+                    <a:bodyPr/>
+                    <a:lstStyle/>
+                    <a:p>
+                      <a:pPr algn="ctr"/>
+                      <a:r>
+                        <a:rPr sz="1100" b="1">
+                          <a:solidFill>
+                            <a:srgbClr val="FFFFFF"/>
+                          </a:solidFill>
+                          <a:latin typeface="Calibri"/>
+                        </a:rPr>
                         <a:t>Abril 2026</a:t>
-                      </a:r>
-                    </a:p>
-                  </a:txBody>
-                  <a:tcPr>
-                    <a:solidFill>
-                      <a:srgbClr val="1D1B43"/>
-                    </a:solidFill>
-                  </a:tcPr>
-                </a:tc>
-                <a:tc>
-                  <a:txBody>
-                    <a:bodyPr/>
-                    <a:lstStyle/>
-                    <a:p>
-                      <a:pPr algn="ctr"/>
-                      <a:r>
-                        <a:rPr sz="1100" b="1">
-                          <a:solidFill>
-                            <a:srgbClr val="FFFFFF"/>
-                          </a:solidFill>
-                          <a:latin typeface="Calibri"/>
-                        </a:rPr>
-                        <a:t>Maio 2026</a:t>
                       </a:r>
                     </a:p>
                   </a:txBody>
@@ -4249,7 +4236,7 @@
                           </a:solidFill>
                           <a:latin typeface="Calibri"/>
                         </a:rPr>
-                        <a:t>124</a:t>
+                        <a:t>-</a:t>
                       </a:r>
                     </a:p>
                   </a:txBody>
@@ -4272,7 +4259,7 @@
                           </a:solidFill>
                           <a:latin typeface="Calibri"/>
                         </a:rPr>
-                        <a:t>86</a:t>
+                        <a:t>120</a:t>
                       </a:r>
                     </a:p>
                   </a:txBody>
@@ -4295,7 +4282,7 @@
                           </a:solidFill>
                           <a:latin typeface="Calibri"/>
                         </a:rPr>
-                        <a:t>- 38</a:t>
+                        <a:t>-</a:t>
                       </a:r>
                     </a:p>
                   </a:txBody>
@@ -4343,7 +4330,7 @@
                           </a:solidFill>
                           <a:latin typeface="Calibri"/>
                         </a:rPr>
-                        <a:t>120</a:t>
+                        <a:t>-</a:t>
                       </a:r>
                     </a:p>
                   </a:txBody>
@@ -4366,7 +4353,7 @@
                           </a:solidFill>
                           <a:latin typeface="Calibri"/>
                         </a:rPr>
-                        <a:t>74</a:t>
+                        <a:t>117</a:t>
                       </a:r>
                     </a:p>
                   </a:txBody>
@@ -4389,7 +4376,7 @@
                           </a:solidFill>
                           <a:latin typeface="Calibri"/>
                         </a:rPr>
-                        <a:t>- 46</a:t>
+                        <a:t>-</a:t>
                       </a:r>
                     </a:p>
                   </a:txBody>
@@ -4437,7 +4424,7 @@
                           </a:solidFill>
                           <a:latin typeface="Calibri"/>
                         </a:rPr>
-                        <a:t>4</a:t>
+                        <a:t>-</a:t>
                       </a:r>
                     </a:p>
                   </a:txBody>
@@ -4460,7 +4447,7 @@
                           </a:solidFill>
                           <a:latin typeface="Calibri"/>
                         </a:rPr>
-                        <a:t>12</a:t>
+                        <a:t>3</a:t>
                       </a:r>
                     </a:p>
                   </a:txBody>
@@ -4483,7 +4470,7 @@
                           </a:solidFill>
                           <a:latin typeface="Calibri"/>
                         </a:rPr>
-                        <a:t>+ 8</a:t>
+                        <a:t>-</a:t>
                       </a:r>
                     </a:p>
                   </a:txBody>
@@ -4531,7 +4518,7 @@
                           </a:solidFill>
                           <a:latin typeface="Calibri"/>
                         </a:rPr>
-                        <a:t>96.8%</a:t>
+                        <a:t>-</a:t>
                       </a:r>
                     </a:p>
                   </a:txBody>
@@ -4554,7 +4541,7 @@
                           </a:solidFill>
                           <a:latin typeface="Calibri"/>
                         </a:rPr>
-                        <a:t>86.0%</a:t>
+                        <a:t>97.5%</a:t>
                       </a:r>
                     </a:p>
                   </a:txBody>
@@ -4577,7 +4564,7 @@
                           </a:solidFill>
                           <a:latin typeface="Calibri"/>
                         </a:rPr>
-                        <a:t>- 10.8pp</a:t>
+                        <a:t>-</a:t>
                       </a:r>
                     </a:p>
                   </a:txBody>
@@ -4748,7 +4735,7 @@
         </p:nvGraphicFramePr>
         <p:xfrm>
           <a:off x="7955279" y="2286000"/>
-          <a:ext cx="4480560" cy="1316736"/>
+          <a:ext cx="4480560" cy="877824"/>
         </p:xfrm>
         <a:graphic>
           <a:graphicData uri="http://schemas.openxmlformats.org/drawingml/2006/table">
@@ -4917,7 +4904,7 @@
                           </a:solidFill>
                           <a:latin typeface="Calibri"/>
                         </a:rPr>
-                        <a:t>124</a:t>
+                        <a:t>120</a:t>
                       </a:r>
                     </a:p>
                   </a:txBody>
@@ -4940,7 +4927,7 @@
                           </a:solidFill>
                           <a:latin typeface="Calibri"/>
                         </a:rPr>
-                        <a:t>120</a:t>
+                        <a:t>117</a:t>
                       </a:r>
                     </a:p>
                   </a:txBody>
@@ -4963,7 +4950,7 @@
                           </a:solidFill>
                           <a:latin typeface="Calibri"/>
                         </a:rPr>
-                        <a:t>4</a:t>
+                        <a:t>3</a:t>
                       </a:r>
                     </a:p>
                   </a:txBody>
@@ -4986,130 +4973,13 @@
                           </a:solidFill>
                           <a:latin typeface="Calibri"/>
                         </a:rPr>
-                        <a:t>96.8%</a:t>
+                        <a:t>97.5%</a:t>
                       </a:r>
                     </a:p>
                   </a:txBody>
                   <a:tcPr>
                     <a:solidFill>
                       <a:srgbClr val="FFFFFF"/>
-                    </a:solidFill>
-                  </a:tcPr>
-                </a:tc>
-              </a:tr>
-              <a:tr h="438912">
-                <a:tc>
-                  <a:txBody>
-                    <a:bodyPr/>
-                    <a:lstStyle/>
-                    <a:p>
-                      <a:pPr algn="l"/>
-                      <a:r>
-                        <a:rPr sz="1000" b="0">
-                          <a:solidFill>
-                            <a:srgbClr val="1D1B43"/>
-                          </a:solidFill>
-                          <a:latin typeface="Calibri"/>
-                        </a:rPr>
-                        <a:t>Maio 2026</a:t>
-                      </a:r>
-                    </a:p>
-                  </a:txBody>
-                  <a:tcPr>
-                    <a:solidFill>
-                      <a:srgbClr val="F2F2F2"/>
-                    </a:solidFill>
-                  </a:tcPr>
-                </a:tc>
-                <a:tc>
-                  <a:txBody>
-                    <a:bodyPr/>
-                    <a:lstStyle/>
-                    <a:p>
-                      <a:pPr algn="l"/>
-                      <a:r>
-                        <a:rPr sz="1000" b="0">
-                          <a:solidFill>
-                            <a:srgbClr val="1D1B43"/>
-                          </a:solidFill>
-                          <a:latin typeface="Calibri"/>
-                        </a:rPr>
-                        <a:t>86</a:t>
-                      </a:r>
-                    </a:p>
-                  </a:txBody>
-                  <a:tcPr>
-                    <a:solidFill>
-                      <a:srgbClr val="F2F2F2"/>
-                    </a:solidFill>
-                  </a:tcPr>
-                </a:tc>
-                <a:tc>
-                  <a:txBody>
-                    <a:bodyPr/>
-                    <a:lstStyle/>
-                    <a:p>
-                      <a:pPr algn="l"/>
-                      <a:r>
-                        <a:rPr sz="1000" b="0">
-                          <a:solidFill>
-                            <a:srgbClr val="1D1B43"/>
-                          </a:solidFill>
-                          <a:latin typeface="Calibri"/>
-                        </a:rPr>
-                        <a:t>74</a:t>
-                      </a:r>
-                    </a:p>
-                  </a:txBody>
-                  <a:tcPr>
-                    <a:solidFill>
-                      <a:srgbClr val="F2F2F2"/>
-                    </a:solidFill>
-                  </a:tcPr>
-                </a:tc>
-                <a:tc>
-                  <a:txBody>
-                    <a:bodyPr/>
-                    <a:lstStyle/>
-                    <a:p>
-                      <a:pPr algn="l"/>
-                      <a:r>
-                        <a:rPr sz="1000" b="0">
-                          <a:solidFill>
-                            <a:srgbClr val="1D1B43"/>
-                          </a:solidFill>
-                          <a:latin typeface="Calibri"/>
-                        </a:rPr>
-                        <a:t>12</a:t>
-                      </a:r>
-                    </a:p>
-                  </a:txBody>
-                  <a:tcPr>
-                    <a:solidFill>
-                      <a:srgbClr val="F2F2F2"/>
-                    </a:solidFill>
-                  </a:tcPr>
-                </a:tc>
-                <a:tc>
-                  <a:txBody>
-                    <a:bodyPr/>
-                    <a:lstStyle/>
-                    <a:p>
-                      <a:pPr algn="l"/>
-                      <a:r>
-                        <a:rPr sz="1000" b="0">
-                          <a:solidFill>
-                            <a:srgbClr val="1D1B43"/>
-                          </a:solidFill>
-                          <a:latin typeface="Calibri"/>
-                        </a:rPr>
-                        <a:t>86.0%</a:t>
-                      </a:r>
-                    </a:p>
-                  </a:txBody>
-                  <a:tcPr>
-                    <a:solidFill>
-                      <a:srgbClr val="F2F2F2"/>
                     </a:solidFill>
                   </a:tcPr>
                 </a:tc>
@@ -5191,7 +5061,7 @@
                 </a:solidFill>
                 <a:latin typeface="Calibri"/>
               </a:rPr>
-              <a:t>PERFORMANCE: 86.0% - REGULAR</a:t>
+              <a:t>PERFORMANCE: 97.5% - EXCELENTE</a:t>
             </a:r>
           </a:p>
         </p:txBody>
@@ -5276,7 +5146,7 @@
                 </a:solidFill>
                 <a:latin typeface="Calibri"/>
               </a:rPr>
-              <a:t>OCORRENCIAS FORA DO PRAZO (12)</a:t>
+              <a:t>OCORRENCIAS FORA DO PRAZO (3)</a:t>
             </a:r>
           </a:p>
         </p:txBody>
@@ -5334,7 +5204,7 @@
         </p:nvGraphicFramePr>
         <p:xfrm>
           <a:off x="457200" y="1828800"/>
-          <a:ext cx="11429999" cy="4571996"/>
+          <a:ext cx="11429999" cy="1536192"/>
         </p:xfrm>
         <a:graphic>
           <a:graphicData uri="http://schemas.openxmlformats.org/drawingml/2006/table">
@@ -5349,7 +5219,7 @@
                 <a:gridCol w="1554480"/>
                 <a:gridCol w="2743200"/>
               </a:tblGrid>
-              <a:tr h="351692">
+              <a:tr h="384048">
                 <a:tc>
                   <a:txBody>
                     <a:bodyPr/>
@@ -5466,21 +5336,21 @@
                   </a:tcPr>
                 </a:tc>
               </a:tr>
-              <a:tr h="351692">
-                <a:tc>
-                  <a:txBody>
-                    <a:bodyPr/>
-                    <a:lstStyle/>
-                    <a:p>
-                      <a:pPr algn="l"/>
-                      <a:r>
-                        <a:rPr sz="1000" b="0">
-                          <a:solidFill>
-                            <a:srgbClr val="1D1B43"/>
-                          </a:solidFill>
-                          <a:latin typeface="Calibri"/>
-                        </a:rPr>
-                        <a:t>281602</a:t>
+              <a:tr h="384048">
+                <a:tc>
+                  <a:txBody>
+                    <a:bodyPr/>
+                    <a:lstStyle/>
+                    <a:p>
+                      <a:pPr algn="l"/>
+                      <a:r>
+                        <a:rPr sz="1000" b="0">
+                          <a:solidFill>
+                            <a:srgbClr val="1D1B43"/>
+                          </a:solidFill>
+                          <a:latin typeface="Calibri"/>
+                        </a:rPr>
+                        <a:t>277610</a:t>
                       </a:r>
                     </a:p>
                   </a:txBody>
@@ -5503,12 +5373,223 @@
                           </a:solidFill>
                           <a:latin typeface="Calibri"/>
                         </a:rPr>
+                        <a:t>BSG BIJOU BRASIL COM - ITAJAI / SC</a:t>
+                      </a:r>
+                    </a:p>
+                  </a:txBody>
+                  <a:tcPr>
+                    <a:solidFill>
+                      <a:srgbClr val="FFFFFF"/>
+                    </a:solidFill>
+                  </a:tcPr>
+                </a:tc>
+                <a:tc>
+                  <a:txBody>
+                    <a:bodyPr/>
+                    <a:lstStyle/>
+                    <a:p>
+                      <a:pPr algn="l"/>
+                      <a:r>
+                        <a:rPr sz="1000" b="0">
+                          <a:solidFill>
+                            <a:srgbClr val="1D1B43"/>
+                          </a:solidFill>
+                          <a:latin typeface="Calibri"/>
+                        </a:rPr>
+                        <a:t>ITAJAI/SC</a:t>
+                      </a:r>
+                    </a:p>
+                  </a:txBody>
+                  <a:tcPr>
+                    <a:solidFill>
+                      <a:srgbClr val="FFFFFF"/>
+                    </a:solidFill>
+                  </a:tcPr>
+                </a:tc>
+                <a:tc>
+                  <a:txBody>
+                    <a:bodyPr/>
+                    <a:lstStyle/>
+                    <a:p>
+                      <a:pPr algn="l"/>
+                      <a:r>
+                        <a:rPr sz="1000" b="0">
+                          <a:solidFill>
+                            <a:srgbClr val="1D1B43"/>
+                          </a:solidFill>
+                          <a:latin typeface="Calibri"/>
+                        </a:rPr>
+                        <a:t>01/04/2026</a:t>
+                      </a:r>
+                    </a:p>
+                  </a:txBody>
+                  <a:tcPr>
+                    <a:solidFill>
+                      <a:srgbClr val="FFFFFF"/>
+                    </a:solidFill>
+                  </a:tcPr>
+                </a:tc>
+                <a:tc>
+                  <a:txBody>
+                    <a:bodyPr/>
+                    <a:lstStyle/>
+                    <a:p>
+                      <a:pPr algn="l"/>
+                      <a:r>
+                        <a:rPr sz="1000" b="0">
+                          <a:solidFill>
+                            <a:srgbClr val="1D1B43"/>
+                          </a:solidFill>
+                          <a:latin typeface="Calibri"/>
+                        </a:rPr>
+                        <a:t>ENTREGUE FORA DO PRAZO</a:t>
+                      </a:r>
+                    </a:p>
+                  </a:txBody>
+                  <a:tcPr>
+                    <a:solidFill>
+                      <a:srgbClr val="FFFFFF"/>
+                    </a:solidFill>
+                  </a:tcPr>
+                </a:tc>
+              </a:tr>
+              <a:tr h="384048">
+                <a:tc>
+                  <a:txBody>
+                    <a:bodyPr/>
+                    <a:lstStyle/>
+                    <a:p>
+                      <a:pPr algn="l"/>
+                      <a:r>
+                        <a:rPr sz="1000" b="0">
+                          <a:solidFill>
+                            <a:srgbClr val="1D1B43"/>
+                          </a:solidFill>
+                          <a:latin typeface="Calibri"/>
+                        </a:rPr>
+                        <a:t>280127</a:t>
+                      </a:r>
+                    </a:p>
+                  </a:txBody>
+                  <a:tcPr>
+                    <a:solidFill>
+                      <a:srgbClr val="F2F2F2"/>
+                    </a:solidFill>
+                  </a:tcPr>
+                </a:tc>
+                <a:tc>
+                  <a:txBody>
+                    <a:bodyPr/>
+                    <a:lstStyle/>
+                    <a:p>
+                      <a:pPr algn="l"/>
+                      <a:r>
+                        <a:rPr sz="1000" b="0">
+                          <a:solidFill>
+                            <a:srgbClr val="1D1B43"/>
+                          </a:solidFill>
+                          <a:latin typeface="Calibri"/>
+                        </a:rPr>
                         <a:t>BSG BIJOU BRASIL COM - SAO PAULO / SP</a:t>
                       </a:r>
                     </a:p>
                   </a:txBody>
                   <a:tcPr>
                     <a:solidFill>
+                      <a:srgbClr val="F2F2F2"/>
+                    </a:solidFill>
+                  </a:tcPr>
+                </a:tc>
+                <a:tc>
+                  <a:txBody>
+                    <a:bodyPr/>
+                    <a:lstStyle/>
+                    <a:p>
+                      <a:pPr algn="l"/>
+                      <a:r>
+                        <a:rPr sz="1000" b="0">
+                          <a:solidFill>
+                            <a:srgbClr val="1D1B43"/>
+                          </a:solidFill>
+                          <a:latin typeface="Calibri"/>
+                        </a:rPr>
+                        <a:t>SAO PAULO/SP</a:t>
+                      </a:r>
+                    </a:p>
+                  </a:txBody>
+                  <a:tcPr>
+                    <a:solidFill>
+                      <a:srgbClr val="F2F2F2"/>
+                    </a:solidFill>
+                  </a:tcPr>
+                </a:tc>
+                <a:tc>
+                  <a:txBody>
+                    <a:bodyPr/>
+                    <a:lstStyle/>
+                    <a:p>
+                      <a:pPr algn="l"/>
+                      <a:r>
+                        <a:rPr sz="1000" b="0">
+                          <a:solidFill>
+                            <a:srgbClr val="1D1B43"/>
+                          </a:solidFill>
+                          <a:latin typeface="Calibri"/>
+                        </a:rPr>
+                        <a:t>27/04/2026</a:t>
+                      </a:r>
+                    </a:p>
+                  </a:txBody>
+                  <a:tcPr>
+                    <a:solidFill>
+                      <a:srgbClr val="F2F2F2"/>
+                    </a:solidFill>
+                  </a:tcPr>
+                </a:tc>
+                <a:tc>
+                  <a:txBody>
+                    <a:bodyPr/>
+                    <a:lstStyle/>
+                    <a:p>
+                      <a:pPr algn="l"/>
+                      <a:r>
+                        <a:rPr sz="1000" b="0">
+                          <a:solidFill>
+                            <a:srgbClr val="1D1B43"/>
+                          </a:solidFill>
+                          <a:latin typeface="Calibri"/>
+                        </a:rPr>
+                        <a:t>ENTREGUE FORA DO PRAZO</a:t>
+                      </a:r>
+                    </a:p>
+                  </a:txBody>
+                  <a:tcPr>
+                    <a:solidFill>
+                      <a:srgbClr val="F2F2F2"/>
+                    </a:solidFill>
+                  </a:tcPr>
+                </a:tc>
+              </a:tr>
+              <a:tr h="384048">
+                <a:tc>
+                  <a:txBody>
+                    <a:bodyPr/>
+                    <a:lstStyle/>
+                    <a:p>
+                      <a:pPr algn="l"/>
+                      <a:r>
+                        <a:rPr sz="1000" b="0">
+                          <a:solidFill>
+                            <a:srgbClr val="1D1B43"/>
+                          </a:solidFill>
+                          <a:latin typeface="Calibri"/>
+                        </a:rPr>
+                        <a:t>281288</a:t>
+                      </a:r>
+                    </a:p>
+                  </a:txBody>
+                  <a:tcPr>
+                    <a:solidFill>
                       <a:srgbClr val="FFFFFF"/>
                     </a:solidFill>
                   </a:tcPr>
@@ -5526,6 +5607,29 @@
                           </a:solidFill>
                           <a:latin typeface="Calibri"/>
                         </a:rPr>
+                        <a:t>BSG BIJOU BRASIL COM - SAO PAULO / SP</a:t>
+                      </a:r>
+                    </a:p>
+                  </a:txBody>
+                  <a:tcPr>
+                    <a:solidFill>
+                      <a:srgbClr val="FFFFFF"/>
+                    </a:solidFill>
+                  </a:tcPr>
+                </a:tc>
+                <a:tc>
+                  <a:txBody>
+                    <a:bodyPr/>
+                    <a:lstStyle/>
+                    <a:p>
+                      <a:pPr algn="l"/>
+                      <a:r>
+                        <a:rPr sz="1000" b="0">
+                          <a:solidFill>
+                            <a:srgbClr val="1D1B43"/>
+                          </a:solidFill>
+                          <a:latin typeface="Calibri"/>
+                        </a:rPr>
                         <a:t>SAO PAULO/SP</a:t>
                       </a:r>
                     </a:p>
@@ -5549,7 +5653,7 @@
                           </a:solidFill>
                           <a:latin typeface="Calibri"/>
                         </a:rPr>
-                        <a:t>05/05/2026</a:t>
+                        <a:t>30/04/2026</a:t>
                       </a:r>
                     </a:p>
                   </a:txBody>
@@ -5579,1293 +5683,6 @@
                   <a:tcPr>
                     <a:solidFill>
                       <a:srgbClr val="FFFFFF"/>
-                    </a:solidFill>
-                  </a:tcPr>
-                </a:tc>
-              </a:tr>
-              <a:tr h="351692">
-                <a:tc>
-                  <a:txBody>
-                    <a:bodyPr/>
-                    <a:lstStyle/>
-                    <a:p>
-                      <a:pPr algn="l"/>
-                      <a:r>
-                        <a:rPr sz="1000" b="0">
-                          <a:solidFill>
-                            <a:srgbClr val="1D1B43"/>
-                          </a:solidFill>
-                          <a:latin typeface="Calibri"/>
-                        </a:rPr>
-                        <a:t>281603</a:t>
-                      </a:r>
-                    </a:p>
-                  </a:txBody>
-                  <a:tcPr>
-                    <a:solidFill>
-                      <a:srgbClr val="F2F2F2"/>
-                    </a:solidFill>
-                  </a:tcPr>
-                </a:tc>
-                <a:tc>
-                  <a:txBody>
-                    <a:bodyPr/>
-                    <a:lstStyle/>
-                    <a:p>
-                      <a:pPr algn="l"/>
-                      <a:r>
-                        <a:rPr sz="1000" b="0">
-                          <a:solidFill>
-                            <a:srgbClr val="1D1B43"/>
-                          </a:solidFill>
-                          <a:latin typeface="Calibri"/>
-                        </a:rPr>
-                        <a:t>BSG BIJOU BRASIL COM - SAO PAULO / SP</a:t>
-                      </a:r>
-                    </a:p>
-                  </a:txBody>
-                  <a:tcPr>
-                    <a:solidFill>
-                      <a:srgbClr val="F2F2F2"/>
-                    </a:solidFill>
-                  </a:tcPr>
-                </a:tc>
-                <a:tc>
-                  <a:txBody>
-                    <a:bodyPr/>
-                    <a:lstStyle/>
-                    <a:p>
-                      <a:pPr algn="l"/>
-                      <a:r>
-                        <a:rPr sz="1000" b="0">
-                          <a:solidFill>
-                            <a:srgbClr val="1D1B43"/>
-                          </a:solidFill>
-                          <a:latin typeface="Calibri"/>
-                        </a:rPr>
-                        <a:t>SAO PAULO/SP</a:t>
-                      </a:r>
-                    </a:p>
-                  </a:txBody>
-                  <a:tcPr>
-                    <a:solidFill>
-                      <a:srgbClr val="F2F2F2"/>
-                    </a:solidFill>
-                  </a:tcPr>
-                </a:tc>
-                <a:tc>
-                  <a:txBody>
-                    <a:bodyPr/>
-                    <a:lstStyle/>
-                    <a:p>
-                      <a:pPr algn="l"/>
-                      <a:r>
-                        <a:rPr sz="1000" b="0">
-                          <a:solidFill>
-                            <a:srgbClr val="1D1B43"/>
-                          </a:solidFill>
-                          <a:latin typeface="Calibri"/>
-                        </a:rPr>
-                        <a:t>05/05/2026</a:t>
-                      </a:r>
-                    </a:p>
-                  </a:txBody>
-                  <a:tcPr>
-                    <a:solidFill>
-                      <a:srgbClr val="F2F2F2"/>
-                    </a:solidFill>
-                  </a:tcPr>
-                </a:tc>
-                <a:tc>
-                  <a:txBody>
-                    <a:bodyPr/>
-                    <a:lstStyle/>
-                    <a:p>
-                      <a:pPr algn="l"/>
-                      <a:r>
-                        <a:rPr sz="1000" b="0">
-                          <a:solidFill>
-                            <a:srgbClr val="1D1B43"/>
-                          </a:solidFill>
-                          <a:latin typeface="Calibri"/>
-                        </a:rPr>
-                        <a:t>ENTREGUE FORA DO PRAZO</a:t>
-                      </a:r>
-                    </a:p>
-                  </a:txBody>
-                  <a:tcPr>
-                    <a:solidFill>
-                      <a:srgbClr val="F2F2F2"/>
-                    </a:solidFill>
-                  </a:tcPr>
-                </a:tc>
-              </a:tr>
-              <a:tr h="351692">
-                <a:tc>
-                  <a:txBody>
-                    <a:bodyPr/>
-                    <a:lstStyle/>
-                    <a:p>
-                      <a:pPr algn="l"/>
-                      <a:r>
-                        <a:rPr sz="1000" b="0">
-                          <a:solidFill>
-                            <a:srgbClr val="1D1B43"/>
-                          </a:solidFill>
-                          <a:latin typeface="Calibri"/>
-                        </a:rPr>
-                        <a:t>281604</a:t>
-                      </a:r>
-                    </a:p>
-                  </a:txBody>
-                  <a:tcPr>
-                    <a:solidFill>
-                      <a:srgbClr val="FFFFFF"/>
-                    </a:solidFill>
-                  </a:tcPr>
-                </a:tc>
-                <a:tc>
-                  <a:txBody>
-                    <a:bodyPr/>
-                    <a:lstStyle/>
-                    <a:p>
-                      <a:pPr algn="l"/>
-                      <a:r>
-                        <a:rPr sz="1000" b="0">
-                          <a:solidFill>
-                            <a:srgbClr val="1D1B43"/>
-                          </a:solidFill>
-                          <a:latin typeface="Calibri"/>
-                        </a:rPr>
-                        <a:t>BSG BIJOU BRASIL COM - SAO PAULO / SP</a:t>
-                      </a:r>
-                    </a:p>
-                  </a:txBody>
-                  <a:tcPr>
-                    <a:solidFill>
-                      <a:srgbClr val="FFFFFF"/>
-                    </a:solidFill>
-                  </a:tcPr>
-                </a:tc>
-                <a:tc>
-                  <a:txBody>
-                    <a:bodyPr/>
-                    <a:lstStyle/>
-                    <a:p>
-                      <a:pPr algn="l"/>
-                      <a:r>
-                        <a:rPr sz="1000" b="0">
-                          <a:solidFill>
-                            <a:srgbClr val="1D1B43"/>
-                          </a:solidFill>
-                          <a:latin typeface="Calibri"/>
-                        </a:rPr>
-                        <a:t>SAO PAULO/SP</a:t>
-                      </a:r>
-                    </a:p>
-                  </a:txBody>
-                  <a:tcPr>
-                    <a:solidFill>
-                      <a:srgbClr val="FFFFFF"/>
-                    </a:solidFill>
-                  </a:tcPr>
-                </a:tc>
-                <a:tc>
-                  <a:txBody>
-                    <a:bodyPr/>
-                    <a:lstStyle/>
-                    <a:p>
-                      <a:pPr algn="l"/>
-                      <a:r>
-                        <a:rPr sz="1000" b="0">
-                          <a:solidFill>
-                            <a:srgbClr val="1D1B43"/>
-                          </a:solidFill>
-                          <a:latin typeface="Calibri"/>
-                        </a:rPr>
-                        <a:t>06/05/2026</a:t>
-                      </a:r>
-                    </a:p>
-                  </a:txBody>
-                  <a:tcPr>
-                    <a:solidFill>
-                      <a:srgbClr val="FFFFFF"/>
-                    </a:solidFill>
-                  </a:tcPr>
-                </a:tc>
-                <a:tc>
-                  <a:txBody>
-                    <a:bodyPr/>
-                    <a:lstStyle/>
-                    <a:p>
-                      <a:pPr algn="l"/>
-                      <a:r>
-                        <a:rPr sz="1000" b="0">
-                          <a:solidFill>
-                            <a:srgbClr val="1D1B43"/>
-                          </a:solidFill>
-                          <a:latin typeface="Calibri"/>
-                        </a:rPr>
-                        <a:t>ENTREGUE FORA DO PRAZO</a:t>
-                      </a:r>
-                    </a:p>
-                  </a:txBody>
-                  <a:tcPr>
-                    <a:solidFill>
-                      <a:srgbClr val="FFFFFF"/>
-                    </a:solidFill>
-                  </a:tcPr>
-                </a:tc>
-              </a:tr>
-              <a:tr h="351692">
-                <a:tc>
-                  <a:txBody>
-                    <a:bodyPr/>
-                    <a:lstStyle/>
-                    <a:p>
-                      <a:pPr algn="l"/>
-                      <a:r>
-                        <a:rPr sz="1000" b="0">
-                          <a:solidFill>
-                            <a:srgbClr val="1D1B43"/>
-                          </a:solidFill>
-                          <a:latin typeface="Calibri"/>
-                        </a:rPr>
-                        <a:t>281605</a:t>
-                      </a:r>
-                    </a:p>
-                  </a:txBody>
-                  <a:tcPr>
-                    <a:solidFill>
-                      <a:srgbClr val="F2F2F2"/>
-                    </a:solidFill>
-                  </a:tcPr>
-                </a:tc>
-                <a:tc>
-                  <a:txBody>
-                    <a:bodyPr/>
-                    <a:lstStyle/>
-                    <a:p>
-                      <a:pPr algn="l"/>
-                      <a:r>
-                        <a:rPr sz="1000" b="0">
-                          <a:solidFill>
-                            <a:srgbClr val="1D1B43"/>
-                          </a:solidFill>
-                          <a:latin typeface="Calibri"/>
-                        </a:rPr>
-                        <a:t>BSG BIJOU BRASIL COM - SAO PAULO / SP</a:t>
-                      </a:r>
-                    </a:p>
-                  </a:txBody>
-                  <a:tcPr>
-                    <a:solidFill>
-                      <a:srgbClr val="F2F2F2"/>
-                    </a:solidFill>
-                  </a:tcPr>
-                </a:tc>
-                <a:tc>
-                  <a:txBody>
-                    <a:bodyPr/>
-                    <a:lstStyle/>
-                    <a:p>
-                      <a:pPr algn="l"/>
-                      <a:r>
-                        <a:rPr sz="1000" b="0">
-                          <a:solidFill>
-                            <a:srgbClr val="1D1B43"/>
-                          </a:solidFill>
-                          <a:latin typeface="Calibri"/>
-                        </a:rPr>
-                        <a:t>SAO PAULO/SP</a:t>
-                      </a:r>
-                    </a:p>
-                  </a:txBody>
-                  <a:tcPr>
-                    <a:solidFill>
-                      <a:srgbClr val="F2F2F2"/>
-                    </a:solidFill>
-                  </a:tcPr>
-                </a:tc>
-                <a:tc>
-                  <a:txBody>
-                    <a:bodyPr/>
-                    <a:lstStyle/>
-                    <a:p>
-                      <a:pPr algn="l"/>
-                      <a:r>
-                        <a:rPr sz="1000" b="0">
-                          <a:solidFill>
-                            <a:srgbClr val="1D1B43"/>
-                          </a:solidFill>
-                          <a:latin typeface="Calibri"/>
-                        </a:rPr>
-                        <a:t>06/05/2026</a:t>
-                      </a:r>
-                    </a:p>
-                  </a:txBody>
-                  <a:tcPr>
-                    <a:solidFill>
-                      <a:srgbClr val="F2F2F2"/>
-                    </a:solidFill>
-                  </a:tcPr>
-                </a:tc>
-                <a:tc>
-                  <a:txBody>
-                    <a:bodyPr/>
-                    <a:lstStyle/>
-                    <a:p>
-                      <a:pPr algn="l"/>
-                      <a:r>
-                        <a:rPr sz="1000" b="0">
-                          <a:solidFill>
-                            <a:srgbClr val="1D1B43"/>
-                          </a:solidFill>
-                          <a:latin typeface="Calibri"/>
-                        </a:rPr>
-                        <a:t>ENTREGUE FORA DO PRAZO</a:t>
-                      </a:r>
-                    </a:p>
-                  </a:txBody>
-                  <a:tcPr>
-                    <a:solidFill>
-                      <a:srgbClr val="F2F2F2"/>
-                    </a:solidFill>
-                  </a:tcPr>
-                </a:tc>
-              </a:tr>
-              <a:tr h="351692">
-                <a:tc>
-                  <a:txBody>
-                    <a:bodyPr/>
-                    <a:lstStyle/>
-                    <a:p>
-                      <a:pPr algn="l"/>
-                      <a:r>
-                        <a:rPr sz="1000" b="0">
-                          <a:solidFill>
-                            <a:srgbClr val="1D1B43"/>
-                          </a:solidFill>
-                          <a:latin typeface="Calibri"/>
-                        </a:rPr>
-                        <a:t>281606</a:t>
-                      </a:r>
-                    </a:p>
-                  </a:txBody>
-                  <a:tcPr>
-                    <a:solidFill>
-                      <a:srgbClr val="FFFFFF"/>
-                    </a:solidFill>
-                  </a:tcPr>
-                </a:tc>
-                <a:tc>
-                  <a:txBody>
-                    <a:bodyPr/>
-                    <a:lstStyle/>
-                    <a:p>
-                      <a:pPr algn="l"/>
-                      <a:r>
-                        <a:rPr sz="1000" b="0">
-                          <a:solidFill>
-                            <a:srgbClr val="1D1B43"/>
-                          </a:solidFill>
-                          <a:latin typeface="Calibri"/>
-                        </a:rPr>
-                        <a:t>BSG BIJOU BRASIL COM - SAO PAULO / SP</a:t>
-                      </a:r>
-                    </a:p>
-                  </a:txBody>
-                  <a:tcPr>
-                    <a:solidFill>
-                      <a:srgbClr val="FFFFFF"/>
-                    </a:solidFill>
-                  </a:tcPr>
-                </a:tc>
-                <a:tc>
-                  <a:txBody>
-                    <a:bodyPr/>
-                    <a:lstStyle/>
-                    <a:p>
-                      <a:pPr algn="l"/>
-                      <a:r>
-                        <a:rPr sz="1000" b="0">
-                          <a:solidFill>
-                            <a:srgbClr val="1D1B43"/>
-                          </a:solidFill>
-                          <a:latin typeface="Calibri"/>
-                        </a:rPr>
-                        <a:t>SAO PAULO/SP</a:t>
-                      </a:r>
-                    </a:p>
-                  </a:txBody>
-                  <a:tcPr>
-                    <a:solidFill>
-                      <a:srgbClr val="FFFFFF"/>
-                    </a:solidFill>
-                  </a:tcPr>
-                </a:tc>
-                <a:tc>
-                  <a:txBody>
-                    <a:bodyPr/>
-                    <a:lstStyle/>
-                    <a:p>
-                      <a:pPr algn="l"/>
-                      <a:r>
-                        <a:rPr sz="1000" b="0">
-                          <a:solidFill>
-                            <a:srgbClr val="1D1B43"/>
-                          </a:solidFill>
-                          <a:latin typeface="Calibri"/>
-                        </a:rPr>
-                        <a:t>06/05/2026</a:t>
-                      </a:r>
-                    </a:p>
-                  </a:txBody>
-                  <a:tcPr>
-                    <a:solidFill>
-                      <a:srgbClr val="FFFFFF"/>
-                    </a:solidFill>
-                  </a:tcPr>
-                </a:tc>
-                <a:tc>
-                  <a:txBody>
-                    <a:bodyPr/>
-                    <a:lstStyle/>
-                    <a:p>
-                      <a:pPr algn="l"/>
-                      <a:r>
-                        <a:rPr sz="1000" b="0">
-                          <a:solidFill>
-                            <a:srgbClr val="1D1B43"/>
-                          </a:solidFill>
-                          <a:latin typeface="Calibri"/>
-                        </a:rPr>
-                        <a:t>ENTREGUE FORA DO PRAZO</a:t>
-                      </a:r>
-                    </a:p>
-                  </a:txBody>
-                  <a:tcPr>
-                    <a:solidFill>
-                      <a:srgbClr val="FFFFFF"/>
-                    </a:solidFill>
-                  </a:tcPr>
-                </a:tc>
-              </a:tr>
-              <a:tr h="351692">
-                <a:tc>
-                  <a:txBody>
-                    <a:bodyPr/>
-                    <a:lstStyle/>
-                    <a:p>
-                      <a:pPr algn="l"/>
-                      <a:r>
-                        <a:rPr sz="1000" b="0">
-                          <a:solidFill>
-                            <a:srgbClr val="1D1B43"/>
-                          </a:solidFill>
-                          <a:latin typeface="Calibri"/>
-                        </a:rPr>
-                        <a:t>281607</a:t>
-                      </a:r>
-                    </a:p>
-                  </a:txBody>
-                  <a:tcPr>
-                    <a:solidFill>
-                      <a:srgbClr val="F2F2F2"/>
-                    </a:solidFill>
-                  </a:tcPr>
-                </a:tc>
-                <a:tc>
-                  <a:txBody>
-                    <a:bodyPr/>
-                    <a:lstStyle/>
-                    <a:p>
-                      <a:pPr algn="l"/>
-                      <a:r>
-                        <a:rPr sz="1000" b="0">
-                          <a:solidFill>
-                            <a:srgbClr val="1D1B43"/>
-                          </a:solidFill>
-                          <a:latin typeface="Calibri"/>
-                        </a:rPr>
-                        <a:t>BSG BIJOU BRASIL COM - SAO PAULO / SP</a:t>
-                      </a:r>
-                    </a:p>
-                  </a:txBody>
-                  <a:tcPr>
-                    <a:solidFill>
-                      <a:srgbClr val="F2F2F2"/>
-                    </a:solidFill>
-                  </a:tcPr>
-                </a:tc>
-                <a:tc>
-                  <a:txBody>
-                    <a:bodyPr/>
-                    <a:lstStyle/>
-                    <a:p>
-                      <a:pPr algn="l"/>
-                      <a:r>
-                        <a:rPr sz="1000" b="0">
-                          <a:solidFill>
-                            <a:srgbClr val="1D1B43"/>
-                          </a:solidFill>
-                          <a:latin typeface="Calibri"/>
-                        </a:rPr>
-                        <a:t>SAO PAULO/SP</a:t>
-                      </a:r>
-                    </a:p>
-                  </a:txBody>
-                  <a:tcPr>
-                    <a:solidFill>
-                      <a:srgbClr val="F2F2F2"/>
-                    </a:solidFill>
-                  </a:tcPr>
-                </a:tc>
-                <a:tc>
-                  <a:txBody>
-                    <a:bodyPr/>
-                    <a:lstStyle/>
-                    <a:p>
-                      <a:pPr algn="l"/>
-                      <a:r>
-                        <a:rPr sz="1000" b="0">
-                          <a:solidFill>
-                            <a:srgbClr val="1D1B43"/>
-                          </a:solidFill>
-                          <a:latin typeface="Calibri"/>
-                        </a:rPr>
-                        <a:t>06/05/2026</a:t>
-                      </a:r>
-                    </a:p>
-                  </a:txBody>
-                  <a:tcPr>
-                    <a:solidFill>
-                      <a:srgbClr val="F2F2F2"/>
-                    </a:solidFill>
-                  </a:tcPr>
-                </a:tc>
-                <a:tc>
-                  <a:txBody>
-                    <a:bodyPr/>
-                    <a:lstStyle/>
-                    <a:p>
-                      <a:pPr algn="l"/>
-                      <a:r>
-                        <a:rPr sz="1000" b="0">
-                          <a:solidFill>
-                            <a:srgbClr val="1D1B43"/>
-                          </a:solidFill>
-                          <a:latin typeface="Calibri"/>
-                        </a:rPr>
-                        <a:t>ENTREGUE FORA DO PRAZO</a:t>
-                      </a:r>
-                    </a:p>
-                  </a:txBody>
-                  <a:tcPr>
-                    <a:solidFill>
-                      <a:srgbClr val="F2F2F2"/>
-                    </a:solidFill>
-                  </a:tcPr>
-                </a:tc>
-              </a:tr>
-              <a:tr h="351692">
-                <a:tc>
-                  <a:txBody>
-                    <a:bodyPr/>
-                    <a:lstStyle/>
-                    <a:p>
-                      <a:pPr algn="l"/>
-                      <a:r>
-                        <a:rPr sz="1000" b="0">
-                          <a:solidFill>
-                            <a:srgbClr val="1D1B43"/>
-                          </a:solidFill>
-                          <a:latin typeface="Calibri"/>
-                        </a:rPr>
-                        <a:t>281608</a:t>
-                      </a:r>
-                    </a:p>
-                  </a:txBody>
-                  <a:tcPr>
-                    <a:solidFill>
-                      <a:srgbClr val="FFFFFF"/>
-                    </a:solidFill>
-                  </a:tcPr>
-                </a:tc>
-                <a:tc>
-                  <a:txBody>
-                    <a:bodyPr/>
-                    <a:lstStyle/>
-                    <a:p>
-                      <a:pPr algn="l"/>
-                      <a:r>
-                        <a:rPr sz="1000" b="0">
-                          <a:solidFill>
-                            <a:srgbClr val="1D1B43"/>
-                          </a:solidFill>
-                          <a:latin typeface="Calibri"/>
-                        </a:rPr>
-                        <a:t>BSG BIJOU BRASIL COM - SAO PAULO / SP</a:t>
-                      </a:r>
-                    </a:p>
-                  </a:txBody>
-                  <a:tcPr>
-                    <a:solidFill>
-                      <a:srgbClr val="FFFFFF"/>
-                    </a:solidFill>
-                  </a:tcPr>
-                </a:tc>
-                <a:tc>
-                  <a:txBody>
-                    <a:bodyPr/>
-                    <a:lstStyle/>
-                    <a:p>
-                      <a:pPr algn="l"/>
-                      <a:r>
-                        <a:rPr sz="1000" b="0">
-                          <a:solidFill>
-                            <a:srgbClr val="1D1B43"/>
-                          </a:solidFill>
-                          <a:latin typeface="Calibri"/>
-                        </a:rPr>
-                        <a:t>SAO PAULO/SP</a:t>
-                      </a:r>
-                    </a:p>
-                  </a:txBody>
-                  <a:tcPr>
-                    <a:solidFill>
-                      <a:srgbClr val="FFFFFF"/>
-                    </a:solidFill>
-                  </a:tcPr>
-                </a:tc>
-                <a:tc>
-                  <a:txBody>
-                    <a:bodyPr/>
-                    <a:lstStyle/>
-                    <a:p>
-                      <a:pPr algn="l"/>
-                      <a:r>
-                        <a:rPr sz="1000" b="0">
-                          <a:solidFill>
-                            <a:srgbClr val="1D1B43"/>
-                          </a:solidFill>
-                          <a:latin typeface="Calibri"/>
-                        </a:rPr>
-                        <a:t>06/05/2026</a:t>
-                      </a:r>
-                    </a:p>
-                  </a:txBody>
-                  <a:tcPr>
-                    <a:solidFill>
-                      <a:srgbClr val="FFFFFF"/>
-                    </a:solidFill>
-                  </a:tcPr>
-                </a:tc>
-                <a:tc>
-                  <a:txBody>
-                    <a:bodyPr/>
-                    <a:lstStyle/>
-                    <a:p>
-                      <a:pPr algn="l"/>
-                      <a:r>
-                        <a:rPr sz="1000" b="0">
-                          <a:solidFill>
-                            <a:srgbClr val="1D1B43"/>
-                          </a:solidFill>
-                          <a:latin typeface="Calibri"/>
-                        </a:rPr>
-                        <a:t>ENTREGUE FORA DO PRAZO</a:t>
-                      </a:r>
-                    </a:p>
-                  </a:txBody>
-                  <a:tcPr>
-                    <a:solidFill>
-                      <a:srgbClr val="FFFFFF"/>
-                    </a:solidFill>
-                  </a:tcPr>
-                </a:tc>
-              </a:tr>
-              <a:tr h="351692">
-                <a:tc>
-                  <a:txBody>
-                    <a:bodyPr/>
-                    <a:lstStyle/>
-                    <a:p>
-                      <a:pPr algn="l"/>
-                      <a:r>
-                        <a:rPr sz="1000" b="0">
-                          <a:solidFill>
-                            <a:srgbClr val="1D1B43"/>
-                          </a:solidFill>
-                          <a:latin typeface="Calibri"/>
-                        </a:rPr>
-                        <a:t>281609</a:t>
-                      </a:r>
-                    </a:p>
-                  </a:txBody>
-                  <a:tcPr>
-                    <a:solidFill>
-                      <a:srgbClr val="F2F2F2"/>
-                    </a:solidFill>
-                  </a:tcPr>
-                </a:tc>
-                <a:tc>
-                  <a:txBody>
-                    <a:bodyPr/>
-                    <a:lstStyle/>
-                    <a:p>
-                      <a:pPr algn="l"/>
-                      <a:r>
-                        <a:rPr sz="1000" b="0">
-                          <a:solidFill>
-                            <a:srgbClr val="1D1B43"/>
-                          </a:solidFill>
-                          <a:latin typeface="Calibri"/>
-                        </a:rPr>
-                        <a:t>BSG BIJOU BRASIL COM - SAO PAULO / SP</a:t>
-                      </a:r>
-                    </a:p>
-                  </a:txBody>
-                  <a:tcPr>
-                    <a:solidFill>
-                      <a:srgbClr val="F2F2F2"/>
-                    </a:solidFill>
-                  </a:tcPr>
-                </a:tc>
-                <a:tc>
-                  <a:txBody>
-                    <a:bodyPr/>
-                    <a:lstStyle/>
-                    <a:p>
-                      <a:pPr algn="l"/>
-                      <a:r>
-                        <a:rPr sz="1000" b="0">
-                          <a:solidFill>
-                            <a:srgbClr val="1D1B43"/>
-                          </a:solidFill>
-                          <a:latin typeface="Calibri"/>
-                        </a:rPr>
-                        <a:t>SAO PAULO/SP</a:t>
-                      </a:r>
-                    </a:p>
-                  </a:txBody>
-                  <a:tcPr>
-                    <a:solidFill>
-                      <a:srgbClr val="F2F2F2"/>
-                    </a:solidFill>
-                  </a:tcPr>
-                </a:tc>
-                <a:tc>
-                  <a:txBody>
-                    <a:bodyPr/>
-                    <a:lstStyle/>
-                    <a:p>
-                      <a:pPr algn="l"/>
-                      <a:r>
-                        <a:rPr sz="1000" b="0">
-                          <a:solidFill>
-                            <a:srgbClr val="1D1B43"/>
-                          </a:solidFill>
-                          <a:latin typeface="Calibri"/>
-                        </a:rPr>
-                        <a:t>06/05/2026</a:t>
-                      </a:r>
-                    </a:p>
-                  </a:txBody>
-                  <a:tcPr>
-                    <a:solidFill>
-                      <a:srgbClr val="F2F2F2"/>
-                    </a:solidFill>
-                  </a:tcPr>
-                </a:tc>
-                <a:tc>
-                  <a:txBody>
-                    <a:bodyPr/>
-                    <a:lstStyle/>
-                    <a:p>
-                      <a:pPr algn="l"/>
-                      <a:r>
-                        <a:rPr sz="1000" b="0">
-                          <a:solidFill>
-                            <a:srgbClr val="1D1B43"/>
-                          </a:solidFill>
-                          <a:latin typeface="Calibri"/>
-                        </a:rPr>
-                        <a:t>ENTREGUE FORA DO PRAZO</a:t>
-                      </a:r>
-                    </a:p>
-                  </a:txBody>
-                  <a:tcPr>
-                    <a:solidFill>
-                      <a:srgbClr val="F2F2F2"/>
-                    </a:solidFill>
-                  </a:tcPr>
-                </a:tc>
-              </a:tr>
-              <a:tr h="351692">
-                <a:tc>
-                  <a:txBody>
-                    <a:bodyPr/>
-                    <a:lstStyle/>
-                    <a:p>
-                      <a:pPr algn="l"/>
-                      <a:r>
-                        <a:rPr sz="1000" b="0">
-                          <a:solidFill>
-                            <a:srgbClr val="1D1B43"/>
-                          </a:solidFill>
-                          <a:latin typeface="Calibri"/>
-                        </a:rPr>
-                        <a:t>281610</a:t>
-                      </a:r>
-                    </a:p>
-                  </a:txBody>
-                  <a:tcPr>
-                    <a:solidFill>
-                      <a:srgbClr val="FFFFFF"/>
-                    </a:solidFill>
-                  </a:tcPr>
-                </a:tc>
-                <a:tc>
-                  <a:txBody>
-                    <a:bodyPr/>
-                    <a:lstStyle/>
-                    <a:p>
-                      <a:pPr algn="l"/>
-                      <a:r>
-                        <a:rPr sz="1000" b="0">
-                          <a:solidFill>
-                            <a:srgbClr val="1D1B43"/>
-                          </a:solidFill>
-                          <a:latin typeface="Calibri"/>
-                        </a:rPr>
-                        <a:t>BSG BIJOU BRASIL COM - SAO PAULO / SP</a:t>
-                      </a:r>
-                    </a:p>
-                  </a:txBody>
-                  <a:tcPr>
-                    <a:solidFill>
-                      <a:srgbClr val="FFFFFF"/>
-                    </a:solidFill>
-                  </a:tcPr>
-                </a:tc>
-                <a:tc>
-                  <a:txBody>
-                    <a:bodyPr/>
-                    <a:lstStyle/>
-                    <a:p>
-                      <a:pPr algn="l"/>
-                      <a:r>
-                        <a:rPr sz="1000" b="0">
-                          <a:solidFill>
-                            <a:srgbClr val="1D1B43"/>
-                          </a:solidFill>
-                          <a:latin typeface="Calibri"/>
-                        </a:rPr>
-                        <a:t>SAO PAULO/SP</a:t>
-                      </a:r>
-                    </a:p>
-                  </a:txBody>
-                  <a:tcPr>
-                    <a:solidFill>
-                      <a:srgbClr val="FFFFFF"/>
-                    </a:solidFill>
-                  </a:tcPr>
-                </a:tc>
-                <a:tc>
-                  <a:txBody>
-                    <a:bodyPr/>
-                    <a:lstStyle/>
-                    <a:p>
-                      <a:pPr algn="l"/>
-                      <a:r>
-                        <a:rPr sz="1000" b="0">
-                          <a:solidFill>
-                            <a:srgbClr val="1D1B43"/>
-                          </a:solidFill>
-                          <a:latin typeface="Calibri"/>
-                        </a:rPr>
-                        <a:t>06/05/2026</a:t>
-                      </a:r>
-                    </a:p>
-                  </a:txBody>
-                  <a:tcPr>
-                    <a:solidFill>
-                      <a:srgbClr val="FFFFFF"/>
-                    </a:solidFill>
-                  </a:tcPr>
-                </a:tc>
-                <a:tc>
-                  <a:txBody>
-                    <a:bodyPr/>
-                    <a:lstStyle/>
-                    <a:p>
-                      <a:pPr algn="l"/>
-                      <a:r>
-                        <a:rPr sz="1000" b="0">
-                          <a:solidFill>
-                            <a:srgbClr val="1D1B43"/>
-                          </a:solidFill>
-                          <a:latin typeface="Calibri"/>
-                        </a:rPr>
-                        <a:t>ENTREGUE FORA DO PRAZO</a:t>
-                      </a:r>
-                    </a:p>
-                  </a:txBody>
-                  <a:tcPr>
-                    <a:solidFill>
-                      <a:srgbClr val="FFFFFF"/>
-                    </a:solidFill>
-                  </a:tcPr>
-                </a:tc>
-              </a:tr>
-              <a:tr h="351692">
-                <a:tc>
-                  <a:txBody>
-                    <a:bodyPr/>
-                    <a:lstStyle/>
-                    <a:p>
-                      <a:pPr algn="l"/>
-                      <a:r>
-                        <a:rPr sz="1000" b="0">
-                          <a:solidFill>
-                            <a:srgbClr val="1D1B43"/>
-                          </a:solidFill>
-                          <a:latin typeface="Calibri"/>
-                        </a:rPr>
-                        <a:t>281611</a:t>
-                      </a:r>
-                    </a:p>
-                  </a:txBody>
-                  <a:tcPr>
-                    <a:solidFill>
-                      <a:srgbClr val="F2F2F2"/>
-                    </a:solidFill>
-                  </a:tcPr>
-                </a:tc>
-                <a:tc>
-                  <a:txBody>
-                    <a:bodyPr/>
-                    <a:lstStyle/>
-                    <a:p>
-                      <a:pPr algn="l"/>
-                      <a:r>
-                        <a:rPr sz="1000" b="0">
-                          <a:solidFill>
-                            <a:srgbClr val="1D1B43"/>
-                          </a:solidFill>
-                          <a:latin typeface="Calibri"/>
-                        </a:rPr>
-                        <a:t>BSG BIJOU BRASIL COM - SAO PAULO / SP</a:t>
-                      </a:r>
-                    </a:p>
-                  </a:txBody>
-                  <a:tcPr>
-                    <a:solidFill>
-                      <a:srgbClr val="F2F2F2"/>
-                    </a:solidFill>
-                  </a:tcPr>
-                </a:tc>
-                <a:tc>
-                  <a:txBody>
-                    <a:bodyPr/>
-                    <a:lstStyle/>
-                    <a:p>
-                      <a:pPr algn="l"/>
-                      <a:r>
-                        <a:rPr sz="1000" b="0">
-                          <a:solidFill>
-                            <a:srgbClr val="1D1B43"/>
-                          </a:solidFill>
-                          <a:latin typeface="Calibri"/>
-                        </a:rPr>
-                        <a:t>SAO PAULO/SP</a:t>
-                      </a:r>
-                    </a:p>
-                  </a:txBody>
-                  <a:tcPr>
-                    <a:solidFill>
-                      <a:srgbClr val="F2F2F2"/>
-                    </a:solidFill>
-                  </a:tcPr>
-                </a:tc>
-                <a:tc>
-                  <a:txBody>
-                    <a:bodyPr/>
-                    <a:lstStyle/>
-                    <a:p>
-                      <a:pPr algn="l"/>
-                      <a:r>
-                        <a:rPr sz="1000" b="0">
-                          <a:solidFill>
-                            <a:srgbClr val="1D1B43"/>
-                          </a:solidFill>
-                          <a:latin typeface="Calibri"/>
-                        </a:rPr>
-                        <a:t>06/05/2026</a:t>
-                      </a:r>
-                    </a:p>
-                  </a:txBody>
-                  <a:tcPr>
-                    <a:solidFill>
-                      <a:srgbClr val="F2F2F2"/>
-                    </a:solidFill>
-                  </a:tcPr>
-                </a:tc>
-                <a:tc>
-                  <a:txBody>
-                    <a:bodyPr/>
-                    <a:lstStyle/>
-                    <a:p>
-                      <a:pPr algn="l"/>
-                      <a:r>
-                        <a:rPr sz="1000" b="0">
-                          <a:solidFill>
-                            <a:srgbClr val="1D1B43"/>
-                          </a:solidFill>
-                          <a:latin typeface="Calibri"/>
-                        </a:rPr>
-                        <a:t>ENTREGUE FORA DO PRAZO</a:t>
-                      </a:r>
-                    </a:p>
-                  </a:txBody>
-                  <a:tcPr>
-                    <a:solidFill>
-                      <a:srgbClr val="F2F2F2"/>
-                    </a:solidFill>
-                  </a:tcPr>
-                </a:tc>
-              </a:tr>
-              <a:tr h="351692">
-                <a:tc>
-                  <a:txBody>
-                    <a:bodyPr/>
-                    <a:lstStyle/>
-                    <a:p>
-                      <a:pPr algn="l"/>
-                      <a:r>
-                        <a:rPr sz="1000" b="0">
-                          <a:solidFill>
-                            <a:srgbClr val="1D1B43"/>
-                          </a:solidFill>
-                          <a:latin typeface="Calibri"/>
-                        </a:rPr>
-                        <a:t>282392</a:t>
-                      </a:r>
-                    </a:p>
-                  </a:txBody>
-                  <a:tcPr>
-                    <a:solidFill>
-                      <a:srgbClr val="FFFFFF"/>
-                    </a:solidFill>
-                  </a:tcPr>
-                </a:tc>
-                <a:tc>
-                  <a:txBody>
-                    <a:bodyPr/>
-                    <a:lstStyle/>
-                    <a:p>
-                      <a:pPr algn="l"/>
-                      <a:r>
-                        <a:rPr sz="1000" b="0">
-                          <a:solidFill>
-                            <a:srgbClr val="1D1B43"/>
-                          </a:solidFill>
-                          <a:latin typeface="Calibri"/>
-                        </a:rPr>
-                        <a:t>LAROCCA MODA E ACESS - SAO PAULO / SP</a:t>
-                      </a:r>
-                    </a:p>
-                  </a:txBody>
-                  <a:tcPr>
-                    <a:solidFill>
-                      <a:srgbClr val="FFFFFF"/>
-                    </a:solidFill>
-                  </a:tcPr>
-                </a:tc>
-                <a:tc>
-                  <a:txBody>
-                    <a:bodyPr/>
-                    <a:lstStyle/>
-                    <a:p>
-                      <a:pPr algn="l"/>
-                      <a:r>
-                        <a:rPr sz="1000" b="0">
-                          <a:solidFill>
-                            <a:srgbClr val="1D1B43"/>
-                          </a:solidFill>
-                          <a:latin typeface="Calibri"/>
-                        </a:rPr>
-                        <a:t>SAO PAULO/SP</a:t>
-                      </a:r>
-                    </a:p>
-                  </a:txBody>
-                  <a:tcPr>
-                    <a:solidFill>
-                      <a:srgbClr val="FFFFFF"/>
-                    </a:solidFill>
-                  </a:tcPr>
-                </a:tc>
-                <a:tc>
-                  <a:txBody>
-                    <a:bodyPr/>
-                    <a:lstStyle/>
-                    <a:p>
-                      <a:pPr algn="l"/>
-                      <a:r>
-                        <a:rPr sz="1000" b="0">
-                          <a:solidFill>
-                            <a:srgbClr val="1D1B43"/>
-                          </a:solidFill>
-                          <a:latin typeface="Calibri"/>
-                        </a:rPr>
-                        <a:t>09/05/2026</a:t>
-                      </a:r>
-                    </a:p>
-                  </a:txBody>
-                  <a:tcPr>
-                    <a:solidFill>
-                      <a:srgbClr val="FFFFFF"/>
-                    </a:solidFill>
-                  </a:tcPr>
-                </a:tc>
-                <a:tc>
-                  <a:txBody>
-                    <a:bodyPr/>
-                    <a:lstStyle/>
-                    <a:p>
-                      <a:pPr algn="l"/>
-                      <a:r>
-                        <a:rPr sz="1000" b="0">
-                          <a:solidFill>
-                            <a:srgbClr val="1D1B43"/>
-                          </a:solidFill>
-                          <a:latin typeface="Calibri"/>
-                        </a:rPr>
-                        <a:t>ENTREGUE FORA DO PRAZO</a:t>
-                      </a:r>
-                    </a:p>
-                  </a:txBody>
-                  <a:tcPr>
-                    <a:solidFill>
-                      <a:srgbClr val="FFFFFF"/>
-                    </a:solidFill>
-                  </a:tcPr>
-                </a:tc>
-              </a:tr>
-              <a:tr h="351692">
-                <a:tc>
-                  <a:txBody>
-                    <a:bodyPr/>
-                    <a:lstStyle/>
-                    <a:p>
-                      <a:pPr algn="l"/>
-                      <a:r>
-                        <a:rPr sz="1000" b="0">
-                          <a:solidFill>
-                            <a:srgbClr val="1D1B43"/>
-                          </a:solidFill>
-                          <a:latin typeface="Calibri"/>
-                        </a:rPr>
-                        <a:t>283102</a:t>
-                      </a:r>
-                    </a:p>
-                  </a:txBody>
-                  <a:tcPr>
-                    <a:solidFill>
-                      <a:srgbClr val="F2F2F2"/>
-                    </a:solidFill>
-                  </a:tcPr>
-                </a:tc>
-                <a:tc>
-                  <a:txBody>
-                    <a:bodyPr/>
-                    <a:lstStyle/>
-                    <a:p>
-                      <a:pPr algn="l"/>
-                      <a:r>
-                        <a:rPr sz="1000" b="0">
-                          <a:solidFill>
-                            <a:srgbClr val="1D1B43"/>
-                          </a:solidFill>
-                          <a:latin typeface="Calibri"/>
-                        </a:rPr>
-                        <a:t>BSG BIJOU BRASIL COM - SAO PAULO / SP</a:t>
-                      </a:r>
-                    </a:p>
-                  </a:txBody>
-                  <a:tcPr>
-                    <a:solidFill>
-                      <a:srgbClr val="F2F2F2"/>
-                    </a:solidFill>
-                  </a:tcPr>
-                </a:tc>
-                <a:tc>
-                  <a:txBody>
-                    <a:bodyPr/>
-                    <a:lstStyle/>
-                    <a:p>
-                      <a:pPr algn="l"/>
-                      <a:r>
-                        <a:rPr sz="1000" b="0">
-                          <a:solidFill>
-                            <a:srgbClr val="1D1B43"/>
-                          </a:solidFill>
-                          <a:latin typeface="Calibri"/>
-                        </a:rPr>
-                        <a:t>SAO PAULO/SP</a:t>
-                      </a:r>
-                    </a:p>
-                  </a:txBody>
-                  <a:tcPr>
-                    <a:solidFill>
-                      <a:srgbClr val="F2F2F2"/>
-                    </a:solidFill>
-                  </a:tcPr>
-                </a:tc>
-                <a:tc>
-                  <a:txBody>
-                    <a:bodyPr/>
-                    <a:lstStyle/>
-                    <a:p>
-                      <a:pPr algn="l"/>
-                      <a:r>
-                        <a:rPr sz="1000" b="0">
-                          <a:solidFill>
-                            <a:srgbClr val="1D1B43"/>
-                          </a:solidFill>
-                          <a:latin typeface="Calibri"/>
-                        </a:rPr>
-                        <a:t>15/05/2026</a:t>
-                      </a:r>
-                    </a:p>
-                  </a:txBody>
-                  <a:tcPr>
-                    <a:solidFill>
-                      <a:srgbClr val="F2F2F2"/>
-                    </a:solidFill>
-                  </a:tcPr>
-                </a:tc>
-                <a:tc>
-                  <a:txBody>
-                    <a:bodyPr/>
-                    <a:lstStyle/>
-                    <a:p>
-                      <a:pPr algn="l"/>
-                      <a:r>
-                        <a:rPr sz="1000" b="0">
-                          <a:solidFill>
-                            <a:srgbClr val="1D1B43"/>
-                          </a:solidFill>
-                          <a:latin typeface="Calibri"/>
-                        </a:rPr>
-                        <a:t>ENTREGUE FORA DO PRAZO</a:t>
-                      </a:r>
-                    </a:p>
-                  </a:txBody>
-                  <a:tcPr>
-                    <a:solidFill>
-                      <a:srgbClr val="F2F2F2"/>
                     </a:solidFill>
                   </a:tcPr>
                 </a:tc>
@@ -7012,7 +5829,7 @@
         </p:nvGraphicFramePr>
         <p:xfrm>
           <a:off x="731520" y="1920240"/>
-          <a:ext cx="10698480" cy="1371600"/>
+          <a:ext cx="10698480" cy="1828800"/>
         </p:xfrm>
         <a:graphic>
           <a:graphicData uri="http://schemas.openxmlformats.org/drawingml/2006/table">
@@ -7205,7 +6022,7 @@
                           </a:solidFill>
                           <a:latin typeface="Calibri"/>
                         </a:rPr>
-                        <a:t>85</a:t>
+                        <a:t>113</a:t>
                       </a:r>
                     </a:p>
                   </a:txBody>
@@ -7228,7 +6045,7 @@
                           </a:solidFill>
                           <a:latin typeface="Calibri"/>
                         </a:rPr>
-                        <a:t>73</a:t>
+                        <a:t>111</a:t>
                       </a:r>
                     </a:p>
                   </a:txBody>
@@ -7251,7 +6068,7 @@
                           </a:solidFill>
                           <a:latin typeface="Calibri"/>
                         </a:rPr>
-                        <a:t>12</a:t>
+                        <a:t>2</a:t>
                       </a:r>
                     </a:p>
                   </a:txBody>
@@ -7274,7 +6091,7 @@
                           </a:solidFill>
                           <a:latin typeface="Calibri"/>
                         </a:rPr>
-                        <a:t>85.9%</a:t>
+                        <a:t>98.2%</a:t>
                       </a:r>
                     </a:p>
                   </a:txBody>
@@ -7297,7 +6114,7 @@
                           </a:solidFill>
                           <a:latin typeface="Calibri"/>
                         </a:rPr>
-                        <a:t>Regular</a:t>
+                        <a:t>Excelente</a:t>
                       </a:r>
                     </a:p>
                   </a:txBody>
@@ -7322,7 +6139,7 @@
                           </a:solidFill>
                           <a:latin typeface="Calibri"/>
                         </a:rPr>
-                        <a:t>PR</a:t>
+                        <a:t>SC</a:t>
                       </a:r>
                     </a:p>
                   </a:txBody>
@@ -7345,6 +6162,52 @@
                           </a:solidFill>
                           <a:latin typeface="Calibri"/>
                         </a:rPr>
+                        <a:t>4</a:t>
+                      </a:r>
+                    </a:p>
+                  </a:txBody>
+                  <a:tcPr>
+                    <a:solidFill>
+                      <a:srgbClr val="F2F2F2"/>
+                    </a:solidFill>
+                  </a:tcPr>
+                </a:tc>
+                <a:tc>
+                  <a:txBody>
+                    <a:bodyPr/>
+                    <a:lstStyle/>
+                    <a:p>
+                      <a:pPr algn="l"/>
+                      <a:r>
+                        <a:rPr sz="1000" b="0">
+                          <a:solidFill>
+                            <a:srgbClr val="1D1B43"/>
+                          </a:solidFill>
+                          <a:latin typeface="Calibri"/>
+                        </a:rPr>
+                        <a:t>3</a:t>
+                      </a:r>
+                    </a:p>
+                  </a:txBody>
+                  <a:tcPr>
+                    <a:solidFill>
+                      <a:srgbClr val="F2F2F2"/>
+                    </a:solidFill>
+                  </a:tcPr>
+                </a:tc>
+                <a:tc>
+                  <a:txBody>
+                    <a:bodyPr/>
+                    <a:lstStyle/>
+                    <a:p>
+                      <a:pPr algn="l"/>
+                      <a:r>
+                        <a:rPr sz="1000" b="0">
+                          <a:solidFill>
+                            <a:srgbClr val="1D1B43"/>
+                          </a:solidFill>
+                          <a:latin typeface="Calibri"/>
+                        </a:rPr>
                         <a:t>1</a:t>
                       </a:r>
                     </a:p>
@@ -7368,7 +6231,7 @@
                           </a:solidFill>
                           <a:latin typeface="Calibri"/>
                         </a:rPr>
-                        <a:t>1</a:t>
+                        <a:t>75.0%</a:t>
                       </a:r>
                     </a:p>
                   </a:txBody>
@@ -7391,13 +6254,107 @@
                           </a:solidFill>
                           <a:latin typeface="Calibri"/>
                         </a:rPr>
+                        <a:t>Atencao</a:t>
+                      </a:r>
+                    </a:p>
+                  </a:txBody>
+                  <a:tcPr>
+                    <a:solidFill>
+                      <a:srgbClr val="F2F2F2"/>
+                    </a:solidFill>
+                  </a:tcPr>
+                </a:tc>
+              </a:tr>
+              <a:tr h="457200">
+                <a:tc>
+                  <a:txBody>
+                    <a:bodyPr/>
+                    <a:lstStyle/>
+                    <a:p>
+                      <a:pPr algn="l"/>
+                      <a:r>
+                        <a:rPr sz="1000" b="0">
+                          <a:solidFill>
+                            <a:srgbClr val="1D1B43"/>
+                          </a:solidFill>
+                          <a:latin typeface="Calibri"/>
+                        </a:rPr>
+                        <a:t>MG</a:t>
+                      </a:r>
+                    </a:p>
+                  </a:txBody>
+                  <a:tcPr>
+                    <a:solidFill>
+                      <a:srgbClr val="FFFFFF"/>
+                    </a:solidFill>
+                  </a:tcPr>
+                </a:tc>
+                <a:tc>
+                  <a:txBody>
+                    <a:bodyPr/>
+                    <a:lstStyle/>
+                    <a:p>
+                      <a:pPr algn="l"/>
+                      <a:r>
+                        <a:rPr sz="1000" b="0">
+                          <a:solidFill>
+                            <a:srgbClr val="1D1B43"/>
+                          </a:solidFill>
+                          <a:latin typeface="Calibri"/>
+                        </a:rPr>
+                        <a:t>3</a:t>
+                      </a:r>
+                    </a:p>
+                  </a:txBody>
+                  <a:tcPr>
+                    <a:solidFill>
+                      <a:srgbClr val="FFFFFF"/>
+                    </a:solidFill>
+                  </a:tcPr>
+                </a:tc>
+                <a:tc>
+                  <a:txBody>
+                    <a:bodyPr/>
+                    <a:lstStyle/>
+                    <a:p>
+                      <a:pPr algn="l"/>
+                      <a:r>
+                        <a:rPr sz="1000" b="0">
+                          <a:solidFill>
+                            <a:srgbClr val="1D1B43"/>
+                          </a:solidFill>
+                          <a:latin typeface="Calibri"/>
+                        </a:rPr>
+                        <a:t>3</a:t>
+                      </a:r>
+                    </a:p>
+                  </a:txBody>
+                  <a:tcPr>
+                    <a:solidFill>
+                      <a:srgbClr val="FFFFFF"/>
+                    </a:solidFill>
+                  </a:tcPr>
+                </a:tc>
+                <a:tc>
+                  <a:txBody>
+                    <a:bodyPr/>
+                    <a:lstStyle/>
+                    <a:p>
+                      <a:pPr algn="l"/>
+                      <a:r>
+                        <a:rPr sz="1000" b="0">
+                          <a:solidFill>
+                            <a:srgbClr val="1D1B43"/>
+                          </a:solidFill>
+                          <a:latin typeface="Calibri"/>
+                        </a:rPr>
                         <a:t>0</a:t>
                       </a:r>
                     </a:p>
                   </a:txBody>
                   <a:tcPr>
                     <a:solidFill>
-                      <a:srgbClr val="F2F2F2"/>
+                      <a:srgbClr val="FFFFFF"/>
                     </a:solidFill>
                   </a:tcPr>
                 </a:tc>
@@ -7420,7 +6377,7 @@
                   </a:txBody>
                   <a:tcPr>
                     <a:solidFill>
-                      <a:srgbClr val="F2F2F2"/>
+                      <a:srgbClr val="FFFFFF"/>
                     </a:solidFill>
                   </a:tcPr>
                 </a:tc>
@@ -7443,7 +6400,7 @@
                   </a:txBody>
                   <a:tcPr>
                     <a:solidFill>
-                      <a:srgbClr val="F2F2F2"/>
+                      <a:srgbClr val="FFFFFF"/>
                     </a:solidFill>
                   </a:tcPr>
                 </a:tc>
@@ -7532,7 +6489,7 @@
                 </a:solidFill>
                 <a:latin typeface="Calibri"/>
               </a:rPr>
-              <a:t>TOP DESTINATARIOS (15 pontos)</a:t>
+              <a:t>TOP DESTINATARIOS (17 pontos)</a:t>
             </a:r>
           </a:p>
         </p:txBody>
@@ -7830,7 +6787,7 @@
                           </a:solidFill>
                           <a:latin typeface="Calibri"/>
                         </a:rPr>
-                        <a:t>45</a:t>
+                        <a:t>63</a:t>
                       </a:r>
                     </a:p>
                   </a:txBody>
@@ -7853,7 +6810,7 @@
                           </a:solidFill>
                           <a:latin typeface="Calibri"/>
                         </a:rPr>
-                        <a:t>34</a:t>
+                        <a:t>61</a:t>
                       </a:r>
                     </a:p>
                   </a:txBody>
@@ -7876,7 +6833,7 @@
                           </a:solidFill>
                           <a:latin typeface="Calibri"/>
                         </a:rPr>
-                        <a:t>11</a:t>
+                        <a:t>2</a:t>
                       </a:r>
                     </a:p>
                   </a:txBody>
@@ -7899,7 +6856,7 @@
                           </a:solidFill>
                           <a:latin typeface="Calibri"/>
                         </a:rPr>
-                        <a:t>75.6%</a:t>
+                        <a:t>96.8%</a:t>
                       </a:r>
                     </a:p>
                   </a:txBody>
@@ -7922,7 +6879,7 @@
                           </a:solidFill>
                           <a:latin typeface="Calibri"/>
                         </a:rPr>
-                        <a:t>Atencao</a:t>
+                        <a:t>Excelente</a:t>
                       </a:r>
                     </a:p>
                   </a:txBody>
@@ -7993,7 +6950,7 @@
                           </a:solidFill>
                           <a:latin typeface="Calibri"/>
                         </a:rPr>
-                        <a:t>7</a:t>
+                        <a:t>11</a:t>
                       </a:r>
                     </a:p>
                   </a:txBody>
@@ -8016,7 +6973,7 @@
                           </a:solidFill>
                           <a:latin typeface="Calibri"/>
                         </a:rPr>
-                        <a:t>7</a:t>
+                        <a:t>11</a:t>
                       </a:r>
                     </a:p>
                   </a:txBody>
@@ -8133,7 +7090,7 @@
                           </a:solidFill>
                           <a:latin typeface="Calibri"/>
                         </a:rPr>
-                        <a:t>BL TIJU ACESSORIOS L - SAO PAULO / SP</a:t>
+                        <a:t>BL ANALIA BIJUTERIAS - SAO PAULO / SP</a:t>
                       </a:r>
                     </a:p>
                   </a:txBody>
@@ -8156,7 +7113,7 @@
                           </a:solidFill>
                           <a:latin typeface="Calibri"/>
                         </a:rPr>
-                        <a:t>3</a:t>
+                        <a:t>4</a:t>
                       </a:r>
                     </a:p>
                   </a:txBody>
@@ -8179,7 +7136,7 @@
                           </a:solidFill>
                           <a:latin typeface="Calibri"/>
                         </a:rPr>
-                        <a:t>3</a:t>
+                        <a:t>4</a:t>
                       </a:r>
                     </a:p>
                   </a:txBody>
@@ -8296,7 +7253,7 @@
                           </a:solidFill>
                           <a:latin typeface="Calibri"/>
                         </a:rPr>
-                        <a:t>BM MODAS E ACESSORIO - CAMPINAS / SP</a:t>
+                        <a:t>BSG BIJOU BRASIL COM - ITAJAI / SC</a:t>
                       </a:r>
                     </a:p>
                   </a:txBody>
@@ -8319,6 +7276,29 @@
                           </a:solidFill>
                           <a:latin typeface="Calibri"/>
                         </a:rPr>
+                        <a:t>4</a:t>
+                      </a:r>
+                    </a:p>
+                  </a:txBody>
+                  <a:tcPr>
+                    <a:solidFill>
+                      <a:srgbClr val="F2F2F2"/>
+                    </a:solidFill>
+                  </a:tcPr>
+                </a:tc>
+                <a:tc>
+                  <a:txBody>
+                    <a:bodyPr/>
+                    <a:lstStyle/>
+                    <a:p>
+                      <a:pPr algn="l"/>
+                      <a:r>
+                        <a:rPr sz="1000" b="0">
+                          <a:solidFill>
+                            <a:srgbClr val="1D1B43"/>
+                          </a:solidFill>
+                          <a:latin typeface="Calibri"/>
+                        </a:rPr>
                         <a:t>3</a:t>
                       </a:r>
                     </a:p>
@@ -8342,7 +7322,7 @@
                           </a:solidFill>
                           <a:latin typeface="Calibri"/>
                         </a:rPr>
-                        <a:t>3</a:t>
+                        <a:t>1</a:t>
                       </a:r>
                     </a:p>
                   </a:txBody>
@@ -8365,7 +7345,7 @@
                           </a:solidFill>
                           <a:latin typeface="Calibri"/>
                         </a:rPr>
-                        <a:t>0</a:t>
+                        <a:t>75.0%</a:t>
                       </a:r>
                     </a:p>
                   </a:txBody>
@@ -8388,30 +7368,7 @@
                           </a:solidFill>
                           <a:latin typeface="Calibri"/>
                         </a:rPr>
-                        <a:t>100.0%</a:t>
-                      </a:r>
-                    </a:p>
-                  </a:txBody>
-                  <a:tcPr>
-                    <a:solidFill>
-                      <a:srgbClr val="F2F2F2"/>
-                    </a:solidFill>
-                  </a:tcPr>
-                </a:tc>
-                <a:tc>
-                  <a:txBody>
-                    <a:bodyPr/>
-                    <a:lstStyle/>
-                    <a:p>
-                      <a:pPr algn="l"/>
-                      <a:r>
-                        <a:rPr sz="1000" b="0">
-                          <a:solidFill>
-                            <a:srgbClr val="1D1B43"/>
-                          </a:solidFill>
-                          <a:latin typeface="Calibri"/>
-                        </a:rPr>
-                        <a:t>Excelente</a:t>
+                        <a:t>Atencao</a:t>
                       </a:r>
                     </a:p>
                   </a:txBody>
@@ -8459,7 +7416,7 @@
                           </a:solidFill>
                           <a:latin typeface="Calibri"/>
                         </a:rPr>
-                        <a:t>CMC LITTLE STORE LTD - SAO PAULO / SP</a:t>
+                        <a:t>BM MODAS E ACESSORIO - CAMPINAS / SP</a:t>
                       </a:r>
                     </a:p>
                   </a:txBody>
@@ -8482,7 +7439,7 @@
                           </a:solidFill>
                           <a:latin typeface="Calibri"/>
                         </a:rPr>
-                        <a:t>3</a:t>
+                        <a:t>4</a:t>
                       </a:r>
                     </a:p>
                   </a:txBody>
@@ -8505,7 +7462,7 @@
                           </a:solidFill>
                           <a:latin typeface="Calibri"/>
                         </a:rPr>
-                        <a:t>3</a:t>
+                        <a:t>4</a:t>
                       </a:r>
                     </a:p>
                   </a:txBody>
@@ -8622,7 +7579,7 @@
                           </a:solidFill>
                           <a:latin typeface="Calibri"/>
                         </a:rPr>
-                        <a:t>CMC LUNA ACESSORIOS - SAO CAETANO DO SUL / SP</a:t>
+                        <a:t>RAPIDO XAPURI TRANSP - GUARULHOS / SP</a:t>
                       </a:r>
                     </a:p>
                   </a:txBody>
@@ -8645,7 +7602,7 @@
                           </a:solidFill>
                           <a:latin typeface="Calibri"/>
                         </a:rPr>
-                        <a:t>3</a:t>
+                        <a:t>4</a:t>
                       </a:r>
                     </a:p>
                   </a:txBody>
@@ -8668,7 +7625,7 @@
                           </a:solidFill>
                           <a:latin typeface="Calibri"/>
                         </a:rPr>
-                        <a:t>3</a:t>
+                        <a:t>4</a:t>
                       </a:r>
                     </a:p>
                   </a:txBody>
@@ -8785,7 +7742,7 @@
                           </a:solidFill>
                           <a:latin typeface="Calibri"/>
                         </a:rPr>
-                        <a:t>BL ANALIA BIJUTERIAS - SAO PAULO / SP</a:t>
+                        <a:t>SASAKI MODA E ACESSO - SAO PAULO / SP</a:t>
                       </a:r>
                     </a:p>
                   </a:txBody>
@@ -8808,7 +7765,7 @@
                           </a:solidFill>
                           <a:latin typeface="Calibri"/>
                         </a:rPr>
-                        <a:t>3</a:t>
+                        <a:t>4</a:t>
                       </a:r>
                     </a:p>
                   </a:txBody>
@@ -8831,7 +7788,7 @@
                           </a:solidFill>
                           <a:latin typeface="Calibri"/>
                         </a:rPr>
-                        <a:t>3</a:t>
+                        <a:t>4</a:t>
                       </a:r>
                     </a:p>
                   </a:txBody>
@@ -8948,7 +7905,7 @@
                           </a:solidFill>
                           <a:latin typeface="Calibri"/>
                         </a:rPr>
-                        <a:t>CMGL MORUMBI ACESSOR - SAO PAULO / SP</a:t>
+                        <a:t>MAJO MODAS E ACESSOR - MOGI GUACU / SP</a:t>
                       </a:r>
                     </a:p>
                   </a:txBody>
@@ -8971,7 +7928,7 @@
                           </a:solidFill>
                           <a:latin typeface="Calibri"/>
                         </a:rPr>
-                        <a:t>3</a:t>
+                        <a:t>4</a:t>
                       </a:r>
                     </a:p>
                   </a:txBody>
@@ -8994,7 +7951,7 @@
                           </a:solidFill>
                           <a:latin typeface="Calibri"/>
                         </a:rPr>
-                        <a:t>3</a:t>
+                        <a:t>4</a:t>
                       </a:r>
                     </a:p>
                   </a:txBody>
@@ -9111,7 +8068,7 @@
                           </a:solidFill>
                           <a:latin typeface="Calibri"/>
                         </a:rPr>
-                        <a:t>GIRASSOL ACESSORIOS - SAO PAULO / SP</a:t>
+                        <a:t>LAROCCA MODA E ACESS - SAO PAULO / SP</a:t>
                       </a:r>
                     </a:p>
                   </a:txBody>
@@ -9134,7 +8091,7 @@
                           </a:solidFill>
                           <a:latin typeface="Calibri"/>
                         </a:rPr>
-                        <a:t>3</a:t>
+                        <a:t>4</a:t>
                       </a:r>
                     </a:p>
                   </a:txBody>
@@ -9157,7 +8114,7 @@
                           </a:solidFill>
                           <a:latin typeface="Calibri"/>
                         </a:rPr>
-                        <a:t>3</a:t>
+                        <a:t>4</a:t>
                       </a:r>
                     </a:p>
                   </a:txBody>
@@ -9274,7 +8231,7 @@
                           </a:solidFill>
                           <a:latin typeface="Calibri"/>
                         </a:rPr>
-                        <a:t>MAJO MODAS E ACESSOR - MOGI GUACU / SP</a:t>
+                        <a:t>GIRASSOL ACESSORIOS - SAO PAULO / SP</a:t>
                       </a:r>
                     </a:p>
                   </a:txBody>
@@ -9437,7 +8394,7 @@
                           </a:solidFill>
                           <a:latin typeface="Calibri"/>
                         </a:rPr>
-                        <a:t>LAROCCA MODA E ACESS - SAO PAULO / SP</a:t>
+                        <a:t>CMGL MORUMBI ACESSOR - SAO PAULO / SP</a:t>
                       </a:r>
                     </a:p>
                   </a:txBody>
@@ -9483,7 +8440,7 @@
                           </a:solidFill>
                           <a:latin typeface="Calibri"/>
                         </a:rPr>
-                        <a:t>2</a:t>
+                        <a:t>3</a:t>
                       </a:r>
                     </a:p>
                   </a:txBody>
@@ -9506,7 +8463,7 @@
                           </a:solidFill>
                           <a:latin typeface="Calibri"/>
                         </a:rPr>
-                        <a:t>1</a:t>
+                        <a:t>0</a:t>
                       </a:r>
                     </a:p>
                   </a:txBody>
@@ -9529,7 +8486,7 @@
                           </a:solidFill>
                           <a:latin typeface="Calibri"/>
                         </a:rPr>
-                        <a:t>66.7%</a:t>
+                        <a:t>100.0%</a:t>
                       </a:r>
                     </a:p>
                   </a:txBody>
@@ -9552,7 +8509,7 @@
                           </a:solidFill>
                           <a:latin typeface="Calibri"/>
                         </a:rPr>
-                        <a:t>Atencao</a:t>
+                        <a:t>Excelente</a:t>
                       </a:r>
                     </a:p>
                   </a:txBody>
@@ -9600,7 +8557,7 @@
                           </a:solidFill>
                           <a:latin typeface="Calibri"/>
                         </a:rPr>
-                        <a:t>SASAKI MODA E ACESSO - SAO PAULO / SP</a:t>
+                        <a:t>CMC LUNA ACESSORIOS - SAO CAETANO DO SUL / SP</a:t>
                       </a:r>
                     </a:p>
                   </a:txBody>
@@ -9763,7 +8720,7 @@
                           </a:solidFill>
                           <a:latin typeface="Calibri"/>
                         </a:rPr>
-                        <a:t>RAPIDO XAPURI TRANSP - GUARULHOS / SP</a:t>
+                        <a:t>CMC LITTLE STORE LTD - SAO PAULO / SP</a:t>
                       </a:r>
                     </a:p>
                   </a:txBody>
@@ -9786,7 +8743,7 @@
                           </a:solidFill>
                           <a:latin typeface="Calibri"/>
                         </a:rPr>
-                        <a:t>2</a:t>
+                        <a:t>3</a:t>
                       </a:r>
                     </a:p>
                   </a:txBody>
@@ -9809,7 +8766,7 @@
                           </a:solidFill>
                           <a:latin typeface="Calibri"/>
                         </a:rPr>
-                        <a:t>2</a:t>
+                        <a:t>3</a:t>
                       </a:r>
                     </a:p>
                   </a:txBody>
@@ -9926,7 +8883,7 @@
                           </a:solidFill>
                           <a:latin typeface="Calibri"/>
                         </a:rPr>
-                        <a:t>NATHALIE PEDROZA ALV - SANTANA DE PARNAIBA / SP</a:t>
+                        <a:t>TM MODA E ACESSORIOS - BELO HORIZONTE / MG</a:t>
                       </a:r>
                     </a:p>
                   </a:txBody>
@@ -9949,7 +8906,7 @@
                           </a:solidFill>
                           <a:latin typeface="Calibri"/>
                         </a:rPr>
-                        <a:t>1</a:t>
+                        <a:t>3</a:t>
                       </a:r>
                     </a:p>
                   </a:txBody>
@@ -9972,7 +8929,7 @@
                           </a:solidFill>
                           <a:latin typeface="Calibri"/>
                         </a:rPr>
-                        <a:t>1</a:t>
+                        <a:t>3</a:t>
                       </a:r>
                     </a:p>
                   </a:txBody>

--- a/BSG_BIJOU_BRASIL_COMERCIO_VARE.pptx
+++ b/BSG_BIJOU_BRASIL_COMERCIO_VARE.pptx
@@ -143,10 +143,13 @@
           </c:spPr>
           <c:cat>
             <c:strRef>
-              <c:f>Sheet1!$A$2:$A$2</c:f>
+              <c:f>Sheet1!$A$2:$A$3</c:f>
               <c:strCache>
-                <c:ptCount val="1"/>
+                <c:ptCount val="2"/>
                 <c:pt idx="0">
+                  <c:v>Maio 2026</c:v>
+                </c:pt>
+                <c:pt idx="1">
                   <c:v>Abril 2026</c:v>
                 </c:pt>
               </c:strCache>
@@ -154,11 +157,14 @@
           </c:cat>
           <c:val>
             <c:numRef>
-              <c:f>Sheet1!$B$2:$B$2</c:f>
+              <c:f>Sheet1!$B$2:$B$3</c:f>
               <c:numCache>
                 <c:formatCode>General</c:formatCode>
-                <c:ptCount val="1"/>
+                <c:ptCount val="2"/>
                 <c:pt idx="0">
+                  <c:v>77</c:v>
+                </c:pt>
+                <c:pt idx="1">
                   <c:v>117</c:v>
                 </c:pt>
               </c:numCache>
@@ -186,10 +192,13 @@
           </c:spPr>
           <c:cat>
             <c:strRef>
-              <c:f>Sheet1!$A$2:$A$2</c:f>
+              <c:f>Sheet1!$A$2:$A$3</c:f>
               <c:strCache>
-                <c:ptCount val="1"/>
+                <c:ptCount val="2"/>
                 <c:pt idx="0">
+                  <c:v>Maio 2026</c:v>
+                </c:pt>
+                <c:pt idx="1">
                   <c:v>Abril 2026</c:v>
                 </c:pt>
               </c:strCache>
@@ -197,11 +206,14 @@
           </c:cat>
           <c:val>
             <c:numRef>
-              <c:f>Sheet1!$C$2:$C$2</c:f>
+              <c:f>Sheet1!$C$2:$C$3</c:f>
               <c:numCache>
                 <c:formatCode>General</c:formatCode>
-                <c:ptCount val="1"/>
+                <c:ptCount val="2"/>
                 <c:pt idx="0">
+                  <c:v>13</c:v>
+                </c:pt>
+                <c:pt idx="1">
                   <c:v>3</c:v>
                 </c:pt>
               </c:numCache>
@@ -4142,7 +4154,7 @@
                           </a:solidFill>
                           <a:latin typeface="Calibri"/>
                         </a:rPr>
-                        <a:t>Marco 2026</a:t>
+                        <a:t>Maio 2026</a:t>
                       </a:r>
                     </a:p>
                   </a:txBody>
@@ -4236,7 +4248,7 @@
                           </a:solidFill>
                           <a:latin typeface="Calibri"/>
                         </a:rPr>
-                        <a:t>-</a:t>
+                        <a:t>90</a:t>
                       </a:r>
                     </a:p>
                   </a:txBody>
@@ -4282,7 +4294,7 @@
                           </a:solidFill>
                           <a:latin typeface="Calibri"/>
                         </a:rPr>
-                        <a:t>-</a:t>
+                        <a:t>+ 30</a:t>
                       </a:r>
                     </a:p>
                   </a:txBody>
@@ -4330,7 +4342,7 @@
                           </a:solidFill>
                           <a:latin typeface="Calibri"/>
                         </a:rPr>
-                        <a:t>-</a:t>
+                        <a:t>77</a:t>
                       </a:r>
                     </a:p>
                   </a:txBody>
@@ -4376,7 +4388,7 @@
                           </a:solidFill>
                           <a:latin typeface="Calibri"/>
                         </a:rPr>
-                        <a:t>-</a:t>
+                        <a:t>+ 40</a:t>
                       </a:r>
                     </a:p>
                   </a:txBody>
@@ -4424,7 +4436,7 @@
                           </a:solidFill>
                           <a:latin typeface="Calibri"/>
                         </a:rPr>
-                        <a:t>-</a:t>
+                        <a:t>13</a:t>
                       </a:r>
                     </a:p>
                   </a:txBody>
@@ -4470,7 +4482,7 @@
                           </a:solidFill>
                           <a:latin typeface="Calibri"/>
                         </a:rPr>
-                        <a:t>-</a:t>
+                        <a:t>- 10</a:t>
                       </a:r>
                     </a:p>
                   </a:txBody>
@@ -4518,7 +4530,7 @@
                           </a:solidFill>
                           <a:latin typeface="Calibri"/>
                         </a:rPr>
-                        <a:t>-</a:t>
+                        <a:t>85.6%</a:t>
                       </a:r>
                     </a:p>
                   </a:txBody>
@@ -4564,7 +4576,7 @@
                           </a:solidFill>
                           <a:latin typeface="Calibri"/>
                         </a:rPr>
-                        <a:t>-</a:t>
+                        <a:t>+ 11.9pp</a:t>
                       </a:r>
                     </a:p>
                   </a:txBody>
@@ -4735,7 +4747,7 @@
         </p:nvGraphicFramePr>
         <p:xfrm>
           <a:off x="7955279" y="2286000"/>
-          <a:ext cx="4480560" cy="877824"/>
+          <a:ext cx="4480560" cy="1316736"/>
         </p:xfrm>
         <a:graphic>
           <a:graphicData uri="http://schemas.openxmlformats.org/drawingml/2006/table">
@@ -4881,13 +4893,130 @@
                           </a:solidFill>
                           <a:latin typeface="Calibri"/>
                         </a:rPr>
+                        <a:t>Maio 2026</a:t>
+                      </a:r>
+                    </a:p>
+                  </a:txBody>
+                  <a:tcPr>
+                    <a:solidFill>
+                      <a:srgbClr val="FFFFFF"/>
+                    </a:solidFill>
+                  </a:tcPr>
+                </a:tc>
+                <a:tc>
+                  <a:txBody>
+                    <a:bodyPr/>
+                    <a:lstStyle/>
+                    <a:p>
+                      <a:pPr algn="l"/>
+                      <a:r>
+                        <a:rPr sz="1000" b="0">
+                          <a:solidFill>
+                            <a:srgbClr val="1D1B43"/>
+                          </a:solidFill>
+                          <a:latin typeface="Calibri"/>
+                        </a:rPr>
+                        <a:t>90</a:t>
+                      </a:r>
+                    </a:p>
+                  </a:txBody>
+                  <a:tcPr>
+                    <a:solidFill>
+                      <a:srgbClr val="FFFFFF"/>
+                    </a:solidFill>
+                  </a:tcPr>
+                </a:tc>
+                <a:tc>
+                  <a:txBody>
+                    <a:bodyPr/>
+                    <a:lstStyle/>
+                    <a:p>
+                      <a:pPr algn="l"/>
+                      <a:r>
+                        <a:rPr sz="1000" b="0">
+                          <a:solidFill>
+                            <a:srgbClr val="1D1B43"/>
+                          </a:solidFill>
+                          <a:latin typeface="Calibri"/>
+                        </a:rPr>
+                        <a:t>77</a:t>
+                      </a:r>
+                    </a:p>
+                  </a:txBody>
+                  <a:tcPr>
+                    <a:solidFill>
+                      <a:srgbClr val="FFFFFF"/>
+                    </a:solidFill>
+                  </a:tcPr>
+                </a:tc>
+                <a:tc>
+                  <a:txBody>
+                    <a:bodyPr/>
+                    <a:lstStyle/>
+                    <a:p>
+                      <a:pPr algn="l"/>
+                      <a:r>
+                        <a:rPr sz="1000" b="0">
+                          <a:solidFill>
+                            <a:srgbClr val="1D1B43"/>
+                          </a:solidFill>
+                          <a:latin typeface="Calibri"/>
+                        </a:rPr>
+                        <a:t>13</a:t>
+                      </a:r>
+                    </a:p>
+                  </a:txBody>
+                  <a:tcPr>
+                    <a:solidFill>
+                      <a:srgbClr val="FFFFFF"/>
+                    </a:solidFill>
+                  </a:tcPr>
+                </a:tc>
+                <a:tc>
+                  <a:txBody>
+                    <a:bodyPr/>
+                    <a:lstStyle/>
+                    <a:p>
+                      <a:pPr algn="l"/>
+                      <a:r>
+                        <a:rPr sz="1000" b="0">
+                          <a:solidFill>
+                            <a:srgbClr val="1D1B43"/>
+                          </a:solidFill>
+                          <a:latin typeface="Calibri"/>
+                        </a:rPr>
+                        <a:t>85.6%</a:t>
+                      </a:r>
+                    </a:p>
+                  </a:txBody>
+                  <a:tcPr>
+                    <a:solidFill>
+                      <a:srgbClr val="FFFFFF"/>
+                    </a:solidFill>
+                  </a:tcPr>
+                </a:tc>
+              </a:tr>
+              <a:tr h="438912">
+                <a:tc>
+                  <a:txBody>
+                    <a:bodyPr/>
+                    <a:lstStyle/>
+                    <a:p>
+                      <a:pPr algn="l"/>
+                      <a:r>
+                        <a:rPr sz="1000" b="0">
+                          <a:solidFill>
+                            <a:srgbClr val="1D1B43"/>
+                          </a:solidFill>
+                          <a:latin typeface="Calibri"/>
+                        </a:rPr>
                         <a:t>Abril 2026</a:t>
                       </a:r>
                     </a:p>
                   </a:txBody>
                   <a:tcPr>
                     <a:solidFill>
-                      <a:srgbClr val="FFFFFF"/>
+                      <a:srgbClr val="F2F2F2"/>
                     </a:solidFill>
                   </a:tcPr>
                 </a:tc>
@@ -4910,7 +5039,7 @@
                   </a:txBody>
                   <a:tcPr>
                     <a:solidFill>
-                      <a:srgbClr val="FFFFFF"/>
+                      <a:srgbClr val="F2F2F2"/>
                     </a:solidFill>
                   </a:tcPr>
                 </a:tc>
@@ -4933,7 +5062,7 @@
                   </a:txBody>
                   <a:tcPr>
                     <a:solidFill>
-                      <a:srgbClr val="FFFFFF"/>
+                      <a:srgbClr val="F2F2F2"/>
                     </a:solidFill>
                   </a:tcPr>
                 </a:tc>
@@ -4956,7 +5085,7 @@
                   </a:txBody>
                   <a:tcPr>
                     <a:solidFill>
-                      <a:srgbClr val="FFFFFF"/>
+                      <a:srgbClr val="F2F2F2"/>
                     </a:solidFill>
                   </a:tcPr>
                 </a:tc>
@@ -4979,7 +5108,7 @@
                   </a:txBody>
                   <a:tcPr>
                     <a:solidFill>
-                      <a:srgbClr val="FFFFFF"/>
+                      <a:srgbClr val="F2F2F2"/>
                     </a:solidFill>
                   </a:tcPr>
                 </a:tc>

--- a/BSG_BIJOU_BRASIL_COMERCIO_VARE.pptx
+++ b/BSG_BIJOU_BRASIL_COMERCIO_VARE.pptx
@@ -162,7 +162,7 @@
                 <c:formatCode>General</c:formatCode>
                 <c:ptCount val="2"/>
                 <c:pt idx="0">
-                  <c:v>77</c:v>
+                  <c:v>107</c:v>
                 </c:pt>
                 <c:pt idx="1">
                   <c:v>117</c:v>
@@ -211,7 +211,7 @@
                 <c:formatCode>General</c:formatCode>
                 <c:ptCount val="2"/>
                 <c:pt idx="0">
-                  <c:v>13</c:v>
+                  <c:v>15</c:v>
                 </c:pt>
                 <c:pt idx="1">
                   <c:v>3</c:v>
@@ -4248,7 +4248,7 @@
                           </a:solidFill>
                           <a:latin typeface="Calibri"/>
                         </a:rPr>
-                        <a:t>90</a:t>
+                        <a:t>122</a:t>
                       </a:r>
                     </a:p>
                   </a:txBody>
@@ -4294,7 +4294,7 @@
                           </a:solidFill>
                           <a:latin typeface="Calibri"/>
                         </a:rPr>
-                        <a:t>+ 30</a:t>
+                        <a:t>- 2</a:t>
                       </a:r>
                     </a:p>
                   </a:txBody>
@@ -4342,7 +4342,7 @@
                           </a:solidFill>
                           <a:latin typeface="Calibri"/>
                         </a:rPr>
-                        <a:t>77</a:t>
+                        <a:t>107</a:t>
                       </a:r>
                     </a:p>
                   </a:txBody>
@@ -4388,7 +4388,7 @@
                           </a:solidFill>
                           <a:latin typeface="Calibri"/>
                         </a:rPr>
-                        <a:t>+ 40</a:t>
+                        <a:t>+ 10</a:t>
                       </a:r>
                     </a:p>
                   </a:txBody>
@@ -4436,7 +4436,7 @@
                           </a:solidFill>
                           <a:latin typeface="Calibri"/>
                         </a:rPr>
-                        <a:t>13</a:t>
+                        <a:t>15</a:t>
                       </a:r>
                     </a:p>
                   </a:txBody>
@@ -4482,7 +4482,7 @@
                           </a:solidFill>
                           <a:latin typeface="Calibri"/>
                         </a:rPr>
-                        <a:t>- 10</a:t>
+                        <a:t>- 12</a:t>
                       </a:r>
                     </a:p>
                   </a:txBody>
@@ -4530,7 +4530,7 @@
                           </a:solidFill>
                           <a:latin typeface="Calibri"/>
                         </a:rPr>
-                        <a:t>85.6%</a:t>
+                        <a:t>87.7%</a:t>
                       </a:r>
                     </a:p>
                   </a:txBody>
@@ -4576,7 +4576,7 @@
                           </a:solidFill>
                           <a:latin typeface="Calibri"/>
                         </a:rPr>
-                        <a:t>+ 11.9pp</a:t>
+                        <a:t>+ 9.8pp</a:t>
                       </a:r>
                     </a:p>
                   </a:txBody>
@@ -4916,7 +4916,7 @@
                           </a:solidFill>
                           <a:latin typeface="Calibri"/>
                         </a:rPr>
-                        <a:t>90</a:t>
+                        <a:t>122</a:t>
                       </a:r>
                     </a:p>
                   </a:txBody>
@@ -4939,7 +4939,7 @@
                           </a:solidFill>
                           <a:latin typeface="Calibri"/>
                         </a:rPr>
-                        <a:t>77</a:t>
+                        <a:t>107</a:t>
                       </a:r>
                     </a:p>
                   </a:txBody>
@@ -4962,7 +4962,7 @@
                           </a:solidFill>
                           <a:latin typeface="Calibri"/>
                         </a:rPr>
-                        <a:t>13</a:t>
+                        <a:t>15</a:t>
                       </a:r>
                     </a:p>
                   </a:txBody>
@@ -4985,7 +4985,7 @@
                           </a:solidFill>
                           <a:latin typeface="Calibri"/>
                         </a:rPr>
-                        <a:t>85.6%</a:t>
+                        <a:t>87.7%</a:t>
                       </a:r>
                     </a:p>
                   </a:txBody>

--- a/BSG_BIJOU_BRASIL_COMERCIO_VARE.pptx
+++ b/BSG_BIJOU_BRASIL_COMERCIO_VARE.pptx
@@ -147,10 +147,10 @@
               <c:strCache>
                 <c:ptCount val="2"/>
                 <c:pt idx="0">
-                  <c:v>Maio 2026</c:v>
+                  <c:v>Abril 2026</c:v>
                 </c:pt>
                 <c:pt idx="1">
-                  <c:v>Abril 2026</c:v>
+                  <c:v>Maio 2026</c:v>
                 </c:pt>
               </c:strCache>
             </c:strRef>
@@ -162,10 +162,10 @@
                 <c:formatCode>General</c:formatCode>
                 <c:ptCount val="2"/>
                 <c:pt idx="0">
-                  <c:v>107</c:v>
+                  <c:v>117</c:v>
                 </c:pt>
                 <c:pt idx="1">
-                  <c:v>117</c:v>
+                  <c:v>128</c:v>
                 </c:pt>
               </c:numCache>
             </c:numRef>
@@ -196,10 +196,10 @@
               <c:strCache>
                 <c:ptCount val="2"/>
                 <c:pt idx="0">
-                  <c:v>Maio 2026</c:v>
+                  <c:v>Abril 2026</c:v>
                 </c:pt>
                 <c:pt idx="1">
-                  <c:v>Abril 2026</c:v>
+                  <c:v>Maio 2026</c:v>
                 </c:pt>
               </c:strCache>
             </c:strRef>
@@ -211,10 +211,10 @@
                 <c:formatCode>General</c:formatCode>
                 <c:ptCount val="2"/>
                 <c:pt idx="0">
-                  <c:v>15</c:v>
+                  <c:v>3</c:v>
                 </c:pt>
                 <c:pt idx="1">
-                  <c:v>3</c:v>
+                  <c:v>15</c:v>
                 </c:pt>
               </c:numCache>
             </c:numRef>
@@ -3387,7 +3387,7 @@
                 </a:solidFill>
                 <a:latin typeface="Calibri"/>
               </a:rPr>
-              <a:t>INDICADORES ABRIL 2026</a:t>
+              <a:t>INDICADORES MAIO 2026</a:t>
             </a:r>
           </a:p>
         </p:txBody>
@@ -3708,7 +3708,7 @@
                 </a:solidFill>
                 <a:latin typeface="Calibri"/>
               </a:rPr>
-              <a:t>120</a:t>
+              <a:t>143</a:t>
             </a:r>
           </a:p>
         </p:txBody>
@@ -3823,7 +3823,7 @@
                 </a:solidFill>
                 <a:latin typeface="Calibri"/>
               </a:rPr>
-              <a:t>117</a:t>
+              <a:t>128</a:t>
             </a:r>
           </a:p>
         </p:txBody>
@@ -3938,7 +3938,7 @@
                 </a:solidFill>
                 <a:latin typeface="Calibri"/>
               </a:rPr>
-              <a:t>3</a:t>
+              <a:t>15</a:t>
             </a:r>
           </a:p>
         </p:txBody>
@@ -4049,11 +4049,11 @@
             <a:r>
               <a:rPr sz="2800" b="1">
                 <a:solidFill>
-                  <a:srgbClr val="10B981"/>
+                  <a:srgbClr val="F59E0B"/>
                 </a:solidFill>
                 <a:latin typeface="Calibri"/>
               </a:rPr>
-              <a:t>97.5%</a:t>
+              <a:t>89.5%</a:t>
             </a:r>
           </a:p>
         </p:txBody>
@@ -4154,30 +4154,30 @@
                           </a:solidFill>
                           <a:latin typeface="Calibri"/>
                         </a:rPr>
+                        <a:t>Abril 2026</a:t>
+                      </a:r>
+                    </a:p>
+                  </a:txBody>
+                  <a:tcPr>
+                    <a:solidFill>
+                      <a:srgbClr val="1D1B43"/>
+                    </a:solidFill>
+                  </a:tcPr>
+                </a:tc>
+                <a:tc>
+                  <a:txBody>
+                    <a:bodyPr/>
+                    <a:lstStyle/>
+                    <a:p>
+                      <a:pPr algn="ctr"/>
+                      <a:r>
+                        <a:rPr sz="1100" b="1">
+                          <a:solidFill>
+                            <a:srgbClr val="FFFFFF"/>
+                          </a:solidFill>
+                          <a:latin typeface="Calibri"/>
+                        </a:rPr>
                         <a:t>Maio 2026</a:t>
-                      </a:r>
-                    </a:p>
-                  </a:txBody>
-                  <a:tcPr>
-                    <a:solidFill>
-                      <a:srgbClr val="1D1B43"/>
-                    </a:solidFill>
-                  </a:tcPr>
-                </a:tc>
-                <a:tc>
-                  <a:txBody>
-                    <a:bodyPr/>
-                    <a:lstStyle/>
-                    <a:p>
-                      <a:pPr algn="ctr"/>
-                      <a:r>
-                        <a:rPr sz="1100" b="1">
-                          <a:solidFill>
-                            <a:srgbClr val="FFFFFF"/>
-                          </a:solidFill>
-                          <a:latin typeface="Calibri"/>
-                        </a:rPr>
-                        <a:t>Abril 2026</a:t>
                       </a:r>
                     </a:p>
                   </a:txBody>
@@ -4248,7 +4248,7 @@
                           </a:solidFill>
                           <a:latin typeface="Calibri"/>
                         </a:rPr>
-                        <a:t>122</a:t>
+                        <a:t>120</a:t>
                       </a:r>
                     </a:p>
                   </a:txBody>
@@ -4271,7 +4271,7 @@
                           </a:solidFill>
                           <a:latin typeface="Calibri"/>
                         </a:rPr>
-                        <a:t>120</a:t>
+                        <a:t>143</a:t>
                       </a:r>
                     </a:p>
                   </a:txBody>
@@ -4294,7 +4294,7 @@
                           </a:solidFill>
                           <a:latin typeface="Calibri"/>
                         </a:rPr>
-                        <a:t>- 2</a:t>
+                        <a:t>+ 23</a:t>
                       </a:r>
                     </a:p>
                   </a:txBody>
@@ -4342,7 +4342,7 @@
                           </a:solidFill>
                           <a:latin typeface="Calibri"/>
                         </a:rPr>
-                        <a:t>107</a:t>
+                        <a:t>117</a:t>
                       </a:r>
                     </a:p>
                   </a:txBody>
@@ -4365,7 +4365,7 @@
                           </a:solidFill>
                           <a:latin typeface="Calibri"/>
                         </a:rPr>
-                        <a:t>117</a:t>
+                        <a:t>128</a:t>
                       </a:r>
                     </a:p>
                   </a:txBody>
@@ -4388,7 +4388,7 @@
                           </a:solidFill>
                           <a:latin typeface="Calibri"/>
                         </a:rPr>
-                        <a:t>+ 10</a:t>
+                        <a:t>+ 11</a:t>
                       </a:r>
                     </a:p>
                   </a:txBody>
@@ -4436,6 +4436,29 @@
                           </a:solidFill>
                           <a:latin typeface="Calibri"/>
                         </a:rPr>
+                        <a:t>3</a:t>
+                      </a:r>
+                    </a:p>
+                  </a:txBody>
+                  <a:tcPr>
+                    <a:solidFill>
+                      <a:srgbClr val="FFFFFF"/>
+                    </a:solidFill>
+                  </a:tcPr>
+                </a:tc>
+                <a:tc>
+                  <a:txBody>
+                    <a:bodyPr/>
+                    <a:lstStyle/>
+                    <a:p>
+                      <a:pPr algn="l"/>
+                      <a:r>
+                        <a:rPr sz="1000" b="0">
+                          <a:solidFill>
+                            <a:srgbClr val="1D1B43"/>
+                          </a:solidFill>
+                          <a:latin typeface="Calibri"/>
+                        </a:rPr>
                         <a:t>15</a:t>
                       </a:r>
                     </a:p>
@@ -4459,30 +4482,7 @@
                           </a:solidFill>
                           <a:latin typeface="Calibri"/>
                         </a:rPr>
-                        <a:t>3</a:t>
-                      </a:r>
-                    </a:p>
-                  </a:txBody>
-                  <a:tcPr>
-                    <a:solidFill>
-                      <a:srgbClr val="FFFFFF"/>
-                    </a:solidFill>
-                  </a:tcPr>
-                </a:tc>
-                <a:tc>
-                  <a:txBody>
-                    <a:bodyPr/>
-                    <a:lstStyle/>
-                    <a:p>
-                      <a:pPr algn="l"/>
-                      <a:r>
-                        <a:rPr sz="1000" b="0">
-                          <a:solidFill>
-                            <a:srgbClr val="1D1B43"/>
-                          </a:solidFill>
-                          <a:latin typeface="Calibri"/>
-                        </a:rPr>
-                        <a:t>- 12</a:t>
+                        <a:t>+ 12</a:t>
                       </a:r>
                     </a:p>
                   </a:txBody>
@@ -4530,7 +4530,7 @@
                           </a:solidFill>
                           <a:latin typeface="Calibri"/>
                         </a:rPr>
-                        <a:t>87.7%</a:t>
+                        <a:t>97.5%</a:t>
                       </a:r>
                     </a:p>
                   </a:txBody>
@@ -4553,7 +4553,7 @@
                           </a:solidFill>
                           <a:latin typeface="Calibri"/>
                         </a:rPr>
-                        <a:t>97.5%</a:t>
+                        <a:t>89.5%</a:t>
                       </a:r>
                     </a:p>
                   </a:txBody>
@@ -4576,7 +4576,7 @@
                           </a:solidFill>
                           <a:latin typeface="Calibri"/>
                         </a:rPr>
-                        <a:t>+ 9.8pp</a:t>
+                        <a:t>- 8.0pp</a:t>
                       </a:r>
                     </a:p>
                   </a:txBody>
@@ -4893,7 +4893,7 @@
                           </a:solidFill>
                           <a:latin typeface="Calibri"/>
                         </a:rPr>
-                        <a:t>Maio 2026</a:t>
+                        <a:t>Abril 2026</a:t>
                       </a:r>
                     </a:p>
                   </a:txBody>
@@ -4916,7 +4916,7 @@
                           </a:solidFill>
                           <a:latin typeface="Calibri"/>
                         </a:rPr>
-                        <a:t>122</a:t>
+                        <a:t>120</a:t>
                       </a:r>
                     </a:p>
                   </a:txBody>
@@ -4939,7 +4939,7 @@
                           </a:solidFill>
                           <a:latin typeface="Calibri"/>
                         </a:rPr>
-                        <a:t>107</a:t>
+                        <a:t>117</a:t>
                       </a:r>
                     </a:p>
                   </a:txBody>
@@ -4962,7 +4962,7 @@
                           </a:solidFill>
                           <a:latin typeface="Calibri"/>
                         </a:rPr>
-                        <a:t>15</a:t>
+                        <a:t>3</a:t>
                       </a:r>
                     </a:p>
                   </a:txBody>
@@ -4985,7 +4985,7 @@
                           </a:solidFill>
                           <a:latin typeface="Calibri"/>
                         </a:rPr>
-                        <a:t>87.7%</a:t>
+                        <a:t>97.5%</a:t>
                       </a:r>
                     </a:p>
                   </a:txBody>
@@ -5010,7 +5010,7 @@
                           </a:solidFill>
                           <a:latin typeface="Calibri"/>
                         </a:rPr>
-                        <a:t>Abril 2026</a:t>
+                        <a:t>Maio 2026</a:t>
                       </a:r>
                     </a:p>
                   </a:txBody>
@@ -5033,7 +5033,7 @@
                           </a:solidFill>
                           <a:latin typeface="Calibri"/>
                         </a:rPr>
-                        <a:t>120</a:t>
+                        <a:t>143</a:t>
                       </a:r>
                     </a:p>
                   </a:txBody>
@@ -5056,7 +5056,7 @@
                           </a:solidFill>
                           <a:latin typeface="Calibri"/>
                         </a:rPr>
-                        <a:t>117</a:t>
+                        <a:t>128</a:t>
                       </a:r>
                     </a:p>
                   </a:txBody>
@@ -5079,7 +5079,7 @@
                           </a:solidFill>
                           <a:latin typeface="Calibri"/>
                         </a:rPr>
-                        <a:t>3</a:t>
+                        <a:t>15</a:t>
                       </a:r>
                     </a:p>
                   </a:txBody>
@@ -5102,7 +5102,7 @@
                           </a:solidFill>
                           <a:latin typeface="Calibri"/>
                         </a:rPr>
-                        <a:t>97.5%</a:t>
+                        <a:t>89.5%</a:t>
                       </a:r>
                     </a:p>
                   </a:txBody>
@@ -5190,7 +5190,7 @@
                 </a:solidFill>
                 <a:latin typeface="Calibri"/>
               </a:rPr>
-              <a:t>PERFORMANCE: 97.5% - EXCELENTE</a:t>
+              <a:t>PERFORMANCE: 89.5% - REGULAR</a:t>
             </a:r>
           </a:p>
         </p:txBody>
@@ -5275,7 +5275,7 @@
                 </a:solidFill>
                 <a:latin typeface="Calibri"/>
               </a:rPr>
-              <a:t>OCORRENCIAS FORA DO PRAZO (3)</a:t>
+              <a:t>OCORRENCIAS FORA DO PRAZO (15)</a:t>
             </a:r>
           </a:p>
         </p:txBody>
@@ -5333,7 +5333,7 @@
         </p:nvGraphicFramePr>
         <p:xfrm>
           <a:off x="457200" y="1828800"/>
-          <a:ext cx="11429999" cy="1536192"/>
+          <a:ext cx="11429999" cy="4572000"/>
         </p:xfrm>
         <a:graphic>
           <a:graphicData uri="http://schemas.openxmlformats.org/drawingml/2006/table">
@@ -5348,7 +5348,7 @@
                 <a:gridCol w="1554480"/>
                 <a:gridCol w="2743200"/>
               </a:tblGrid>
-              <a:tr h="384048">
+              <a:tr h="285750">
                 <a:tc>
                   <a:txBody>
                     <a:bodyPr/>
@@ -5465,21 +5465,21 @@
                   </a:tcPr>
                 </a:tc>
               </a:tr>
-              <a:tr h="384048">
-                <a:tc>
-                  <a:txBody>
-                    <a:bodyPr/>
-                    <a:lstStyle/>
-                    <a:p>
-                      <a:pPr algn="l"/>
-                      <a:r>
-                        <a:rPr sz="1000" b="0">
-                          <a:solidFill>
-                            <a:srgbClr val="1D1B43"/>
-                          </a:solidFill>
-                          <a:latin typeface="Calibri"/>
-                        </a:rPr>
-                        <a:t>277610</a:t>
+              <a:tr h="285750">
+                <a:tc>
+                  <a:txBody>
+                    <a:bodyPr/>
+                    <a:lstStyle/>
+                    <a:p>
+                      <a:pPr algn="l"/>
+                      <a:r>
+                        <a:rPr sz="1000" b="0">
+                          <a:solidFill>
+                            <a:srgbClr val="1D1B43"/>
+                          </a:solidFill>
+                          <a:latin typeface="Calibri"/>
+                        </a:rPr>
+                        <a:t>281154</a:t>
                       </a:r>
                     </a:p>
                   </a:txBody>
@@ -5502,7 +5502,7 @@
                           </a:solidFill>
                           <a:latin typeface="Calibri"/>
                         </a:rPr>
-                        <a:t>BSG BIJOU BRASIL COM - ITAJAI / SC</a:t>
+                        <a:t>CMGL MORUMBI ACESSOR - SAO PAULO / SP</a:t>
                       </a:r>
                     </a:p>
                   </a:txBody>
@@ -5525,7 +5525,7 @@
                           </a:solidFill>
                           <a:latin typeface="Calibri"/>
                         </a:rPr>
-                        <a:t>ITAJAI/SC</a:t>
+                        <a:t>SAO PAULO/SP</a:t>
                       </a:r>
                     </a:p>
                   </a:txBody>
@@ -5548,7 +5548,7 @@
                           </a:solidFill>
                           <a:latin typeface="Calibri"/>
                         </a:rPr>
-                        <a:t>01/04/2026</a:t>
+                        <a:t>29/04/2026</a:t>
                       </a:r>
                     </a:p>
                   </a:txBody>
@@ -5582,21 +5582,21 @@
                   </a:tcPr>
                 </a:tc>
               </a:tr>
-              <a:tr h="384048">
-                <a:tc>
-                  <a:txBody>
-                    <a:bodyPr/>
-                    <a:lstStyle/>
-                    <a:p>
-                      <a:pPr algn="l"/>
-                      <a:r>
-                        <a:rPr sz="1000" b="0">
-                          <a:solidFill>
-                            <a:srgbClr val="1D1B43"/>
-                          </a:solidFill>
-                          <a:latin typeface="Calibri"/>
-                        </a:rPr>
-                        <a:t>280127</a:t>
+              <a:tr h="285750">
+                <a:tc>
+                  <a:txBody>
+                    <a:bodyPr/>
+                    <a:lstStyle/>
+                    <a:p>
+                      <a:pPr algn="l"/>
+                      <a:r>
+                        <a:rPr sz="1000" b="0">
+                          <a:solidFill>
+                            <a:srgbClr val="1D1B43"/>
+                          </a:solidFill>
+                          <a:latin typeface="Calibri"/>
+                        </a:rPr>
+                        <a:t>281602</a:t>
                       </a:r>
                     </a:p>
                   </a:txBody>
@@ -5665,7 +5665,7 @@
                           </a:solidFill>
                           <a:latin typeface="Calibri"/>
                         </a:rPr>
-                        <a:t>27/04/2026</a:t>
+                        <a:t>05/05/2026</a:t>
                       </a:r>
                     </a:p>
                   </a:txBody>
@@ -5699,21 +5699,21 @@
                   </a:tcPr>
                 </a:tc>
               </a:tr>
-              <a:tr h="384048">
-                <a:tc>
-                  <a:txBody>
-                    <a:bodyPr/>
-                    <a:lstStyle/>
-                    <a:p>
-                      <a:pPr algn="l"/>
-                      <a:r>
-                        <a:rPr sz="1000" b="0">
-                          <a:solidFill>
-                            <a:srgbClr val="1D1B43"/>
-                          </a:solidFill>
-                          <a:latin typeface="Calibri"/>
-                        </a:rPr>
-                        <a:t>281288</a:t>
+              <a:tr h="285750">
+                <a:tc>
+                  <a:txBody>
+                    <a:bodyPr/>
+                    <a:lstStyle/>
+                    <a:p>
+                      <a:pPr algn="l"/>
+                      <a:r>
+                        <a:rPr sz="1000" b="0">
+                          <a:solidFill>
+                            <a:srgbClr val="1D1B43"/>
+                          </a:solidFill>
+                          <a:latin typeface="Calibri"/>
+                        </a:rPr>
+                        <a:t>281603</a:t>
                       </a:r>
                     </a:p>
                   </a:txBody>
@@ -5782,7 +5782,7 @@
                           </a:solidFill>
                           <a:latin typeface="Calibri"/>
                         </a:rPr>
-                        <a:t>30/04/2026</a:t>
+                        <a:t>05/05/2026</a:t>
                       </a:r>
                     </a:p>
                   </a:txBody>
@@ -5806,6 +5806,1410 @@
                           <a:latin typeface="Calibri"/>
                         </a:rPr>
                         <a:t>ENTREGUE FORA DO PRAZO</a:t>
+                      </a:r>
+                    </a:p>
+                  </a:txBody>
+                  <a:tcPr>
+                    <a:solidFill>
+                      <a:srgbClr val="FFFFFF"/>
+                    </a:solidFill>
+                  </a:tcPr>
+                </a:tc>
+              </a:tr>
+              <a:tr h="285750">
+                <a:tc>
+                  <a:txBody>
+                    <a:bodyPr/>
+                    <a:lstStyle/>
+                    <a:p>
+                      <a:pPr algn="l"/>
+                      <a:r>
+                        <a:rPr sz="1000" b="0">
+                          <a:solidFill>
+                            <a:srgbClr val="1D1B43"/>
+                          </a:solidFill>
+                          <a:latin typeface="Calibri"/>
+                        </a:rPr>
+                        <a:t>281604</a:t>
+                      </a:r>
+                    </a:p>
+                  </a:txBody>
+                  <a:tcPr>
+                    <a:solidFill>
+                      <a:srgbClr val="F2F2F2"/>
+                    </a:solidFill>
+                  </a:tcPr>
+                </a:tc>
+                <a:tc>
+                  <a:txBody>
+                    <a:bodyPr/>
+                    <a:lstStyle/>
+                    <a:p>
+                      <a:pPr algn="l"/>
+                      <a:r>
+                        <a:rPr sz="1000" b="0">
+                          <a:solidFill>
+                            <a:srgbClr val="1D1B43"/>
+                          </a:solidFill>
+                          <a:latin typeface="Calibri"/>
+                        </a:rPr>
+                        <a:t>BSG BIJOU BRASIL COM - SAO PAULO / SP</a:t>
+                      </a:r>
+                    </a:p>
+                  </a:txBody>
+                  <a:tcPr>
+                    <a:solidFill>
+                      <a:srgbClr val="F2F2F2"/>
+                    </a:solidFill>
+                  </a:tcPr>
+                </a:tc>
+                <a:tc>
+                  <a:txBody>
+                    <a:bodyPr/>
+                    <a:lstStyle/>
+                    <a:p>
+                      <a:pPr algn="l"/>
+                      <a:r>
+                        <a:rPr sz="1000" b="0">
+                          <a:solidFill>
+                            <a:srgbClr val="1D1B43"/>
+                          </a:solidFill>
+                          <a:latin typeface="Calibri"/>
+                        </a:rPr>
+                        <a:t>SAO PAULO/SP</a:t>
+                      </a:r>
+                    </a:p>
+                  </a:txBody>
+                  <a:tcPr>
+                    <a:solidFill>
+                      <a:srgbClr val="F2F2F2"/>
+                    </a:solidFill>
+                  </a:tcPr>
+                </a:tc>
+                <a:tc>
+                  <a:txBody>
+                    <a:bodyPr/>
+                    <a:lstStyle/>
+                    <a:p>
+                      <a:pPr algn="l"/>
+                      <a:r>
+                        <a:rPr sz="1000" b="0">
+                          <a:solidFill>
+                            <a:srgbClr val="1D1B43"/>
+                          </a:solidFill>
+                          <a:latin typeface="Calibri"/>
+                        </a:rPr>
+                        <a:t>06/05/2026</a:t>
+                      </a:r>
+                    </a:p>
+                  </a:txBody>
+                  <a:tcPr>
+                    <a:solidFill>
+                      <a:srgbClr val="F2F2F2"/>
+                    </a:solidFill>
+                  </a:tcPr>
+                </a:tc>
+                <a:tc>
+                  <a:txBody>
+                    <a:bodyPr/>
+                    <a:lstStyle/>
+                    <a:p>
+                      <a:pPr algn="l"/>
+                      <a:r>
+                        <a:rPr sz="1000" b="0">
+                          <a:solidFill>
+                            <a:srgbClr val="1D1B43"/>
+                          </a:solidFill>
+                          <a:latin typeface="Calibri"/>
+                        </a:rPr>
+                        <a:t>ENTREGUE FORA DO PRAZO</a:t>
+                      </a:r>
+                    </a:p>
+                  </a:txBody>
+                  <a:tcPr>
+                    <a:solidFill>
+                      <a:srgbClr val="F2F2F2"/>
+                    </a:solidFill>
+                  </a:tcPr>
+                </a:tc>
+              </a:tr>
+              <a:tr h="285750">
+                <a:tc>
+                  <a:txBody>
+                    <a:bodyPr/>
+                    <a:lstStyle/>
+                    <a:p>
+                      <a:pPr algn="l"/>
+                      <a:r>
+                        <a:rPr sz="1000" b="0">
+                          <a:solidFill>
+                            <a:srgbClr val="1D1B43"/>
+                          </a:solidFill>
+                          <a:latin typeface="Calibri"/>
+                        </a:rPr>
+                        <a:t>281605</a:t>
+                      </a:r>
+                    </a:p>
+                  </a:txBody>
+                  <a:tcPr>
+                    <a:solidFill>
+                      <a:srgbClr val="FFFFFF"/>
+                    </a:solidFill>
+                  </a:tcPr>
+                </a:tc>
+                <a:tc>
+                  <a:txBody>
+                    <a:bodyPr/>
+                    <a:lstStyle/>
+                    <a:p>
+                      <a:pPr algn="l"/>
+                      <a:r>
+                        <a:rPr sz="1000" b="0">
+                          <a:solidFill>
+                            <a:srgbClr val="1D1B43"/>
+                          </a:solidFill>
+                          <a:latin typeface="Calibri"/>
+                        </a:rPr>
+                        <a:t>BSG BIJOU BRASIL COM - SAO PAULO / SP</a:t>
+                      </a:r>
+                    </a:p>
+                  </a:txBody>
+                  <a:tcPr>
+                    <a:solidFill>
+                      <a:srgbClr val="FFFFFF"/>
+                    </a:solidFill>
+                  </a:tcPr>
+                </a:tc>
+                <a:tc>
+                  <a:txBody>
+                    <a:bodyPr/>
+                    <a:lstStyle/>
+                    <a:p>
+                      <a:pPr algn="l"/>
+                      <a:r>
+                        <a:rPr sz="1000" b="0">
+                          <a:solidFill>
+                            <a:srgbClr val="1D1B43"/>
+                          </a:solidFill>
+                          <a:latin typeface="Calibri"/>
+                        </a:rPr>
+                        <a:t>SAO PAULO/SP</a:t>
+                      </a:r>
+                    </a:p>
+                  </a:txBody>
+                  <a:tcPr>
+                    <a:solidFill>
+                      <a:srgbClr val="FFFFFF"/>
+                    </a:solidFill>
+                  </a:tcPr>
+                </a:tc>
+                <a:tc>
+                  <a:txBody>
+                    <a:bodyPr/>
+                    <a:lstStyle/>
+                    <a:p>
+                      <a:pPr algn="l"/>
+                      <a:r>
+                        <a:rPr sz="1000" b="0">
+                          <a:solidFill>
+                            <a:srgbClr val="1D1B43"/>
+                          </a:solidFill>
+                          <a:latin typeface="Calibri"/>
+                        </a:rPr>
+                        <a:t>06/05/2026</a:t>
+                      </a:r>
+                    </a:p>
+                  </a:txBody>
+                  <a:tcPr>
+                    <a:solidFill>
+                      <a:srgbClr val="FFFFFF"/>
+                    </a:solidFill>
+                  </a:tcPr>
+                </a:tc>
+                <a:tc>
+                  <a:txBody>
+                    <a:bodyPr/>
+                    <a:lstStyle/>
+                    <a:p>
+                      <a:pPr algn="l"/>
+                      <a:r>
+                        <a:rPr sz="1000" b="0">
+                          <a:solidFill>
+                            <a:srgbClr val="1D1B43"/>
+                          </a:solidFill>
+                          <a:latin typeface="Calibri"/>
+                        </a:rPr>
+                        <a:t>ENTREGUE FORA DO PRAZO</a:t>
+                      </a:r>
+                    </a:p>
+                  </a:txBody>
+                  <a:tcPr>
+                    <a:solidFill>
+                      <a:srgbClr val="FFFFFF"/>
+                    </a:solidFill>
+                  </a:tcPr>
+                </a:tc>
+              </a:tr>
+              <a:tr h="285750">
+                <a:tc>
+                  <a:txBody>
+                    <a:bodyPr/>
+                    <a:lstStyle/>
+                    <a:p>
+                      <a:pPr algn="l"/>
+                      <a:r>
+                        <a:rPr sz="1000" b="0">
+                          <a:solidFill>
+                            <a:srgbClr val="1D1B43"/>
+                          </a:solidFill>
+                          <a:latin typeface="Calibri"/>
+                        </a:rPr>
+                        <a:t>281606</a:t>
+                      </a:r>
+                    </a:p>
+                  </a:txBody>
+                  <a:tcPr>
+                    <a:solidFill>
+                      <a:srgbClr val="F2F2F2"/>
+                    </a:solidFill>
+                  </a:tcPr>
+                </a:tc>
+                <a:tc>
+                  <a:txBody>
+                    <a:bodyPr/>
+                    <a:lstStyle/>
+                    <a:p>
+                      <a:pPr algn="l"/>
+                      <a:r>
+                        <a:rPr sz="1000" b="0">
+                          <a:solidFill>
+                            <a:srgbClr val="1D1B43"/>
+                          </a:solidFill>
+                          <a:latin typeface="Calibri"/>
+                        </a:rPr>
+                        <a:t>BSG BIJOU BRASIL COM - SAO PAULO / SP</a:t>
+                      </a:r>
+                    </a:p>
+                  </a:txBody>
+                  <a:tcPr>
+                    <a:solidFill>
+                      <a:srgbClr val="F2F2F2"/>
+                    </a:solidFill>
+                  </a:tcPr>
+                </a:tc>
+                <a:tc>
+                  <a:txBody>
+                    <a:bodyPr/>
+                    <a:lstStyle/>
+                    <a:p>
+                      <a:pPr algn="l"/>
+                      <a:r>
+                        <a:rPr sz="1000" b="0">
+                          <a:solidFill>
+                            <a:srgbClr val="1D1B43"/>
+                          </a:solidFill>
+                          <a:latin typeface="Calibri"/>
+                        </a:rPr>
+                        <a:t>SAO PAULO/SP</a:t>
+                      </a:r>
+                    </a:p>
+                  </a:txBody>
+                  <a:tcPr>
+                    <a:solidFill>
+                      <a:srgbClr val="F2F2F2"/>
+                    </a:solidFill>
+                  </a:tcPr>
+                </a:tc>
+                <a:tc>
+                  <a:txBody>
+                    <a:bodyPr/>
+                    <a:lstStyle/>
+                    <a:p>
+                      <a:pPr algn="l"/>
+                      <a:r>
+                        <a:rPr sz="1000" b="0">
+                          <a:solidFill>
+                            <a:srgbClr val="1D1B43"/>
+                          </a:solidFill>
+                          <a:latin typeface="Calibri"/>
+                        </a:rPr>
+                        <a:t>06/05/2026</a:t>
+                      </a:r>
+                    </a:p>
+                  </a:txBody>
+                  <a:tcPr>
+                    <a:solidFill>
+                      <a:srgbClr val="F2F2F2"/>
+                    </a:solidFill>
+                  </a:tcPr>
+                </a:tc>
+                <a:tc>
+                  <a:txBody>
+                    <a:bodyPr/>
+                    <a:lstStyle/>
+                    <a:p>
+                      <a:pPr algn="l"/>
+                      <a:r>
+                        <a:rPr sz="1000" b="0">
+                          <a:solidFill>
+                            <a:srgbClr val="1D1B43"/>
+                          </a:solidFill>
+                          <a:latin typeface="Calibri"/>
+                        </a:rPr>
+                        <a:t>ENTREGUE FORA DO PRAZO</a:t>
+                      </a:r>
+                    </a:p>
+                  </a:txBody>
+                  <a:tcPr>
+                    <a:solidFill>
+                      <a:srgbClr val="F2F2F2"/>
+                    </a:solidFill>
+                  </a:tcPr>
+                </a:tc>
+              </a:tr>
+              <a:tr h="285750">
+                <a:tc>
+                  <a:txBody>
+                    <a:bodyPr/>
+                    <a:lstStyle/>
+                    <a:p>
+                      <a:pPr algn="l"/>
+                      <a:r>
+                        <a:rPr sz="1000" b="0">
+                          <a:solidFill>
+                            <a:srgbClr val="1D1B43"/>
+                          </a:solidFill>
+                          <a:latin typeface="Calibri"/>
+                        </a:rPr>
+                        <a:t>281607</a:t>
+                      </a:r>
+                    </a:p>
+                  </a:txBody>
+                  <a:tcPr>
+                    <a:solidFill>
+                      <a:srgbClr val="FFFFFF"/>
+                    </a:solidFill>
+                  </a:tcPr>
+                </a:tc>
+                <a:tc>
+                  <a:txBody>
+                    <a:bodyPr/>
+                    <a:lstStyle/>
+                    <a:p>
+                      <a:pPr algn="l"/>
+                      <a:r>
+                        <a:rPr sz="1000" b="0">
+                          <a:solidFill>
+                            <a:srgbClr val="1D1B43"/>
+                          </a:solidFill>
+                          <a:latin typeface="Calibri"/>
+                        </a:rPr>
+                        <a:t>BSG BIJOU BRASIL COM - SAO PAULO / SP</a:t>
+                      </a:r>
+                    </a:p>
+                  </a:txBody>
+                  <a:tcPr>
+                    <a:solidFill>
+                      <a:srgbClr val="FFFFFF"/>
+                    </a:solidFill>
+                  </a:tcPr>
+                </a:tc>
+                <a:tc>
+                  <a:txBody>
+                    <a:bodyPr/>
+                    <a:lstStyle/>
+                    <a:p>
+                      <a:pPr algn="l"/>
+                      <a:r>
+                        <a:rPr sz="1000" b="0">
+                          <a:solidFill>
+                            <a:srgbClr val="1D1B43"/>
+                          </a:solidFill>
+                          <a:latin typeface="Calibri"/>
+                        </a:rPr>
+                        <a:t>SAO PAULO/SP</a:t>
+                      </a:r>
+                    </a:p>
+                  </a:txBody>
+                  <a:tcPr>
+                    <a:solidFill>
+                      <a:srgbClr val="FFFFFF"/>
+                    </a:solidFill>
+                  </a:tcPr>
+                </a:tc>
+                <a:tc>
+                  <a:txBody>
+                    <a:bodyPr/>
+                    <a:lstStyle/>
+                    <a:p>
+                      <a:pPr algn="l"/>
+                      <a:r>
+                        <a:rPr sz="1000" b="0">
+                          <a:solidFill>
+                            <a:srgbClr val="1D1B43"/>
+                          </a:solidFill>
+                          <a:latin typeface="Calibri"/>
+                        </a:rPr>
+                        <a:t>06/05/2026</a:t>
+                      </a:r>
+                    </a:p>
+                  </a:txBody>
+                  <a:tcPr>
+                    <a:solidFill>
+                      <a:srgbClr val="FFFFFF"/>
+                    </a:solidFill>
+                  </a:tcPr>
+                </a:tc>
+                <a:tc>
+                  <a:txBody>
+                    <a:bodyPr/>
+                    <a:lstStyle/>
+                    <a:p>
+                      <a:pPr algn="l"/>
+                      <a:r>
+                        <a:rPr sz="1000" b="0">
+                          <a:solidFill>
+                            <a:srgbClr val="1D1B43"/>
+                          </a:solidFill>
+                          <a:latin typeface="Calibri"/>
+                        </a:rPr>
+                        <a:t>ENTREGUE FORA DO PRAZO</a:t>
+                      </a:r>
+                    </a:p>
+                  </a:txBody>
+                  <a:tcPr>
+                    <a:solidFill>
+                      <a:srgbClr val="FFFFFF"/>
+                    </a:solidFill>
+                  </a:tcPr>
+                </a:tc>
+              </a:tr>
+              <a:tr h="285750">
+                <a:tc>
+                  <a:txBody>
+                    <a:bodyPr/>
+                    <a:lstStyle/>
+                    <a:p>
+                      <a:pPr algn="l"/>
+                      <a:r>
+                        <a:rPr sz="1000" b="0">
+                          <a:solidFill>
+                            <a:srgbClr val="1D1B43"/>
+                          </a:solidFill>
+                          <a:latin typeface="Calibri"/>
+                        </a:rPr>
+                        <a:t>281608</a:t>
+                      </a:r>
+                    </a:p>
+                  </a:txBody>
+                  <a:tcPr>
+                    <a:solidFill>
+                      <a:srgbClr val="F2F2F2"/>
+                    </a:solidFill>
+                  </a:tcPr>
+                </a:tc>
+                <a:tc>
+                  <a:txBody>
+                    <a:bodyPr/>
+                    <a:lstStyle/>
+                    <a:p>
+                      <a:pPr algn="l"/>
+                      <a:r>
+                        <a:rPr sz="1000" b="0">
+                          <a:solidFill>
+                            <a:srgbClr val="1D1B43"/>
+                          </a:solidFill>
+                          <a:latin typeface="Calibri"/>
+                        </a:rPr>
+                        <a:t>BSG BIJOU BRASIL COM - SAO PAULO / SP</a:t>
+                      </a:r>
+                    </a:p>
+                  </a:txBody>
+                  <a:tcPr>
+                    <a:solidFill>
+                      <a:srgbClr val="F2F2F2"/>
+                    </a:solidFill>
+                  </a:tcPr>
+                </a:tc>
+                <a:tc>
+                  <a:txBody>
+                    <a:bodyPr/>
+                    <a:lstStyle/>
+                    <a:p>
+                      <a:pPr algn="l"/>
+                      <a:r>
+                        <a:rPr sz="1000" b="0">
+                          <a:solidFill>
+                            <a:srgbClr val="1D1B43"/>
+                          </a:solidFill>
+                          <a:latin typeface="Calibri"/>
+                        </a:rPr>
+                        <a:t>SAO PAULO/SP</a:t>
+                      </a:r>
+                    </a:p>
+                  </a:txBody>
+                  <a:tcPr>
+                    <a:solidFill>
+                      <a:srgbClr val="F2F2F2"/>
+                    </a:solidFill>
+                  </a:tcPr>
+                </a:tc>
+                <a:tc>
+                  <a:txBody>
+                    <a:bodyPr/>
+                    <a:lstStyle/>
+                    <a:p>
+                      <a:pPr algn="l"/>
+                      <a:r>
+                        <a:rPr sz="1000" b="0">
+                          <a:solidFill>
+                            <a:srgbClr val="1D1B43"/>
+                          </a:solidFill>
+                          <a:latin typeface="Calibri"/>
+                        </a:rPr>
+                        <a:t>06/05/2026</a:t>
+                      </a:r>
+                    </a:p>
+                  </a:txBody>
+                  <a:tcPr>
+                    <a:solidFill>
+                      <a:srgbClr val="F2F2F2"/>
+                    </a:solidFill>
+                  </a:tcPr>
+                </a:tc>
+                <a:tc>
+                  <a:txBody>
+                    <a:bodyPr/>
+                    <a:lstStyle/>
+                    <a:p>
+                      <a:pPr algn="l"/>
+                      <a:r>
+                        <a:rPr sz="1000" b="0">
+                          <a:solidFill>
+                            <a:srgbClr val="1D1B43"/>
+                          </a:solidFill>
+                          <a:latin typeface="Calibri"/>
+                        </a:rPr>
+                        <a:t>ENTREGUE FORA DO PRAZO</a:t>
+                      </a:r>
+                    </a:p>
+                  </a:txBody>
+                  <a:tcPr>
+                    <a:solidFill>
+                      <a:srgbClr val="F2F2F2"/>
+                    </a:solidFill>
+                  </a:tcPr>
+                </a:tc>
+              </a:tr>
+              <a:tr h="285750">
+                <a:tc>
+                  <a:txBody>
+                    <a:bodyPr/>
+                    <a:lstStyle/>
+                    <a:p>
+                      <a:pPr algn="l"/>
+                      <a:r>
+                        <a:rPr sz="1000" b="0">
+                          <a:solidFill>
+                            <a:srgbClr val="1D1B43"/>
+                          </a:solidFill>
+                          <a:latin typeface="Calibri"/>
+                        </a:rPr>
+                        <a:t>281609</a:t>
+                      </a:r>
+                    </a:p>
+                  </a:txBody>
+                  <a:tcPr>
+                    <a:solidFill>
+                      <a:srgbClr val="FFFFFF"/>
+                    </a:solidFill>
+                  </a:tcPr>
+                </a:tc>
+                <a:tc>
+                  <a:txBody>
+                    <a:bodyPr/>
+                    <a:lstStyle/>
+                    <a:p>
+                      <a:pPr algn="l"/>
+                      <a:r>
+                        <a:rPr sz="1000" b="0">
+                          <a:solidFill>
+                            <a:srgbClr val="1D1B43"/>
+                          </a:solidFill>
+                          <a:latin typeface="Calibri"/>
+                        </a:rPr>
+                        <a:t>BSG BIJOU BRASIL COM - SAO PAULO / SP</a:t>
+                      </a:r>
+                    </a:p>
+                  </a:txBody>
+                  <a:tcPr>
+                    <a:solidFill>
+                      <a:srgbClr val="FFFFFF"/>
+                    </a:solidFill>
+                  </a:tcPr>
+                </a:tc>
+                <a:tc>
+                  <a:txBody>
+                    <a:bodyPr/>
+                    <a:lstStyle/>
+                    <a:p>
+                      <a:pPr algn="l"/>
+                      <a:r>
+                        <a:rPr sz="1000" b="0">
+                          <a:solidFill>
+                            <a:srgbClr val="1D1B43"/>
+                          </a:solidFill>
+                          <a:latin typeface="Calibri"/>
+                        </a:rPr>
+                        <a:t>SAO PAULO/SP</a:t>
+                      </a:r>
+                    </a:p>
+                  </a:txBody>
+                  <a:tcPr>
+                    <a:solidFill>
+                      <a:srgbClr val="FFFFFF"/>
+                    </a:solidFill>
+                  </a:tcPr>
+                </a:tc>
+                <a:tc>
+                  <a:txBody>
+                    <a:bodyPr/>
+                    <a:lstStyle/>
+                    <a:p>
+                      <a:pPr algn="l"/>
+                      <a:r>
+                        <a:rPr sz="1000" b="0">
+                          <a:solidFill>
+                            <a:srgbClr val="1D1B43"/>
+                          </a:solidFill>
+                          <a:latin typeface="Calibri"/>
+                        </a:rPr>
+                        <a:t>06/05/2026</a:t>
+                      </a:r>
+                    </a:p>
+                  </a:txBody>
+                  <a:tcPr>
+                    <a:solidFill>
+                      <a:srgbClr val="FFFFFF"/>
+                    </a:solidFill>
+                  </a:tcPr>
+                </a:tc>
+                <a:tc>
+                  <a:txBody>
+                    <a:bodyPr/>
+                    <a:lstStyle/>
+                    <a:p>
+                      <a:pPr algn="l"/>
+                      <a:r>
+                        <a:rPr sz="1000" b="0">
+                          <a:solidFill>
+                            <a:srgbClr val="1D1B43"/>
+                          </a:solidFill>
+                          <a:latin typeface="Calibri"/>
+                        </a:rPr>
+                        <a:t>ENTREGUE FORA DO PRAZO</a:t>
+                      </a:r>
+                    </a:p>
+                  </a:txBody>
+                  <a:tcPr>
+                    <a:solidFill>
+                      <a:srgbClr val="FFFFFF"/>
+                    </a:solidFill>
+                  </a:tcPr>
+                </a:tc>
+              </a:tr>
+              <a:tr h="285750">
+                <a:tc>
+                  <a:txBody>
+                    <a:bodyPr/>
+                    <a:lstStyle/>
+                    <a:p>
+                      <a:pPr algn="l"/>
+                      <a:r>
+                        <a:rPr sz="1000" b="0">
+                          <a:solidFill>
+                            <a:srgbClr val="1D1B43"/>
+                          </a:solidFill>
+                          <a:latin typeface="Calibri"/>
+                        </a:rPr>
+                        <a:t>281610</a:t>
+                      </a:r>
+                    </a:p>
+                  </a:txBody>
+                  <a:tcPr>
+                    <a:solidFill>
+                      <a:srgbClr val="F2F2F2"/>
+                    </a:solidFill>
+                  </a:tcPr>
+                </a:tc>
+                <a:tc>
+                  <a:txBody>
+                    <a:bodyPr/>
+                    <a:lstStyle/>
+                    <a:p>
+                      <a:pPr algn="l"/>
+                      <a:r>
+                        <a:rPr sz="1000" b="0">
+                          <a:solidFill>
+                            <a:srgbClr val="1D1B43"/>
+                          </a:solidFill>
+                          <a:latin typeface="Calibri"/>
+                        </a:rPr>
+                        <a:t>BSG BIJOU BRASIL COM - SAO PAULO / SP</a:t>
+                      </a:r>
+                    </a:p>
+                  </a:txBody>
+                  <a:tcPr>
+                    <a:solidFill>
+                      <a:srgbClr val="F2F2F2"/>
+                    </a:solidFill>
+                  </a:tcPr>
+                </a:tc>
+                <a:tc>
+                  <a:txBody>
+                    <a:bodyPr/>
+                    <a:lstStyle/>
+                    <a:p>
+                      <a:pPr algn="l"/>
+                      <a:r>
+                        <a:rPr sz="1000" b="0">
+                          <a:solidFill>
+                            <a:srgbClr val="1D1B43"/>
+                          </a:solidFill>
+                          <a:latin typeface="Calibri"/>
+                        </a:rPr>
+                        <a:t>SAO PAULO/SP</a:t>
+                      </a:r>
+                    </a:p>
+                  </a:txBody>
+                  <a:tcPr>
+                    <a:solidFill>
+                      <a:srgbClr val="F2F2F2"/>
+                    </a:solidFill>
+                  </a:tcPr>
+                </a:tc>
+                <a:tc>
+                  <a:txBody>
+                    <a:bodyPr/>
+                    <a:lstStyle/>
+                    <a:p>
+                      <a:pPr algn="l"/>
+                      <a:r>
+                        <a:rPr sz="1000" b="0">
+                          <a:solidFill>
+                            <a:srgbClr val="1D1B43"/>
+                          </a:solidFill>
+                          <a:latin typeface="Calibri"/>
+                        </a:rPr>
+                        <a:t>06/05/2026</a:t>
+                      </a:r>
+                    </a:p>
+                  </a:txBody>
+                  <a:tcPr>
+                    <a:solidFill>
+                      <a:srgbClr val="F2F2F2"/>
+                    </a:solidFill>
+                  </a:tcPr>
+                </a:tc>
+                <a:tc>
+                  <a:txBody>
+                    <a:bodyPr/>
+                    <a:lstStyle/>
+                    <a:p>
+                      <a:pPr algn="l"/>
+                      <a:r>
+                        <a:rPr sz="1000" b="0">
+                          <a:solidFill>
+                            <a:srgbClr val="1D1B43"/>
+                          </a:solidFill>
+                          <a:latin typeface="Calibri"/>
+                        </a:rPr>
+                        <a:t>ENTREGUE FORA DO PRAZO</a:t>
+                      </a:r>
+                    </a:p>
+                  </a:txBody>
+                  <a:tcPr>
+                    <a:solidFill>
+                      <a:srgbClr val="F2F2F2"/>
+                    </a:solidFill>
+                  </a:tcPr>
+                </a:tc>
+              </a:tr>
+              <a:tr h="285750">
+                <a:tc>
+                  <a:txBody>
+                    <a:bodyPr/>
+                    <a:lstStyle/>
+                    <a:p>
+                      <a:pPr algn="l"/>
+                      <a:r>
+                        <a:rPr sz="1000" b="0">
+                          <a:solidFill>
+                            <a:srgbClr val="1D1B43"/>
+                          </a:solidFill>
+                          <a:latin typeface="Calibri"/>
+                        </a:rPr>
+                        <a:t>281611</a:t>
+                      </a:r>
+                    </a:p>
+                  </a:txBody>
+                  <a:tcPr>
+                    <a:solidFill>
+                      <a:srgbClr val="FFFFFF"/>
+                    </a:solidFill>
+                  </a:tcPr>
+                </a:tc>
+                <a:tc>
+                  <a:txBody>
+                    <a:bodyPr/>
+                    <a:lstStyle/>
+                    <a:p>
+                      <a:pPr algn="l"/>
+                      <a:r>
+                        <a:rPr sz="1000" b="0">
+                          <a:solidFill>
+                            <a:srgbClr val="1D1B43"/>
+                          </a:solidFill>
+                          <a:latin typeface="Calibri"/>
+                        </a:rPr>
+                        <a:t>BSG BIJOU BRASIL COM - SAO PAULO / SP</a:t>
+                      </a:r>
+                    </a:p>
+                  </a:txBody>
+                  <a:tcPr>
+                    <a:solidFill>
+                      <a:srgbClr val="FFFFFF"/>
+                    </a:solidFill>
+                  </a:tcPr>
+                </a:tc>
+                <a:tc>
+                  <a:txBody>
+                    <a:bodyPr/>
+                    <a:lstStyle/>
+                    <a:p>
+                      <a:pPr algn="l"/>
+                      <a:r>
+                        <a:rPr sz="1000" b="0">
+                          <a:solidFill>
+                            <a:srgbClr val="1D1B43"/>
+                          </a:solidFill>
+                          <a:latin typeface="Calibri"/>
+                        </a:rPr>
+                        <a:t>SAO PAULO/SP</a:t>
+                      </a:r>
+                    </a:p>
+                  </a:txBody>
+                  <a:tcPr>
+                    <a:solidFill>
+                      <a:srgbClr val="FFFFFF"/>
+                    </a:solidFill>
+                  </a:tcPr>
+                </a:tc>
+                <a:tc>
+                  <a:txBody>
+                    <a:bodyPr/>
+                    <a:lstStyle/>
+                    <a:p>
+                      <a:pPr algn="l"/>
+                      <a:r>
+                        <a:rPr sz="1000" b="0">
+                          <a:solidFill>
+                            <a:srgbClr val="1D1B43"/>
+                          </a:solidFill>
+                          <a:latin typeface="Calibri"/>
+                        </a:rPr>
+                        <a:t>06/05/2026</a:t>
+                      </a:r>
+                    </a:p>
+                  </a:txBody>
+                  <a:tcPr>
+                    <a:solidFill>
+                      <a:srgbClr val="FFFFFF"/>
+                    </a:solidFill>
+                  </a:tcPr>
+                </a:tc>
+                <a:tc>
+                  <a:txBody>
+                    <a:bodyPr/>
+                    <a:lstStyle/>
+                    <a:p>
+                      <a:pPr algn="l"/>
+                      <a:r>
+                        <a:rPr sz="1000" b="0">
+                          <a:solidFill>
+                            <a:srgbClr val="1D1B43"/>
+                          </a:solidFill>
+                          <a:latin typeface="Calibri"/>
+                        </a:rPr>
+                        <a:t>ENTREGUE FORA DO PRAZO</a:t>
+                      </a:r>
+                    </a:p>
+                  </a:txBody>
+                  <a:tcPr>
+                    <a:solidFill>
+                      <a:srgbClr val="FFFFFF"/>
+                    </a:solidFill>
+                  </a:tcPr>
+                </a:tc>
+              </a:tr>
+              <a:tr h="285750">
+                <a:tc>
+                  <a:txBody>
+                    <a:bodyPr/>
+                    <a:lstStyle/>
+                    <a:p>
+                      <a:pPr algn="l"/>
+                      <a:r>
+                        <a:rPr sz="1000" b="0">
+                          <a:solidFill>
+                            <a:srgbClr val="1D1B43"/>
+                          </a:solidFill>
+                          <a:latin typeface="Calibri"/>
+                        </a:rPr>
+                        <a:t>282392</a:t>
+                      </a:r>
+                    </a:p>
+                  </a:txBody>
+                  <a:tcPr>
+                    <a:solidFill>
+                      <a:srgbClr val="F2F2F2"/>
+                    </a:solidFill>
+                  </a:tcPr>
+                </a:tc>
+                <a:tc>
+                  <a:txBody>
+                    <a:bodyPr/>
+                    <a:lstStyle/>
+                    <a:p>
+                      <a:pPr algn="l"/>
+                      <a:r>
+                        <a:rPr sz="1000" b="0">
+                          <a:solidFill>
+                            <a:srgbClr val="1D1B43"/>
+                          </a:solidFill>
+                          <a:latin typeface="Calibri"/>
+                        </a:rPr>
+                        <a:t>LAROCCA MODA E ACESS - SAO PAULO / SP</a:t>
+                      </a:r>
+                    </a:p>
+                  </a:txBody>
+                  <a:tcPr>
+                    <a:solidFill>
+                      <a:srgbClr val="F2F2F2"/>
+                    </a:solidFill>
+                  </a:tcPr>
+                </a:tc>
+                <a:tc>
+                  <a:txBody>
+                    <a:bodyPr/>
+                    <a:lstStyle/>
+                    <a:p>
+                      <a:pPr algn="l"/>
+                      <a:r>
+                        <a:rPr sz="1000" b="0">
+                          <a:solidFill>
+                            <a:srgbClr val="1D1B43"/>
+                          </a:solidFill>
+                          <a:latin typeface="Calibri"/>
+                        </a:rPr>
+                        <a:t>SAO PAULO/SP</a:t>
+                      </a:r>
+                    </a:p>
+                  </a:txBody>
+                  <a:tcPr>
+                    <a:solidFill>
+                      <a:srgbClr val="F2F2F2"/>
+                    </a:solidFill>
+                  </a:tcPr>
+                </a:tc>
+                <a:tc>
+                  <a:txBody>
+                    <a:bodyPr/>
+                    <a:lstStyle/>
+                    <a:p>
+                      <a:pPr algn="l"/>
+                      <a:r>
+                        <a:rPr sz="1000" b="0">
+                          <a:solidFill>
+                            <a:srgbClr val="1D1B43"/>
+                          </a:solidFill>
+                          <a:latin typeface="Calibri"/>
+                        </a:rPr>
+                        <a:t>09/05/2026</a:t>
+                      </a:r>
+                    </a:p>
+                  </a:txBody>
+                  <a:tcPr>
+                    <a:solidFill>
+                      <a:srgbClr val="F2F2F2"/>
+                    </a:solidFill>
+                  </a:tcPr>
+                </a:tc>
+                <a:tc>
+                  <a:txBody>
+                    <a:bodyPr/>
+                    <a:lstStyle/>
+                    <a:p>
+                      <a:pPr algn="l"/>
+                      <a:r>
+                        <a:rPr sz="1000" b="0">
+                          <a:solidFill>
+                            <a:srgbClr val="1D1B43"/>
+                          </a:solidFill>
+                          <a:latin typeface="Calibri"/>
+                        </a:rPr>
+                        <a:t>ENTREGUE FORA DO PRAZO</a:t>
+                      </a:r>
+                    </a:p>
+                  </a:txBody>
+                  <a:tcPr>
+                    <a:solidFill>
+                      <a:srgbClr val="F2F2F2"/>
+                    </a:solidFill>
+                  </a:tcPr>
+                </a:tc>
+              </a:tr>
+              <a:tr h="285750">
+                <a:tc>
+                  <a:txBody>
+                    <a:bodyPr/>
+                    <a:lstStyle/>
+                    <a:p>
+                      <a:pPr algn="l"/>
+                      <a:r>
+                        <a:rPr sz="1000" b="0">
+                          <a:solidFill>
+                            <a:srgbClr val="1D1B43"/>
+                          </a:solidFill>
+                          <a:latin typeface="Calibri"/>
+                        </a:rPr>
+                        <a:t>283102</a:t>
+                      </a:r>
+                    </a:p>
+                  </a:txBody>
+                  <a:tcPr>
+                    <a:solidFill>
+                      <a:srgbClr val="FFFFFF"/>
+                    </a:solidFill>
+                  </a:tcPr>
+                </a:tc>
+                <a:tc>
+                  <a:txBody>
+                    <a:bodyPr/>
+                    <a:lstStyle/>
+                    <a:p>
+                      <a:pPr algn="l"/>
+                      <a:r>
+                        <a:rPr sz="1000" b="0">
+                          <a:solidFill>
+                            <a:srgbClr val="1D1B43"/>
+                          </a:solidFill>
+                          <a:latin typeface="Calibri"/>
+                        </a:rPr>
+                        <a:t>BSG BIJOU BRASIL COM - SAO PAULO / SP</a:t>
+                      </a:r>
+                    </a:p>
+                  </a:txBody>
+                  <a:tcPr>
+                    <a:solidFill>
+                      <a:srgbClr val="FFFFFF"/>
+                    </a:solidFill>
+                  </a:tcPr>
+                </a:tc>
+                <a:tc>
+                  <a:txBody>
+                    <a:bodyPr/>
+                    <a:lstStyle/>
+                    <a:p>
+                      <a:pPr algn="l"/>
+                      <a:r>
+                        <a:rPr sz="1000" b="0">
+                          <a:solidFill>
+                            <a:srgbClr val="1D1B43"/>
+                          </a:solidFill>
+                          <a:latin typeface="Calibri"/>
+                        </a:rPr>
+                        <a:t>SAO PAULO/SP</a:t>
+                      </a:r>
+                    </a:p>
+                  </a:txBody>
+                  <a:tcPr>
+                    <a:solidFill>
+                      <a:srgbClr val="FFFFFF"/>
+                    </a:solidFill>
+                  </a:tcPr>
+                </a:tc>
+                <a:tc>
+                  <a:txBody>
+                    <a:bodyPr/>
+                    <a:lstStyle/>
+                    <a:p>
+                      <a:pPr algn="l"/>
+                      <a:r>
+                        <a:rPr sz="1000" b="0">
+                          <a:solidFill>
+                            <a:srgbClr val="1D1B43"/>
+                          </a:solidFill>
+                          <a:latin typeface="Calibri"/>
+                        </a:rPr>
+                        <a:t>15/05/2026</a:t>
+                      </a:r>
+                    </a:p>
+                  </a:txBody>
+                  <a:tcPr>
+                    <a:solidFill>
+                      <a:srgbClr val="FFFFFF"/>
+                    </a:solidFill>
+                  </a:tcPr>
+                </a:tc>
+                <a:tc>
+                  <a:txBody>
+                    <a:bodyPr/>
+                    <a:lstStyle/>
+                    <a:p>
+                      <a:pPr algn="l"/>
+                      <a:r>
+                        <a:rPr sz="1000" b="0">
+                          <a:solidFill>
+                            <a:srgbClr val="1D1B43"/>
+                          </a:solidFill>
+                          <a:latin typeface="Calibri"/>
+                        </a:rPr>
+                        <a:t>ENTREGUE FORA DO PRAZO</a:t>
+                      </a:r>
+                    </a:p>
+                  </a:txBody>
+                  <a:tcPr>
+                    <a:solidFill>
+                      <a:srgbClr val="FFFFFF"/>
+                    </a:solidFill>
+                  </a:tcPr>
+                </a:tc>
+              </a:tr>
+              <a:tr h="285750">
+                <a:tc>
+                  <a:txBody>
+                    <a:bodyPr/>
+                    <a:lstStyle/>
+                    <a:p>
+                      <a:pPr algn="l"/>
+                      <a:r>
+                        <a:rPr sz="1000" b="0">
+                          <a:solidFill>
+                            <a:srgbClr val="1D1B43"/>
+                          </a:solidFill>
+                          <a:latin typeface="Calibri"/>
+                        </a:rPr>
+                        <a:t>284487</a:t>
+                      </a:r>
+                    </a:p>
+                  </a:txBody>
+                  <a:tcPr>
+                    <a:solidFill>
+                      <a:srgbClr val="F2F2F2"/>
+                    </a:solidFill>
+                  </a:tcPr>
+                </a:tc>
+                <a:tc>
+                  <a:txBody>
+                    <a:bodyPr/>
+                    <a:lstStyle/>
+                    <a:p>
+                      <a:pPr algn="l"/>
+                      <a:r>
+                        <a:rPr sz="1000" b="0">
+                          <a:solidFill>
+                            <a:srgbClr val="1D1B43"/>
+                          </a:solidFill>
+                          <a:latin typeface="Calibri"/>
+                        </a:rPr>
+                        <a:t>BSG BIJOU BRASIL COM - SAO PAULO / SP</a:t>
+                      </a:r>
+                    </a:p>
+                  </a:txBody>
+                  <a:tcPr>
+                    <a:solidFill>
+                      <a:srgbClr val="F2F2F2"/>
+                    </a:solidFill>
+                  </a:tcPr>
+                </a:tc>
+                <a:tc>
+                  <a:txBody>
+                    <a:bodyPr/>
+                    <a:lstStyle/>
+                    <a:p>
+                      <a:pPr algn="l"/>
+                      <a:r>
+                        <a:rPr sz="1000" b="0">
+                          <a:solidFill>
+                            <a:srgbClr val="1D1B43"/>
+                          </a:solidFill>
+                          <a:latin typeface="Calibri"/>
+                        </a:rPr>
+                        <a:t>SAO PAULO/SP</a:t>
+                      </a:r>
+                    </a:p>
+                  </a:txBody>
+                  <a:tcPr>
+                    <a:solidFill>
+                      <a:srgbClr val="F2F2F2"/>
+                    </a:solidFill>
+                  </a:tcPr>
+                </a:tc>
+                <a:tc>
+                  <a:txBody>
+                    <a:bodyPr/>
+                    <a:lstStyle/>
+                    <a:p>
+                      <a:pPr algn="l"/>
+                      <a:r>
+                        <a:rPr sz="1000" b="0">
+                          <a:solidFill>
+                            <a:srgbClr val="1D1B43"/>
+                          </a:solidFill>
+                          <a:latin typeface="Calibri"/>
+                        </a:rPr>
+                        <a:t>26/05/2026</a:t>
+                      </a:r>
+                    </a:p>
+                  </a:txBody>
+                  <a:tcPr>
+                    <a:solidFill>
+                      <a:srgbClr val="F2F2F2"/>
+                    </a:solidFill>
+                  </a:tcPr>
+                </a:tc>
+                <a:tc>
+                  <a:txBody>
+                    <a:bodyPr/>
+                    <a:lstStyle/>
+                    <a:p>
+                      <a:pPr algn="l"/>
+                      <a:r>
+                        <a:rPr sz="1000" b="0">
+                          <a:solidFill>
+                            <a:srgbClr val="1D1B43"/>
+                          </a:solidFill>
+                          <a:latin typeface="Calibri"/>
+                        </a:rPr>
+                        <a:t>FORA DO PRAZO</a:t>
+                      </a:r>
+                    </a:p>
+                  </a:txBody>
+                  <a:tcPr>
+                    <a:solidFill>
+                      <a:srgbClr val="F2F2F2"/>
+                    </a:solidFill>
+                  </a:tcPr>
+                </a:tc>
+              </a:tr>
+              <a:tr h="285750">
+                <a:tc>
+                  <a:txBody>
+                    <a:bodyPr/>
+                    <a:lstStyle/>
+                    <a:p>
+                      <a:pPr algn="l"/>
+                      <a:r>
+                        <a:rPr sz="1000" b="0">
+                          <a:solidFill>
+                            <a:srgbClr val="1D1B43"/>
+                          </a:solidFill>
+                          <a:latin typeface="Calibri"/>
+                        </a:rPr>
+                        <a:t>285276</a:t>
+                      </a:r>
+                    </a:p>
+                  </a:txBody>
+                  <a:tcPr>
+                    <a:solidFill>
+                      <a:srgbClr val="FFFFFF"/>
+                    </a:solidFill>
+                  </a:tcPr>
+                </a:tc>
+                <a:tc>
+                  <a:txBody>
+                    <a:bodyPr/>
+                    <a:lstStyle/>
+                    <a:p>
+                      <a:pPr algn="l"/>
+                      <a:r>
+                        <a:rPr sz="1000" b="0">
+                          <a:solidFill>
+                            <a:srgbClr val="1D1B43"/>
+                          </a:solidFill>
+                          <a:latin typeface="Calibri"/>
+                        </a:rPr>
+                        <a:t>LAROCCA MODA E ACESS - SAO PAULO / SP</a:t>
+                      </a:r>
+                    </a:p>
+                  </a:txBody>
+                  <a:tcPr>
+                    <a:solidFill>
+                      <a:srgbClr val="FFFFFF"/>
+                    </a:solidFill>
+                  </a:tcPr>
+                </a:tc>
+                <a:tc>
+                  <a:txBody>
+                    <a:bodyPr/>
+                    <a:lstStyle/>
+                    <a:p>
+                      <a:pPr algn="l"/>
+                      <a:r>
+                        <a:rPr sz="1000" b="0">
+                          <a:solidFill>
+                            <a:srgbClr val="1D1B43"/>
+                          </a:solidFill>
+                          <a:latin typeface="Calibri"/>
+                        </a:rPr>
+                        <a:t>SAO PAULO/SP</a:t>
+                      </a:r>
+                    </a:p>
+                  </a:txBody>
+                  <a:tcPr>
+                    <a:solidFill>
+                      <a:srgbClr val="FFFFFF"/>
+                    </a:solidFill>
+                  </a:tcPr>
+                </a:tc>
+                <a:tc>
+                  <a:txBody>
+                    <a:bodyPr/>
+                    <a:lstStyle/>
+                    <a:p>
+                      <a:pPr algn="l"/>
+                      <a:r>
+                        <a:rPr sz="1000" b="0">
+                          <a:solidFill>
+                            <a:srgbClr val="1D1B43"/>
+                          </a:solidFill>
+                          <a:latin typeface="Calibri"/>
+                        </a:rPr>
+                        <a:t>29/05/2026</a:t>
+                      </a:r>
+                    </a:p>
+                  </a:txBody>
+                  <a:tcPr>
+                    <a:solidFill>
+                      <a:srgbClr val="FFFFFF"/>
+                    </a:solidFill>
+                  </a:tcPr>
+                </a:tc>
+                <a:tc>
+                  <a:txBody>
+                    <a:bodyPr/>
+                    <a:lstStyle/>
+                    <a:p>
+                      <a:pPr algn="l"/>
+                      <a:r>
+                        <a:rPr sz="1000" b="0">
+                          <a:solidFill>
+                            <a:srgbClr val="1D1B43"/>
+                          </a:solidFill>
+                          <a:latin typeface="Calibri"/>
+                        </a:rPr>
+                        <a:t>FORA DO PRAZO</a:t>
                       </a:r>
                     </a:p>
                   </a:txBody>
@@ -6151,7 +7555,7 @@
                           </a:solidFill>
                           <a:latin typeface="Calibri"/>
                         </a:rPr>
-                        <a:t>113</a:t>
+                        <a:t>139</a:t>
                       </a:r>
                     </a:p>
                   </a:txBody>
@@ -6174,7 +7578,7 @@
                           </a:solidFill>
                           <a:latin typeface="Calibri"/>
                         </a:rPr>
-                        <a:t>111</a:t>
+                        <a:t>124</a:t>
                       </a:r>
                     </a:p>
                   </a:txBody>
@@ -6197,7 +7601,7 @@
                           </a:solidFill>
                           <a:latin typeface="Calibri"/>
                         </a:rPr>
-                        <a:t>2</a:t>
+                        <a:t>15</a:t>
                       </a:r>
                     </a:p>
                   </a:txBody>
@@ -6220,7 +7624,7 @@
                           </a:solidFill>
                           <a:latin typeface="Calibri"/>
                         </a:rPr>
-                        <a:t>98.2%</a:t>
+                        <a:t>89.2%</a:t>
                       </a:r>
                     </a:p>
                   </a:txBody>
@@ -6243,7 +7647,7 @@
                           </a:solidFill>
                           <a:latin typeface="Calibri"/>
                         </a:rPr>
-                        <a:t>Excelente</a:t>
+                        <a:t>Regular</a:t>
                       </a:r>
                     </a:p>
                   </a:txBody>
@@ -6291,7 +7695,7 @@
                           </a:solidFill>
                           <a:latin typeface="Calibri"/>
                         </a:rPr>
-                        <a:t>4</a:t>
+                        <a:t>3</a:t>
                       </a:r>
                     </a:p>
                   </a:txBody>
@@ -6337,7 +7741,7 @@
                           </a:solidFill>
                           <a:latin typeface="Calibri"/>
                         </a:rPr>
-                        <a:t>1</a:t>
+                        <a:t>0</a:t>
                       </a:r>
                     </a:p>
                   </a:txBody>
@@ -6360,7 +7764,7 @@
                           </a:solidFill>
                           <a:latin typeface="Calibri"/>
                         </a:rPr>
-                        <a:t>75.0%</a:t>
+                        <a:t>100.0%</a:t>
                       </a:r>
                     </a:p>
                   </a:txBody>
@@ -6383,7 +7787,7 @@
                           </a:solidFill>
                           <a:latin typeface="Calibri"/>
                         </a:rPr>
-                        <a:t>Atencao</a:t>
+                        <a:t>Excelente</a:t>
                       </a:r>
                     </a:p>
                   </a:txBody>
@@ -6408,7 +7812,7 @@
                           </a:solidFill>
                           <a:latin typeface="Calibri"/>
                         </a:rPr>
-                        <a:t>MG</a:t>
+                        <a:t>PR</a:t>
                       </a:r>
                     </a:p>
                   </a:txBody>
@@ -6431,7 +7835,7 @@
                           </a:solidFill>
                           <a:latin typeface="Calibri"/>
                         </a:rPr>
-                        <a:t>3</a:t>
+                        <a:t>1</a:t>
                       </a:r>
                     </a:p>
                   </a:txBody>
@@ -6454,7 +7858,7 @@
                           </a:solidFill>
                           <a:latin typeface="Calibri"/>
                         </a:rPr>
-                        <a:t>3</a:t>
+                        <a:t>1</a:t>
                       </a:r>
                     </a:p>
                   </a:txBody>
@@ -6618,7 +8022,7 @@
                 </a:solidFill>
                 <a:latin typeface="Calibri"/>
               </a:rPr>
-              <a:t>TOP DESTINATARIOS (17 pontos)</a:t>
+              <a:t>TOP DESTINATARIOS (16 pontos)</a:t>
             </a:r>
           </a:p>
         </p:txBody>
@@ -6916,7 +8320,7 @@
                           </a:solidFill>
                           <a:latin typeface="Calibri"/>
                         </a:rPr>
-                        <a:t>63</a:t>
+                        <a:t>69</a:t>
                       </a:r>
                     </a:p>
                   </a:txBody>
@@ -6939,7 +8343,7 @@
                           </a:solidFill>
                           <a:latin typeface="Calibri"/>
                         </a:rPr>
-                        <a:t>61</a:t>
+                        <a:t>57</a:t>
                       </a:r>
                     </a:p>
                   </a:txBody>
@@ -6962,7 +8366,7 @@
                           </a:solidFill>
                           <a:latin typeface="Calibri"/>
                         </a:rPr>
-                        <a:t>2</a:t>
+                        <a:t>12</a:t>
                       </a:r>
                     </a:p>
                   </a:txBody>
@@ -6985,7 +8389,7 @@
                           </a:solidFill>
                           <a:latin typeface="Calibri"/>
                         </a:rPr>
-                        <a:t>96.8%</a:t>
+                        <a:t>82.6%</a:t>
                       </a:r>
                     </a:p>
                   </a:txBody>
@@ -7008,7 +8412,7 @@
                           </a:solidFill>
                           <a:latin typeface="Calibri"/>
                         </a:rPr>
-                        <a:t>Excelente</a:t>
+                        <a:t>Atencao</a:t>
                       </a:r>
                     </a:p>
                   </a:txBody>
@@ -7079,7 +8483,7 @@
                           </a:solidFill>
                           <a:latin typeface="Calibri"/>
                         </a:rPr>
-                        <a:t>11</a:t>
+                        <a:t>12</a:t>
                       </a:r>
                     </a:p>
                   </a:txBody>
@@ -7102,7 +8506,7 @@
                           </a:solidFill>
                           <a:latin typeface="Calibri"/>
                         </a:rPr>
-                        <a:t>11</a:t>
+                        <a:t>12</a:t>
                       </a:r>
                     </a:p>
                   </a:txBody>
@@ -7219,7 +8623,7 @@
                           </a:solidFill>
                           <a:latin typeface="Calibri"/>
                         </a:rPr>
-                        <a:t>BL ANALIA BIJUTERIAS - SAO PAULO / SP</a:t>
+                        <a:t>CMC LITTLE STORE LTD - SAO PAULO / SP</a:t>
                       </a:r>
                     </a:p>
                   </a:txBody>
@@ -7242,7 +8646,7 @@
                           </a:solidFill>
                           <a:latin typeface="Calibri"/>
                         </a:rPr>
-                        <a:t>4</a:t>
+                        <a:t>6</a:t>
                       </a:r>
                     </a:p>
                   </a:txBody>
@@ -7265,7 +8669,7 @@
                           </a:solidFill>
                           <a:latin typeface="Calibri"/>
                         </a:rPr>
-                        <a:t>4</a:t>
+                        <a:t>6</a:t>
                       </a:r>
                     </a:p>
                   </a:txBody>
@@ -7382,7 +8786,7 @@
                           </a:solidFill>
                           <a:latin typeface="Calibri"/>
                         </a:rPr>
-                        <a:t>BSG BIJOU BRASIL COM - ITAJAI / SC</a:t>
+                        <a:t>CMGL MORUMBI ACESSOR - SAO PAULO / SP</a:t>
                       </a:r>
                     </a:p>
                   </a:txBody>
@@ -7405,7 +8809,7 @@
                           </a:solidFill>
                           <a:latin typeface="Calibri"/>
                         </a:rPr>
-                        <a:t>4</a:t>
+                        <a:t>6</a:t>
                       </a:r>
                     </a:p>
                   </a:txBody>
@@ -7428,7 +8832,7 @@
                           </a:solidFill>
                           <a:latin typeface="Calibri"/>
                         </a:rPr>
-                        <a:t>3</a:t>
+                        <a:t>5</a:t>
                       </a:r>
                     </a:p>
                   </a:txBody>
@@ -7474,7 +8878,7 @@
                           </a:solidFill>
                           <a:latin typeface="Calibri"/>
                         </a:rPr>
-                        <a:t>75.0%</a:t>
+                        <a:t>83.3%</a:t>
                       </a:r>
                     </a:p>
                   </a:txBody>
@@ -7545,7 +8949,7 @@
                           </a:solidFill>
                           <a:latin typeface="Calibri"/>
                         </a:rPr>
-                        <a:t>BM MODAS E ACESSORIO - CAMPINAS / SP</a:t>
+                        <a:t>LAROCCA MODA E ACESS - SAO PAULO / SP</a:t>
                       </a:r>
                     </a:p>
                   </a:txBody>
@@ -7568,6 +8972,29 @@
                           </a:solidFill>
                           <a:latin typeface="Calibri"/>
                         </a:rPr>
+                        <a:t>6</a:t>
+                      </a:r>
+                    </a:p>
+                  </a:txBody>
+                  <a:tcPr>
+                    <a:solidFill>
+                      <a:srgbClr val="FFFFFF"/>
+                    </a:solidFill>
+                  </a:tcPr>
+                </a:tc>
+                <a:tc>
+                  <a:txBody>
+                    <a:bodyPr/>
+                    <a:lstStyle/>
+                    <a:p>
+                      <a:pPr algn="l"/>
+                      <a:r>
+                        <a:rPr sz="1000" b="0">
+                          <a:solidFill>
+                            <a:srgbClr val="1D1B43"/>
+                          </a:solidFill>
+                          <a:latin typeface="Calibri"/>
+                        </a:rPr>
                         <a:t>4</a:t>
                       </a:r>
                     </a:p>
@@ -7591,7 +9018,7 @@
                           </a:solidFill>
                           <a:latin typeface="Calibri"/>
                         </a:rPr>
-                        <a:t>4</a:t>
+                        <a:t>2</a:t>
                       </a:r>
                     </a:p>
                   </a:txBody>
@@ -7614,7 +9041,7 @@
                           </a:solidFill>
                           <a:latin typeface="Calibri"/>
                         </a:rPr>
-                        <a:t>0</a:t>
+                        <a:t>66.7%</a:t>
                       </a:r>
                     </a:p>
                   </a:txBody>
@@ -7637,30 +9064,7 @@
                           </a:solidFill>
                           <a:latin typeface="Calibri"/>
                         </a:rPr>
-                        <a:t>100.0%</a:t>
-                      </a:r>
-                    </a:p>
-                  </a:txBody>
-                  <a:tcPr>
-                    <a:solidFill>
-                      <a:srgbClr val="FFFFFF"/>
-                    </a:solidFill>
-                  </a:tcPr>
-                </a:tc>
-                <a:tc>
-                  <a:txBody>
-                    <a:bodyPr/>
-                    <a:lstStyle/>
-                    <a:p>
-                      <a:pPr algn="l"/>
-                      <a:r>
-                        <a:rPr sz="1000" b="0">
-                          <a:solidFill>
-                            <a:srgbClr val="1D1B43"/>
-                          </a:solidFill>
-                          <a:latin typeface="Calibri"/>
-                        </a:rPr>
-                        <a:t>Excelente</a:t>
+                        <a:t>Atencao</a:t>
                       </a:r>
                     </a:p>
                   </a:txBody>
@@ -7708,7 +9112,7 @@
                           </a:solidFill>
                           <a:latin typeface="Calibri"/>
                         </a:rPr>
-                        <a:t>RAPIDO XAPURI TRANSP - GUARULHOS / SP</a:t>
+                        <a:t>SASAKI MODA E ACESSO - SAO PAULO / SP</a:t>
                       </a:r>
                     </a:p>
                   </a:txBody>
@@ -7731,7 +9135,7 @@
                           </a:solidFill>
                           <a:latin typeface="Calibri"/>
                         </a:rPr>
-                        <a:t>4</a:t>
+                        <a:t>6</a:t>
                       </a:r>
                     </a:p>
                   </a:txBody>
@@ -7754,7 +9158,7 @@
                           </a:solidFill>
                           <a:latin typeface="Calibri"/>
                         </a:rPr>
-                        <a:t>4</a:t>
+                        <a:t>6</a:t>
                       </a:r>
                     </a:p>
                   </a:txBody>
@@ -7871,7 +9275,7 @@
                           </a:solidFill>
                           <a:latin typeface="Calibri"/>
                         </a:rPr>
-                        <a:t>SASAKI MODA E ACESSO - SAO PAULO / SP</a:t>
+                        <a:t>CMC LUNA ACESSORIOS - SAO CAETANO DO SUL / SP</a:t>
                       </a:r>
                     </a:p>
                   </a:txBody>
@@ -7894,7 +9298,7 @@
                           </a:solidFill>
                           <a:latin typeface="Calibri"/>
                         </a:rPr>
-                        <a:t>4</a:t>
+                        <a:t>6</a:t>
                       </a:r>
                     </a:p>
                   </a:txBody>
@@ -7917,7 +9321,7 @@
                           </a:solidFill>
                           <a:latin typeface="Calibri"/>
                         </a:rPr>
-                        <a:t>4</a:t>
+                        <a:t>6</a:t>
                       </a:r>
                     </a:p>
                   </a:txBody>
@@ -8034,7 +9438,7 @@
                           </a:solidFill>
                           <a:latin typeface="Calibri"/>
                         </a:rPr>
-                        <a:t>MAJO MODAS E ACESSOR - MOGI GUACU / SP</a:t>
+                        <a:t>BL TIJU ACESSORIOS L - SAO PAULO / SP</a:t>
                       </a:r>
                     </a:p>
                   </a:txBody>
@@ -8057,7 +9461,7 @@
                           </a:solidFill>
                           <a:latin typeface="Calibri"/>
                         </a:rPr>
-                        <a:t>4</a:t>
+                        <a:t>5</a:t>
                       </a:r>
                     </a:p>
                   </a:txBody>
@@ -8080,7 +9484,7 @@
                           </a:solidFill>
                           <a:latin typeface="Calibri"/>
                         </a:rPr>
-                        <a:t>4</a:t>
+                        <a:t>5</a:t>
                       </a:r>
                     </a:p>
                   </a:txBody>
@@ -8197,7 +9601,7 @@
                           </a:solidFill>
                           <a:latin typeface="Calibri"/>
                         </a:rPr>
-                        <a:t>LAROCCA MODA E ACESS - SAO PAULO / SP</a:t>
+                        <a:t>MAJO MODAS E ACESSOR - MOGI GUACU / SP</a:t>
                       </a:r>
                     </a:p>
                   </a:txBody>
@@ -8220,7 +9624,7 @@
                           </a:solidFill>
                           <a:latin typeface="Calibri"/>
                         </a:rPr>
-                        <a:t>4</a:t>
+                        <a:t>5</a:t>
                       </a:r>
                     </a:p>
                   </a:txBody>
@@ -8243,7 +9647,7 @@
                           </a:solidFill>
                           <a:latin typeface="Calibri"/>
                         </a:rPr>
-                        <a:t>4</a:t>
+                        <a:t>5</a:t>
                       </a:r>
                     </a:p>
                   </a:txBody>
@@ -8360,7 +9764,7 @@
                           </a:solidFill>
                           <a:latin typeface="Calibri"/>
                         </a:rPr>
-                        <a:t>GIRASSOL ACESSORIOS - SAO PAULO / SP</a:t>
+                        <a:t>BL ANALIA BIJUTERIAS - SAO PAULO / SP</a:t>
                       </a:r>
                     </a:p>
                   </a:txBody>
@@ -8383,7 +9787,7 @@
                           </a:solidFill>
                           <a:latin typeface="Calibri"/>
                         </a:rPr>
-                        <a:t>3</a:t>
+                        <a:t>5</a:t>
                       </a:r>
                     </a:p>
                   </a:txBody>
@@ -8406,7 +9810,7 @@
                           </a:solidFill>
                           <a:latin typeface="Calibri"/>
                         </a:rPr>
-                        <a:t>3</a:t>
+                        <a:t>5</a:t>
                       </a:r>
                     </a:p>
                   </a:txBody>
@@ -8523,7 +9927,7 @@
                           </a:solidFill>
                           <a:latin typeface="Calibri"/>
                         </a:rPr>
-                        <a:t>CMGL MORUMBI ACESSOR - SAO PAULO / SP</a:t>
+                        <a:t>BM MODAS E ACESSORIO - CAMPINAS / SP</a:t>
                       </a:r>
                     </a:p>
                   </a:txBody>
@@ -8546,7 +9950,7 @@
                           </a:solidFill>
                           <a:latin typeface="Calibri"/>
                         </a:rPr>
-                        <a:t>3</a:t>
+                        <a:t>5</a:t>
                       </a:r>
                     </a:p>
                   </a:txBody>
@@ -8569,7 +9973,7 @@
                           </a:solidFill>
                           <a:latin typeface="Calibri"/>
                         </a:rPr>
-                        <a:t>3</a:t>
+                        <a:t>5</a:t>
                       </a:r>
                     </a:p>
                   </a:txBody>
@@ -8686,7 +10090,7 @@
                           </a:solidFill>
                           <a:latin typeface="Calibri"/>
                         </a:rPr>
-                        <a:t>CMC LUNA ACESSORIOS - SAO CAETANO DO SUL / SP</a:t>
+                        <a:t>GIRASSOL ACESSORIOS - SAO PAULO / SP</a:t>
                       </a:r>
                     </a:p>
                   </a:txBody>
@@ -8709,7 +10113,7 @@
                           </a:solidFill>
                           <a:latin typeface="Calibri"/>
                         </a:rPr>
-                        <a:t>3</a:t>
+                        <a:t>5</a:t>
                       </a:r>
                     </a:p>
                   </a:txBody>
@@ -8732,7 +10136,7 @@
                           </a:solidFill>
                           <a:latin typeface="Calibri"/>
                         </a:rPr>
-                        <a:t>3</a:t>
+                        <a:t>5</a:t>
                       </a:r>
                     </a:p>
                   </a:txBody>
@@ -8849,7 +10253,7 @@
                           </a:solidFill>
                           <a:latin typeface="Calibri"/>
                         </a:rPr>
-                        <a:t>CMC LITTLE STORE LTD - SAO PAULO / SP</a:t>
+                        <a:t>BSG BIJOU BRASIL COM - ITAJAI / SC</a:t>
                       </a:r>
                     </a:p>
                   </a:txBody>
@@ -9012,7 +10416,7 @@
                           </a:solidFill>
                           <a:latin typeface="Calibri"/>
                         </a:rPr>
-                        <a:t>TM MODA E ACESSORIOS - BELO HORIZONTE / MG</a:t>
+                        <a:t>RAPIDO XAPURI TRANSP - GUARULHOS / SP</a:t>
                       </a:r>
                     </a:p>
                   </a:txBody>
@@ -9035,7 +10439,7 @@
                           </a:solidFill>
                           <a:latin typeface="Calibri"/>
                         </a:rPr>
-                        <a:t>3</a:t>
+                        <a:t>2</a:t>
                       </a:r>
                     </a:p>
                   </a:txBody>
@@ -9058,7 +10462,7 @@
                           </a:solidFill>
                           <a:latin typeface="Calibri"/>
                         </a:rPr>
-                        <a:t>3</a:t>
+                        <a:t>2</a:t>
                       </a:r>
                     </a:p>
                   </a:txBody>
